--- a/Modelling portfolio.pptx
+++ b/Modelling portfolio.pptx
@@ -9,6 +9,10 @@
     <p:sldId id="257" r:id="rId3"/>
     <p:sldId id="258" r:id="rId4"/>
     <p:sldId id="259" r:id="rId5"/>
+    <p:sldId id="260" r:id="rId6"/>
+    <p:sldId id="263" r:id="rId7"/>
+    <p:sldId id="264" r:id="rId8"/>
+    <p:sldId id="265" r:id="rId9"/>
   </p:sldIdLst>
   <p:sldSz cx="12192000" cy="6858000"/>
   <p:notesSz cx="6858000" cy="9144000"/>
@@ -107,6 +111,11 @@
       </a:defRPr>
     </a:lvl9pPr>
   </p:defaultTextStyle>
+  <p:extLst>
+    <p:ext uri="{EFAFB233-063F-42B5-8137-9DF3F51BA10A}">
+      <p15:sldGuideLst xmlns:p15="http://schemas.microsoft.com/office/powerpoint/2012/main"/>
+    </p:ext>
+  </p:extLst>
 </p:presentation>
 </file>
 
@@ -259,7 +268,7 @@
           <a:p>
             <a:fld id="{91A383FA-0073-4418-B5D6-6F8F732339E7}" type="datetimeFigureOut">
               <a:rPr lang="en-GB" smtClean="0"/>
-              <a:t>24/04/2026</a:t>
+              <a:t>26/04/2026</a:t>
             </a:fld>
             <a:endParaRPr lang="en-GB"/>
           </a:p>
@@ -459,7 +468,7 @@
           <a:p>
             <a:fld id="{91A383FA-0073-4418-B5D6-6F8F732339E7}" type="datetimeFigureOut">
               <a:rPr lang="en-GB" smtClean="0"/>
-              <a:t>24/04/2026</a:t>
+              <a:t>26/04/2026</a:t>
             </a:fld>
             <a:endParaRPr lang="en-GB"/>
           </a:p>
@@ -669,7 +678,7 @@
           <a:p>
             <a:fld id="{91A383FA-0073-4418-B5D6-6F8F732339E7}" type="datetimeFigureOut">
               <a:rPr lang="en-GB" smtClean="0"/>
-              <a:t>24/04/2026</a:t>
+              <a:t>26/04/2026</a:t>
             </a:fld>
             <a:endParaRPr lang="en-GB"/>
           </a:p>
@@ -869,7 +878,7 @@
           <a:p>
             <a:fld id="{91A383FA-0073-4418-B5D6-6F8F732339E7}" type="datetimeFigureOut">
               <a:rPr lang="en-GB" smtClean="0"/>
-              <a:t>24/04/2026</a:t>
+              <a:t>26/04/2026</a:t>
             </a:fld>
             <a:endParaRPr lang="en-GB"/>
           </a:p>
@@ -1145,7 +1154,7 @@
           <a:p>
             <a:fld id="{91A383FA-0073-4418-B5D6-6F8F732339E7}" type="datetimeFigureOut">
               <a:rPr lang="en-GB" smtClean="0"/>
-              <a:t>24/04/2026</a:t>
+              <a:t>26/04/2026</a:t>
             </a:fld>
             <a:endParaRPr lang="en-GB"/>
           </a:p>
@@ -1413,7 +1422,7 @@
           <a:p>
             <a:fld id="{91A383FA-0073-4418-B5D6-6F8F732339E7}" type="datetimeFigureOut">
               <a:rPr lang="en-GB" smtClean="0"/>
-              <a:t>24/04/2026</a:t>
+              <a:t>26/04/2026</a:t>
             </a:fld>
             <a:endParaRPr lang="en-GB"/>
           </a:p>
@@ -1828,7 +1837,7 @@
           <a:p>
             <a:fld id="{91A383FA-0073-4418-B5D6-6F8F732339E7}" type="datetimeFigureOut">
               <a:rPr lang="en-GB" smtClean="0"/>
-              <a:t>24/04/2026</a:t>
+              <a:t>26/04/2026</a:t>
             </a:fld>
             <a:endParaRPr lang="en-GB"/>
           </a:p>
@@ -1970,7 +1979,7 @@
           <a:p>
             <a:fld id="{91A383FA-0073-4418-B5D6-6F8F732339E7}" type="datetimeFigureOut">
               <a:rPr lang="en-GB" smtClean="0"/>
-              <a:t>24/04/2026</a:t>
+              <a:t>26/04/2026</a:t>
             </a:fld>
             <a:endParaRPr lang="en-GB"/>
           </a:p>
@@ -2083,7 +2092,7 @@
           <a:p>
             <a:fld id="{91A383FA-0073-4418-B5D6-6F8F732339E7}" type="datetimeFigureOut">
               <a:rPr lang="en-GB" smtClean="0"/>
-              <a:t>24/04/2026</a:t>
+              <a:t>26/04/2026</a:t>
             </a:fld>
             <a:endParaRPr lang="en-GB"/>
           </a:p>
@@ -2396,7 +2405,7 @@
           <a:p>
             <a:fld id="{91A383FA-0073-4418-B5D6-6F8F732339E7}" type="datetimeFigureOut">
               <a:rPr lang="en-GB" smtClean="0"/>
-              <a:t>24/04/2026</a:t>
+              <a:t>26/04/2026</a:t>
             </a:fld>
             <a:endParaRPr lang="en-GB"/>
           </a:p>
@@ -2685,7 +2694,7 @@
           <a:p>
             <a:fld id="{91A383FA-0073-4418-B5D6-6F8F732339E7}" type="datetimeFigureOut">
               <a:rPr lang="en-GB" smtClean="0"/>
-              <a:t>24/04/2026</a:t>
+              <a:t>26/04/2026</a:t>
             </a:fld>
             <a:endParaRPr lang="en-GB"/>
           </a:p>
@@ -2928,7 +2937,7 @@
           <a:p>
             <a:fld id="{91A383FA-0073-4418-B5D6-6F8F732339E7}" type="datetimeFigureOut">
               <a:rPr lang="en-GB" smtClean="0"/>
-              <a:t>24/04/2026</a:t>
+              <a:t>26/04/2026</a:t>
             </a:fld>
             <a:endParaRPr lang="en-GB"/>
           </a:p>
@@ -3331,6 +3340,14 @@
 <file path=ppt/slides/slide1.xml><?xml version="1.0" encoding="utf-8"?>
 <p:sld xmlns:a="http://schemas.openxmlformats.org/drawingml/2006/main" xmlns:r="http://schemas.openxmlformats.org/officeDocument/2006/relationships" xmlns:p="http://schemas.openxmlformats.org/presentationml/2006/main">
   <p:cSld>
+    <p:bg>
+      <p:bgPr>
+        <a:solidFill>
+          <a:schemeClr val="bg1"/>
+        </a:solidFill>
+        <a:effectLst/>
+      </p:bgPr>
+    </p:bg>
     <p:spTree>
       <p:nvGrpSpPr>
         <p:cNvPr id="1" name=""/>
@@ -3345,6 +3362,384 @@
           <a:chExt cx="0" cy="0"/>
         </a:xfrm>
       </p:grpSpPr>
+      <p:sp useBgFill="1">
+        <p:nvSpPr>
+          <p:cNvPr id="8" name="Rectangle 7">
+            <a:extLst>
+              <a:ext uri="{FF2B5EF4-FFF2-40B4-BE49-F238E27FC236}">
+                <a16:creationId xmlns:a16="http://schemas.microsoft.com/office/drawing/2014/main" id="{0E30439A-8A5B-46EC-8283-9B6B031D40D0}"/>
+              </a:ext>
+              <a:ext uri="{C183D7F6-B498-43B3-948B-1728B52AA6E4}">
+                <adec:decorative xmlns:adec="http://schemas.microsoft.com/office/drawing/2017/decorative" val="1"/>
+              </a:ext>
+            </a:extLst>
+          </p:cNvPr>
+          <p:cNvSpPr>
+            <a:spLocks noGrp="1" noRot="1" noChangeAspect="1" noMove="1" noResize="1" noEditPoints="1" noAdjustHandles="1" noChangeArrowheads="1" noChangeShapeType="1" noTextEdit="1"/>
+          </p:cNvSpPr>
+          <p:nvPr>
+            <p:extLst>
+              <p:ext uri="{386F3935-93C4-4BCD-93E2-E3B085C9AB24}">
+                <p16:designElem xmlns:p16="http://schemas.microsoft.com/office/powerpoint/2015/main" val="1"/>
+              </p:ext>
+            </p:extLst>
+          </p:nvPr>
+        </p:nvSpPr>
+        <p:spPr>
+          <a:xfrm>
+            <a:off x="0" y="0"/>
+            <a:ext cx="12192000" cy="6858000"/>
+          </a:xfrm>
+          <a:prstGeom prst="rect">
+            <a:avLst/>
+          </a:prstGeom>
+          <a:ln w="12700" cap="flat" cmpd="sng" algn="ctr">
+            <a:noFill/>
+            <a:prstDash val="solid"/>
+            <a:miter lim="800000"/>
+          </a:ln>
+          <a:effectLst/>
+          <a:extLst>
+            <a:ext uri="{91240B29-F687-4F45-9708-019B960494DF}">
+              <a14:hiddenLine xmlns:a14="http://schemas.microsoft.com/office/drawing/2010/main" w="12700" cap="flat" cmpd="sng" algn="ctr">
+                <a:solidFill>
+                  <a:schemeClr val="accent1">
+                    <a:shade val="50000"/>
+                  </a:schemeClr>
+                </a:solidFill>
+                <a:prstDash val="solid"/>
+                <a:miter lim="800000"/>
+              </a14:hiddenLine>
+            </a:ext>
+          </a:extLst>
+        </p:spPr>
+        <p:style>
+          <a:lnRef idx="2">
+            <a:schemeClr val="accent1">
+              <a:shade val="50000"/>
+            </a:schemeClr>
+          </a:lnRef>
+          <a:fillRef idx="1">
+            <a:schemeClr val="accent1"/>
+          </a:fillRef>
+          <a:effectRef idx="0">
+            <a:schemeClr val="accent1"/>
+          </a:effectRef>
+          <a:fontRef idx="minor">
+            <a:schemeClr val="lt1"/>
+          </a:fontRef>
+        </p:style>
+        <p:txBody>
+          <a:bodyPr rtlCol="0" anchor="ctr"/>
+          <a:lstStyle/>
+          <a:p>
+            <a:pPr algn="ctr"/>
+            <a:endParaRPr lang="en-US"/>
+          </a:p>
+        </p:txBody>
+      </p:sp>
+      <p:sp>
+        <p:nvSpPr>
+          <p:cNvPr id="10" name="Rectangle 9">
+            <a:extLst>
+              <a:ext uri="{FF2B5EF4-FFF2-40B4-BE49-F238E27FC236}">
+                <a16:creationId xmlns:a16="http://schemas.microsoft.com/office/drawing/2014/main" id="{5CEAD642-85CF-4750-8432-7C80C901F001}"/>
+              </a:ext>
+              <a:ext uri="{C183D7F6-B498-43B3-948B-1728B52AA6E4}">
+                <adec:decorative xmlns:adec="http://schemas.microsoft.com/office/drawing/2017/decorative" val="1"/>
+              </a:ext>
+            </a:extLst>
+          </p:cNvPr>
+          <p:cNvSpPr>
+            <a:spLocks noGrp="1" noRot="1" noChangeAspect="1" noMove="1" noResize="1" noEditPoints="1" noAdjustHandles="1" noChangeArrowheads="1" noChangeShapeType="1" noTextEdit="1"/>
+          </p:cNvSpPr>
+          <p:nvPr>
+            <p:extLst>
+              <p:ext uri="{386F3935-93C4-4BCD-93E2-E3B085C9AB24}">
+                <p16:designElem xmlns:p16="http://schemas.microsoft.com/office/powerpoint/2015/main" val="1"/>
+              </p:ext>
+            </p:extLst>
+          </p:nvPr>
+        </p:nvSpPr>
+        <p:spPr>
+          <a:xfrm>
+            <a:off x="0" y="-427"/>
+            <a:ext cx="12192001" cy="6858000"/>
+          </a:xfrm>
+          <a:prstGeom prst="rect">
+            <a:avLst/>
+          </a:prstGeom>
+          <a:gradFill>
+            <a:gsLst>
+              <a:gs pos="0">
+                <a:srgbClr val="000000"/>
+              </a:gs>
+              <a:gs pos="100000">
+                <a:schemeClr val="accent1">
+                  <a:lumMod val="75000"/>
+                </a:schemeClr>
+              </a:gs>
+            </a:gsLst>
+            <a:lin ang="15000000" scaled="0"/>
+          </a:gradFill>
+          <a:ln>
+            <a:noFill/>
+          </a:ln>
+        </p:spPr>
+        <p:style>
+          <a:lnRef idx="2">
+            <a:schemeClr val="accent1">
+              <a:shade val="50000"/>
+            </a:schemeClr>
+          </a:lnRef>
+          <a:fillRef idx="1">
+            <a:schemeClr val="accent1"/>
+          </a:fillRef>
+          <a:effectRef idx="0">
+            <a:schemeClr val="accent1"/>
+          </a:effectRef>
+          <a:fontRef idx="minor">
+            <a:schemeClr val="lt1"/>
+          </a:fontRef>
+        </p:style>
+        <p:txBody>
+          <a:bodyPr rtlCol="0" anchor="ctr"/>
+          <a:lstStyle/>
+          <a:p>
+            <a:pPr algn="ctr"/>
+            <a:endParaRPr lang="en-US"/>
+          </a:p>
+        </p:txBody>
+      </p:sp>
+      <p:sp>
+        <p:nvSpPr>
+          <p:cNvPr id="12" name="Rectangle 11">
+            <a:extLst>
+              <a:ext uri="{FF2B5EF4-FFF2-40B4-BE49-F238E27FC236}">
+                <a16:creationId xmlns:a16="http://schemas.microsoft.com/office/drawing/2014/main" id="{FA33EEAE-15D5-4119-8C1E-89D943F911EF}"/>
+              </a:ext>
+              <a:ext uri="{C183D7F6-B498-43B3-948B-1728B52AA6E4}">
+                <adec:decorative xmlns:adec="http://schemas.microsoft.com/office/drawing/2017/decorative" val="1"/>
+              </a:ext>
+            </a:extLst>
+          </p:cNvPr>
+          <p:cNvSpPr>
+            <a:spLocks noGrp="1" noRot="1" noChangeAspect="1" noMove="1" noResize="1" noEditPoints="1" noAdjustHandles="1" noChangeArrowheads="1" noChangeShapeType="1" noTextEdit="1"/>
+          </p:cNvSpPr>
+          <p:nvPr>
+            <p:extLst>
+              <p:ext uri="{386F3935-93C4-4BCD-93E2-E3B085C9AB24}">
+                <p16:designElem xmlns:p16="http://schemas.microsoft.com/office/powerpoint/2015/main" val="1"/>
+              </p:ext>
+            </p:extLst>
+          </p:nvPr>
+        </p:nvSpPr>
+        <p:spPr>
+          <a:xfrm rot="10800000" flipH="1">
+            <a:off x="455521" y="-1720"/>
+            <a:ext cx="11750040" cy="6840685"/>
+          </a:xfrm>
+          <a:prstGeom prst="rect">
+            <a:avLst/>
+          </a:prstGeom>
+          <a:gradFill>
+            <a:gsLst>
+              <a:gs pos="21000">
+                <a:schemeClr val="accent1">
+                  <a:lumMod val="50000"/>
+                  <a:alpha val="61000"/>
+                </a:schemeClr>
+              </a:gs>
+              <a:gs pos="100000">
+                <a:schemeClr val="accent1">
+                  <a:alpha val="0"/>
+                </a:schemeClr>
+              </a:gs>
+            </a:gsLst>
+            <a:lin ang="21594000" scaled="0"/>
+          </a:gradFill>
+          <a:ln>
+            <a:noFill/>
+          </a:ln>
+        </p:spPr>
+        <p:style>
+          <a:lnRef idx="2">
+            <a:schemeClr val="accent1">
+              <a:shade val="50000"/>
+            </a:schemeClr>
+          </a:lnRef>
+          <a:fillRef idx="1">
+            <a:schemeClr val="accent1"/>
+          </a:fillRef>
+          <a:effectRef idx="0">
+            <a:schemeClr val="accent1"/>
+          </a:effectRef>
+          <a:fontRef idx="minor">
+            <a:schemeClr val="lt1"/>
+          </a:fontRef>
+        </p:style>
+        <p:txBody>
+          <a:bodyPr rtlCol="0" anchor="ctr"/>
+          <a:lstStyle/>
+          <a:p>
+            <a:pPr algn="ctr"/>
+            <a:endParaRPr lang="en-US"/>
+          </a:p>
+        </p:txBody>
+      </p:sp>
+      <p:sp>
+        <p:nvSpPr>
+          <p:cNvPr id="14" name="Rectangle 13">
+            <a:extLst>
+              <a:ext uri="{FF2B5EF4-FFF2-40B4-BE49-F238E27FC236}">
+                <a16:creationId xmlns:a16="http://schemas.microsoft.com/office/drawing/2014/main" id="{730D8B3B-9B80-4025-B934-26DC7D7CD231}"/>
+              </a:ext>
+              <a:ext uri="{C183D7F6-B498-43B3-948B-1728B52AA6E4}">
+                <adec:decorative xmlns:adec="http://schemas.microsoft.com/office/drawing/2017/decorative" val="1"/>
+              </a:ext>
+            </a:extLst>
+          </p:cNvPr>
+          <p:cNvSpPr>
+            <a:spLocks noGrp="1" noRot="1" noChangeAspect="1" noMove="1" noResize="1" noEditPoints="1" noAdjustHandles="1" noChangeArrowheads="1" noChangeShapeType="1" noTextEdit="1"/>
+          </p:cNvSpPr>
+          <p:nvPr>
+            <p:extLst>
+              <p:ext uri="{386F3935-93C4-4BCD-93E2-E3B085C9AB24}">
+                <p16:designElem xmlns:p16="http://schemas.microsoft.com/office/powerpoint/2015/main" val="1"/>
+              </p:ext>
+            </p:extLst>
+          </p:nvPr>
+        </p:nvSpPr>
+        <p:spPr>
+          <a:xfrm>
+            <a:off x="8606054" y="-1291"/>
+            <a:ext cx="3608179" cy="6858864"/>
+          </a:xfrm>
+          <a:prstGeom prst="rect">
+            <a:avLst/>
+          </a:prstGeom>
+          <a:gradFill>
+            <a:gsLst>
+              <a:gs pos="0">
+                <a:schemeClr val="accent1">
+                  <a:lumMod val="75000"/>
+                  <a:alpha val="0"/>
+                </a:schemeClr>
+              </a:gs>
+              <a:gs pos="99000">
+                <a:srgbClr val="000000">
+                  <a:alpha val="41000"/>
+                </a:srgbClr>
+              </a:gs>
+            </a:gsLst>
+            <a:lin ang="16200000" scaled="0"/>
+          </a:gradFill>
+          <a:ln>
+            <a:noFill/>
+          </a:ln>
+        </p:spPr>
+        <p:style>
+          <a:lnRef idx="2">
+            <a:schemeClr val="accent1">
+              <a:shade val="50000"/>
+            </a:schemeClr>
+          </a:lnRef>
+          <a:fillRef idx="1">
+            <a:schemeClr val="accent1"/>
+          </a:fillRef>
+          <a:effectRef idx="0">
+            <a:schemeClr val="accent1"/>
+          </a:effectRef>
+          <a:fontRef idx="minor">
+            <a:schemeClr val="lt1"/>
+          </a:fontRef>
+        </p:style>
+        <p:txBody>
+          <a:bodyPr rtlCol="0" anchor="ctr"/>
+          <a:lstStyle/>
+          <a:p>
+            <a:pPr algn="ctr"/>
+            <a:endParaRPr lang="en-US"/>
+          </a:p>
+        </p:txBody>
+      </p:sp>
+      <p:sp>
+        <p:nvSpPr>
+          <p:cNvPr id="16" name="Oval 15">
+            <a:extLst>
+              <a:ext uri="{FF2B5EF4-FFF2-40B4-BE49-F238E27FC236}">
+                <a16:creationId xmlns:a16="http://schemas.microsoft.com/office/drawing/2014/main" id="{B5A1B09C-1565-46F8-B70F-621C5EB48A09}"/>
+              </a:ext>
+              <a:ext uri="{C183D7F6-B498-43B3-948B-1728B52AA6E4}">
+                <adec:decorative xmlns:adec="http://schemas.microsoft.com/office/drawing/2017/decorative" val="1"/>
+              </a:ext>
+            </a:extLst>
+          </p:cNvPr>
+          <p:cNvSpPr>
+            <a:spLocks noGrp="1" noRot="1" noChangeAspect="1" noMove="1" noResize="1" noEditPoints="1" noAdjustHandles="1" noChangeArrowheads="1" noChangeShapeType="1" noTextEdit="1"/>
+          </p:cNvSpPr>
+          <p:nvPr>
+            <p:extLst>
+              <p:ext uri="{386F3935-93C4-4BCD-93E2-E3B085C9AB24}">
+                <p16:designElem xmlns:p16="http://schemas.microsoft.com/office/powerpoint/2015/main" val="1"/>
+              </p:ext>
+            </p:extLst>
+          </p:nvPr>
+        </p:nvSpPr>
+        <p:spPr>
+          <a:xfrm rot="15274173">
+            <a:off x="6059728" y="779270"/>
+            <a:ext cx="4967533" cy="4988390"/>
+          </a:xfrm>
+          <a:prstGeom prst="ellipse">
+            <a:avLst/>
+          </a:prstGeom>
+          <a:gradFill>
+            <a:gsLst>
+              <a:gs pos="0">
+                <a:schemeClr val="accent1">
+                  <a:alpha val="24000"/>
+                </a:schemeClr>
+              </a:gs>
+              <a:gs pos="79000">
+                <a:schemeClr val="accent1">
+                  <a:lumMod val="60000"/>
+                  <a:lumOff val="40000"/>
+                  <a:alpha val="0"/>
+                </a:schemeClr>
+              </a:gs>
+            </a:gsLst>
+            <a:lin ang="14400000" scaled="0"/>
+          </a:gradFill>
+          <a:ln>
+            <a:noFill/>
+          </a:ln>
+        </p:spPr>
+        <p:style>
+          <a:lnRef idx="2">
+            <a:schemeClr val="accent1">
+              <a:shade val="50000"/>
+            </a:schemeClr>
+          </a:lnRef>
+          <a:fillRef idx="1">
+            <a:schemeClr val="accent1"/>
+          </a:fillRef>
+          <a:effectRef idx="0">
+            <a:schemeClr val="accent1"/>
+          </a:effectRef>
+          <a:fontRef idx="minor">
+            <a:schemeClr val="lt1"/>
+          </a:fontRef>
+        </p:style>
+        <p:txBody>
+          <a:bodyPr rtlCol="0" anchor="ctr"/>
+          <a:lstStyle/>
+          <a:p>
+            <a:pPr algn="ctr"/>
+            <a:endParaRPr lang="en-US" dirty="0"/>
+          </a:p>
+        </p:txBody>
+      </p:sp>
       <p:sp>
         <p:nvSpPr>
           <p:cNvPr id="2" name="Title 1">
@@ -3361,13 +3756,25 @@
             <p:ph type="ctrTitle"/>
           </p:nvPr>
         </p:nvSpPr>
-        <p:spPr/>
-        <p:txBody>
-          <a:bodyPr/>
-          <a:lstStyle/>
-          <a:p>
+        <p:spPr>
+          <a:xfrm>
+            <a:off x="1386865" y="818984"/>
+            <a:ext cx="6596245" cy="3268520"/>
+          </a:xfrm>
+        </p:spPr>
+        <p:txBody>
+          <a:bodyPr>
+            <a:normAutofit/>
+          </a:bodyPr>
+          <a:lstStyle/>
+          <a:p>
+            <a:pPr algn="r"/>
             <a:r>
-              <a:rPr lang="en-GB" dirty="0"/>
+              <a:rPr lang="en-GB" sz="4800">
+                <a:solidFill>
+                  <a:srgbClr val="FFFFFF"/>
+                </a:solidFill>
+              </a:rPr>
               <a:t>3D Modelling </a:t>
             </a:r>
           </a:p>
@@ -3375,6 +3782,82 @@
       </p:sp>
       <p:sp>
         <p:nvSpPr>
+          <p:cNvPr id="18" name="Rectangle 17">
+            <a:extLst>
+              <a:ext uri="{FF2B5EF4-FFF2-40B4-BE49-F238E27FC236}">
+                <a16:creationId xmlns:a16="http://schemas.microsoft.com/office/drawing/2014/main" id="{8C516CC8-80AC-446C-A56E-9F54B7210402}"/>
+              </a:ext>
+              <a:ext uri="{C183D7F6-B498-43B3-948B-1728B52AA6E4}">
+                <adec:decorative xmlns:adec="http://schemas.microsoft.com/office/drawing/2017/decorative" val="1"/>
+              </a:ext>
+            </a:extLst>
+          </p:cNvPr>
+          <p:cNvSpPr>
+            <a:spLocks noGrp="1" noRot="1" noChangeAspect="1" noMove="1" noResize="1" noEditPoints="1" noAdjustHandles="1" noChangeArrowheads="1" noChangeShapeType="1" noTextEdit="1"/>
+          </p:cNvSpPr>
+          <p:nvPr>
+            <p:extLst>
+              <p:ext uri="{386F3935-93C4-4BCD-93E2-E3B085C9AB24}">
+                <p16:designElem xmlns:p16="http://schemas.microsoft.com/office/powerpoint/2015/main" val="1"/>
+              </p:ext>
+            </p:extLst>
+          </p:nvPr>
+        </p:nvSpPr>
+        <p:spPr>
+          <a:xfrm rot="10800000" flipH="1">
+            <a:off x="6314" y="4480038"/>
+            <a:ext cx="12179371" cy="2377962"/>
+          </a:xfrm>
+          <a:prstGeom prst="rect">
+            <a:avLst/>
+          </a:prstGeom>
+          <a:gradFill>
+            <a:gsLst>
+              <a:gs pos="0">
+                <a:schemeClr val="accent1">
+                  <a:lumMod val="75000"/>
+                  <a:alpha val="50000"/>
+                </a:schemeClr>
+              </a:gs>
+              <a:gs pos="99000">
+                <a:srgbClr val="000000">
+                  <a:alpha val="34000"/>
+                </a:srgbClr>
+              </a:gs>
+            </a:gsLst>
+            <a:lin ang="17400000" scaled="0"/>
+          </a:gradFill>
+          <a:ln>
+            <a:noFill/>
+          </a:ln>
+        </p:spPr>
+        <p:style>
+          <a:lnRef idx="2">
+            <a:schemeClr val="accent1">
+              <a:shade val="50000"/>
+            </a:schemeClr>
+          </a:lnRef>
+          <a:fillRef idx="1">
+            <a:schemeClr val="accent1"/>
+          </a:fillRef>
+          <a:effectRef idx="0">
+            <a:schemeClr val="accent1"/>
+          </a:effectRef>
+          <a:fontRef idx="minor">
+            <a:schemeClr val="lt1"/>
+          </a:fontRef>
+        </p:style>
+        <p:txBody>
+          <a:bodyPr rtlCol="0" anchor="ctr"/>
+          <a:lstStyle/>
+          <a:p>
+            <a:pPr algn="ctr"/>
+            <a:endParaRPr lang="en-US"/>
+          </a:p>
+        </p:txBody>
+      </p:sp>
+      <p:sp>
+        <p:nvSpPr>
           <p:cNvPr id="3" name="Subtitle 2">
             <a:extLst>
               <a:ext uri="{FF2B5EF4-FFF2-40B4-BE49-F238E27FC236}">
@@ -3389,15 +3872,103 @@
             <p:ph type="subTitle" idx="1"/>
           </p:nvPr>
         </p:nvSpPr>
-        <p:spPr/>
-        <p:txBody>
-          <a:bodyPr/>
-          <a:lstStyle/>
-          <a:p>
+        <p:spPr>
+          <a:xfrm>
+            <a:off x="1931874" y="4797188"/>
+            <a:ext cx="6051236" cy="1241828"/>
+          </a:xfrm>
+        </p:spPr>
+        <p:txBody>
+          <a:bodyPr>
+            <a:normAutofit/>
+          </a:bodyPr>
+          <a:lstStyle/>
+          <a:p>
+            <a:pPr algn="r"/>
             <a:r>
-              <a:rPr lang="en-GB" dirty="0"/>
+              <a:rPr lang="en-GB">
+                <a:solidFill>
+                  <a:srgbClr val="FFFFFF"/>
+                </a:solidFill>
+              </a:rPr>
               <a:t>3D Silo modelling project by Clay Johnson - 25134410</a:t>
             </a:r>
+          </a:p>
+        </p:txBody>
+      </p:sp>
+      <p:sp>
+        <p:nvSpPr>
+          <p:cNvPr id="20" name="Rectangle 19">
+            <a:extLst>
+              <a:ext uri="{FF2B5EF4-FFF2-40B4-BE49-F238E27FC236}">
+                <a16:creationId xmlns:a16="http://schemas.microsoft.com/office/drawing/2014/main" id="{53947E58-F088-49F1-A3D1-DEA690192E84}"/>
+              </a:ext>
+              <a:ext uri="{C183D7F6-B498-43B3-948B-1728B52AA6E4}">
+                <adec:decorative xmlns:adec="http://schemas.microsoft.com/office/drawing/2017/decorative" val="1"/>
+              </a:ext>
+            </a:extLst>
+          </p:cNvPr>
+          <p:cNvSpPr>
+            <a:spLocks noGrp="1" noRot="1" noChangeAspect="1" noMove="1" noResize="1" noEditPoints="1" noAdjustHandles="1" noChangeArrowheads="1" noChangeShapeType="1" noTextEdit="1"/>
+          </p:cNvSpPr>
+          <p:nvPr>
+            <p:extLst>
+              <p:ext uri="{386F3935-93C4-4BCD-93E2-E3B085C9AB24}">
+                <p16:designElem xmlns:p16="http://schemas.microsoft.com/office/powerpoint/2015/main" val="1"/>
+              </p:ext>
+            </p:extLst>
+          </p:nvPr>
+        </p:nvSpPr>
+        <p:spPr>
+          <a:xfrm rot="16200000" flipH="1">
+            <a:off x="6967085" y="1632660"/>
+            <a:ext cx="6857572" cy="3592258"/>
+          </a:xfrm>
+          <a:prstGeom prst="rect">
+            <a:avLst/>
+          </a:prstGeom>
+          <a:gradFill>
+            <a:gsLst>
+              <a:gs pos="0">
+                <a:schemeClr val="accent1">
+                  <a:lumMod val="75000"/>
+                  <a:alpha val="50000"/>
+                </a:schemeClr>
+              </a:gs>
+              <a:gs pos="99000">
+                <a:srgbClr val="000000">
+                  <a:alpha val="0"/>
+                </a:srgbClr>
+              </a:gs>
+            </a:gsLst>
+            <a:lin ang="15600000" scaled="0"/>
+          </a:gradFill>
+          <a:ln>
+            <a:noFill/>
+          </a:ln>
+        </p:spPr>
+        <p:style>
+          <a:lnRef idx="2">
+            <a:schemeClr val="accent1">
+              <a:shade val="50000"/>
+            </a:schemeClr>
+          </a:lnRef>
+          <a:fillRef idx="1">
+            <a:schemeClr val="accent1"/>
+          </a:fillRef>
+          <a:effectRef idx="0">
+            <a:schemeClr val="accent1"/>
+          </a:effectRef>
+          <a:fontRef idx="minor">
+            <a:schemeClr val="lt1"/>
+          </a:fontRef>
+        </p:style>
+        <p:txBody>
+          <a:bodyPr rtlCol="0" anchor="ctr"/>
+          <a:lstStyle/>
+          <a:p>
+            <a:pPr algn="ctr"/>
+            <a:endParaRPr lang="en-US"/>
           </a:p>
         </p:txBody>
       </p:sp>
@@ -3411,12 +3982,159 @@
   <p:clrMapOvr>
     <a:masterClrMapping/>
   </p:clrMapOvr>
+  <p:timing>
+    <p:tnLst>
+      <p:par>
+        <p:cTn id="1" dur="indefinite" restart="never" nodeType="tmRoot">
+          <p:childTnLst>
+            <p:seq concurrent="1" nextAc="seek">
+              <p:cTn id="2" dur="indefinite" nodeType="mainSeq">
+                <p:childTnLst>
+                  <p:par>
+                    <p:cTn id="3" fill="hold">
+                      <p:stCondLst>
+                        <p:cond delay="indefinite"/>
+                        <p:cond evt="onBegin" delay="0">
+                          <p:tn val="2"/>
+                        </p:cond>
+                      </p:stCondLst>
+                      <p:childTnLst>
+                        <p:par>
+                          <p:cTn id="4" fill="hold">
+                            <p:stCondLst>
+                              <p:cond delay="0"/>
+                            </p:stCondLst>
+                            <p:childTnLst>
+                              <p:par>
+                                <p:cTn id="5" presetID="10" presetClass="entr" presetSubtype="0" fill="hold" grpId="0" nodeType="withEffect">
+                                  <p:stCondLst>
+                                    <p:cond delay="500"/>
+                                  </p:stCondLst>
+                                  <p:iterate>
+                                    <p:tmPct val="10000"/>
+                                  </p:iterate>
+                                  <p:childTnLst>
+                                    <p:set>
+                                      <p:cBhvr>
+                                        <p:cTn id="6" dur="1" fill="hold">
+                                          <p:stCondLst>
+                                            <p:cond delay="0"/>
+                                          </p:stCondLst>
+                                        </p:cTn>
+                                        <p:tgtEl>
+                                          <p:spTgt spid="2"/>
+                                        </p:tgtEl>
+                                        <p:attrNameLst>
+                                          <p:attrName>style.visibility</p:attrName>
+                                        </p:attrNameLst>
+                                      </p:cBhvr>
+                                      <p:to>
+                                        <p:strVal val="visible"/>
+                                      </p:to>
+                                    </p:set>
+                                    <p:animEffect transition="in" filter="fade">
+                                      <p:cBhvr>
+                                        <p:cTn id="7" dur="700"/>
+                                        <p:tgtEl>
+                                          <p:spTgt spid="2"/>
+                                        </p:tgtEl>
+                                      </p:cBhvr>
+                                    </p:animEffect>
+                                  </p:childTnLst>
+                                </p:cTn>
+                              </p:par>
+                              <p:par>
+                                <p:cTn id="8" presetID="10" presetClass="entr" presetSubtype="0" fill="hold" grpId="0" nodeType="withEffect">
+                                  <p:stCondLst>
+                                    <p:cond delay="1000"/>
+                                  </p:stCondLst>
+                                  <p:iterate>
+                                    <p:tmPct val="10000"/>
+                                  </p:iterate>
+                                  <p:childTnLst>
+                                    <p:set>
+                                      <p:cBhvr>
+                                        <p:cTn id="9" dur="1" fill="hold">
+                                          <p:stCondLst>
+                                            <p:cond delay="0"/>
+                                          </p:stCondLst>
+                                        </p:cTn>
+                                        <p:tgtEl>
+                                          <p:spTgt spid="3">
+                                            <p:txEl>
+                                              <p:pRg st="0" end="0"/>
+                                            </p:txEl>
+                                          </p:spTgt>
+                                        </p:tgtEl>
+                                        <p:attrNameLst>
+                                          <p:attrName>style.visibility</p:attrName>
+                                        </p:attrNameLst>
+                                      </p:cBhvr>
+                                      <p:to>
+                                        <p:strVal val="visible"/>
+                                      </p:to>
+                                    </p:set>
+                                    <p:animEffect transition="in" filter="fade">
+                                      <p:cBhvr>
+                                        <p:cTn id="10" dur="700"/>
+                                        <p:tgtEl>
+                                          <p:spTgt spid="3">
+                                            <p:txEl>
+                                              <p:pRg st="0" end="0"/>
+                                            </p:txEl>
+                                          </p:spTgt>
+                                        </p:tgtEl>
+                                      </p:cBhvr>
+                                    </p:animEffect>
+                                  </p:childTnLst>
+                                </p:cTn>
+                              </p:par>
+                            </p:childTnLst>
+                          </p:cTn>
+                        </p:par>
+                      </p:childTnLst>
+                    </p:cTn>
+                  </p:par>
+                </p:childTnLst>
+              </p:cTn>
+              <p:prevCondLst>
+                <p:cond evt="onPrev" delay="0">
+                  <p:tgtEl>
+                    <p:sldTgt/>
+                  </p:tgtEl>
+                </p:cond>
+              </p:prevCondLst>
+              <p:nextCondLst>
+                <p:cond evt="onNext" delay="0">
+                  <p:tgtEl>
+                    <p:sldTgt/>
+                  </p:tgtEl>
+                </p:cond>
+              </p:nextCondLst>
+            </p:seq>
+          </p:childTnLst>
+        </p:cTn>
+      </p:par>
+    </p:tnLst>
+    <p:bldLst>
+      <p:bldP spid="2" grpId="0"/>
+      <p:bldP spid="3" grpId="0" build="p"/>
+    </p:bldLst>
+  </p:timing>
 </p:sld>
 </file>
 
 <file path=ppt/slides/slide2.xml><?xml version="1.0" encoding="utf-8"?>
 <p:sld xmlns:a="http://schemas.openxmlformats.org/drawingml/2006/main" xmlns:r="http://schemas.openxmlformats.org/officeDocument/2006/relationships" xmlns:p="http://schemas.openxmlformats.org/presentationml/2006/main">
   <p:cSld>
+    <p:bg>
+      <p:bgPr>
+        <a:solidFill>
+          <a:schemeClr val="bg1"/>
+        </a:solidFill>
+        <a:effectLst/>
+      </p:bgPr>
+    </p:bg>
     <p:spTree>
       <p:nvGrpSpPr>
         <p:cNvPr id="1" name=""/>
@@ -3431,6 +4149,82 @@
           <a:chExt cx="0" cy="0"/>
         </a:xfrm>
       </p:grpSpPr>
+      <p:sp useBgFill="1">
+        <p:nvSpPr>
+          <p:cNvPr id="12" name="Rectangle 11">
+            <a:extLst>
+              <a:ext uri="{FF2B5EF4-FFF2-40B4-BE49-F238E27FC236}">
+                <a16:creationId xmlns:a16="http://schemas.microsoft.com/office/drawing/2014/main" id="{12609869-9E80-471B-A487-A53288E0E791}"/>
+              </a:ext>
+              <a:ext uri="{C183D7F6-B498-43B3-948B-1728B52AA6E4}">
+                <adec:decorative xmlns:adec="http://schemas.microsoft.com/office/drawing/2017/decorative" val="1"/>
+              </a:ext>
+            </a:extLst>
+          </p:cNvPr>
+          <p:cNvSpPr>
+            <a:spLocks noGrp="1" noRot="1" noChangeAspect="1" noMove="1" noResize="1" noEditPoints="1" noAdjustHandles="1" noChangeArrowheads="1" noChangeShapeType="1" noTextEdit="1"/>
+          </p:cNvSpPr>
+          <p:nvPr>
+            <p:extLst>
+              <p:ext uri="{386F3935-93C4-4BCD-93E2-E3B085C9AB24}">
+                <p16:designElem xmlns:p16="http://schemas.microsoft.com/office/powerpoint/2015/main" val="1"/>
+              </p:ext>
+            </p:extLst>
+          </p:nvPr>
+        </p:nvSpPr>
+        <p:spPr>
+          <a:xfrm>
+            <a:off x="0" y="0"/>
+            <a:ext cx="12192000" cy="6858000"/>
+          </a:xfrm>
+          <a:prstGeom prst="rect">
+            <a:avLst/>
+          </a:prstGeom>
+          <a:ln w="12700" cap="flat" cmpd="sng" algn="ctr">
+            <a:noFill/>
+            <a:prstDash val="solid"/>
+            <a:miter lim="800000"/>
+          </a:ln>
+          <a:effectLst/>
+          <a:extLst>
+            <a:ext uri="{91240B29-F687-4F45-9708-019B960494DF}">
+              <a14:hiddenLine xmlns:a14="http://schemas.microsoft.com/office/drawing/2010/main" w="12700" cap="flat" cmpd="sng" algn="ctr">
+                <a:solidFill>
+                  <a:schemeClr val="accent1">
+                    <a:shade val="50000"/>
+                  </a:schemeClr>
+                </a:solidFill>
+                <a:prstDash val="solid"/>
+                <a:miter lim="800000"/>
+              </a14:hiddenLine>
+            </a:ext>
+          </a:extLst>
+        </p:spPr>
+        <p:style>
+          <a:lnRef idx="2">
+            <a:schemeClr val="accent1">
+              <a:shade val="50000"/>
+            </a:schemeClr>
+          </a:lnRef>
+          <a:fillRef idx="1">
+            <a:schemeClr val="accent1"/>
+          </a:fillRef>
+          <a:effectRef idx="0">
+            <a:schemeClr val="accent1"/>
+          </a:effectRef>
+          <a:fontRef idx="minor">
+            <a:schemeClr val="lt1"/>
+          </a:fontRef>
+        </p:style>
+        <p:txBody>
+          <a:bodyPr rtlCol="0" anchor="ctr"/>
+          <a:lstStyle/>
+          <a:p>
+            <a:pPr algn="ctr"/>
+            <a:endParaRPr lang="en-US"/>
+          </a:p>
+        </p:txBody>
+      </p:sp>
       <p:sp>
         <p:nvSpPr>
           <p:cNvPr id="2" name="Title 1">
@@ -3447,15 +4241,466 @@
             <p:ph type="title"/>
           </p:nvPr>
         </p:nvSpPr>
-        <p:spPr/>
-        <p:txBody>
-          <a:bodyPr/>
+        <p:spPr>
+          <a:xfrm>
+            <a:off x="1136397" y="502020"/>
+            <a:ext cx="5323715" cy="1642970"/>
+          </a:xfrm>
+        </p:spPr>
+        <p:txBody>
+          <a:bodyPr vert="horz" lIns="91440" tIns="45720" rIns="91440" bIns="45720" rtlCol="0" anchor="b">
+            <a:normAutofit/>
+          </a:bodyPr>
           <a:lstStyle/>
           <a:p>
             <a:r>
-              <a:rPr lang="en-GB" dirty="0"/>
+              <a:rPr lang="en-US" sz="4000" kern="1200">
+                <a:solidFill>
+                  <a:schemeClr val="tx1"/>
+                </a:solidFill>
+                <a:latin typeface="+mj-lt"/>
+                <a:ea typeface="+mj-ea"/>
+                <a:cs typeface="+mj-cs"/>
+              </a:rPr>
               <a:t>Task Assignment</a:t>
             </a:r>
+          </a:p>
+        </p:txBody>
+      </p:sp>
+      <p:sp>
+        <p:nvSpPr>
+          <p:cNvPr id="7" name="TextBox 6">
+            <a:extLst>
+              <a:ext uri="{FF2B5EF4-FFF2-40B4-BE49-F238E27FC236}">
+                <a16:creationId xmlns:a16="http://schemas.microsoft.com/office/drawing/2014/main" id="{5234FFB8-D65E-8DC6-AEC9-2647BC251AF3}"/>
+              </a:ext>
+            </a:extLst>
+          </p:cNvPr>
+          <p:cNvSpPr txBox="1"/>
+          <p:nvPr/>
+        </p:nvSpPr>
+        <p:spPr>
+          <a:xfrm>
+            <a:off x="1144923" y="2405894"/>
+            <a:ext cx="5315189" cy="3535083"/>
+          </a:xfrm>
+          <a:prstGeom prst="rect">
+            <a:avLst/>
+          </a:prstGeom>
+        </p:spPr>
+        <p:txBody>
+          <a:bodyPr vert="horz" lIns="91440" tIns="45720" rIns="91440" bIns="45720" rtlCol="0" anchor="t">
+            <a:normAutofit/>
+          </a:bodyPr>
+          <a:lstStyle/>
+          <a:p>
+            <a:pPr indent="-228600">
+              <a:lnSpc>
+                <a:spcPct val="90000"/>
+              </a:lnSpc>
+              <a:spcAft>
+                <a:spcPts val="600"/>
+              </a:spcAft>
+              <a:buFont typeface="Arial" panose="020B0604020202020204" pitchFamily="34" charset="0"/>
+              <a:buChar char="•"/>
+            </a:pPr>
+            <a:r>
+              <a:rPr lang="en-US" sz="1900"/>
+              <a:t> - The assigned task was to make our own 3D model of a silo by:</a:t>
+            </a:r>
+          </a:p>
+          <a:p>
+            <a:pPr indent="-228600">
+              <a:lnSpc>
+                <a:spcPct val="90000"/>
+              </a:lnSpc>
+              <a:spcAft>
+                <a:spcPts val="600"/>
+              </a:spcAft>
+              <a:buFont typeface="Arial" panose="020B0604020202020204" pitchFamily="34" charset="0"/>
+              <a:buChar char="•"/>
+            </a:pPr>
+            <a:endParaRPr lang="en-US" sz="1900"/>
+          </a:p>
+          <a:p>
+            <a:pPr indent="-228600">
+              <a:lnSpc>
+                <a:spcPct val="90000"/>
+              </a:lnSpc>
+              <a:spcAft>
+                <a:spcPts val="600"/>
+              </a:spcAft>
+              <a:buFont typeface="Arial" panose="020B0604020202020204" pitchFamily="34" charset="0"/>
+              <a:buChar char="•"/>
+            </a:pPr>
+            <a:r>
+              <a:rPr lang="en-US" sz="1900"/>
+              <a:t>-Using the Splash Damage art test silo as a reference</a:t>
+            </a:r>
+          </a:p>
+          <a:p>
+            <a:pPr indent="-228600">
+              <a:lnSpc>
+                <a:spcPct val="90000"/>
+              </a:lnSpc>
+              <a:spcAft>
+                <a:spcPts val="600"/>
+              </a:spcAft>
+              <a:buFont typeface="Arial" panose="020B0604020202020204" pitchFamily="34" charset="0"/>
+              <a:buChar char="•"/>
+            </a:pPr>
+            <a:r>
+              <a:rPr lang="en-US" sz="1900"/>
+              <a:t>-Creating a low poly and high poly model with a complete UV unwrap</a:t>
+            </a:r>
+          </a:p>
+          <a:p>
+            <a:pPr indent="-228600">
+              <a:lnSpc>
+                <a:spcPct val="90000"/>
+              </a:lnSpc>
+              <a:spcAft>
+                <a:spcPts val="600"/>
+              </a:spcAft>
+              <a:buFont typeface="Arial" panose="020B0604020202020204" pitchFamily="34" charset="0"/>
+              <a:buChar char="•"/>
+            </a:pPr>
+            <a:r>
+              <a:rPr lang="en-US" sz="1900"/>
+              <a:t>-Bake the model in Adobe Substance Painter</a:t>
+            </a:r>
+          </a:p>
+          <a:p>
+            <a:pPr indent="-228600">
+              <a:lnSpc>
+                <a:spcPct val="90000"/>
+              </a:lnSpc>
+              <a:spcAft>
+                <a:spcPts val="600"/>
+              </a:spcAft>
+              <a:buFont typeface="Arial" panose="020B0604020202020204" pitchFamily="34" charset="0"/>
+              <a:buChar char="•"/>
+            </a:pPr>
+            <a:r>
+              <a:rPr lang="en-US" sz="1900"/>
+              <a:t>-Fully texture the model in Adobe Substance Painter</a:t>
+            </a:r>
+          </a:p>
+          <a:p>
+            <a:pPr indent="-228600">
+              <a:lnSpc>
+                <a:spcPct val="90000"/>
+              </a:lnSpc>
+              <a:spcAft>
+                <a:spcPts val="600"/>
+              </a:spcAft>
+              <a:buFont typeface="Arial" panose="020B0604020202020204" pitchFamily="34" charset="0"/>
+              <a:buChar char="•"/>
+            </a:pPr>
+            <a:r>
+              <a:rPr lang="en-US" sz="1900"/>
+              <a:t>-Render the completed model in Unreal Engine</a:t>
+            </a:r>
+          </a:p>
+        </p:txBody>
+      </p:sp>
+      <p:sp>
+        <p:nvSpPr>
+          <p:cNvPr id="14" name="Rectangle 13">
+            <a:extLst>
+              <a:ext uri="{FF2B5EF4-FFF2-40B4-BE49-F238E27FC236}">
+                <a16:creationId xmlns:a16="http://schemas.microsoft.com/office/drawing/2014/main" id="{7004738A-9D34-43E8-97D2-CA0EED4F8BE0}"/>
+              </a:ext>
+              <a:ext uri="{C183D7F6-B498-43B3-948B-1728B52AA6E4}">
+                <adec:decorative xmlns:adec="http://schemas.microsoft.com/office/drawing/2017/decorative" val="1"/>
+              </a:ext>
+            </a:extLst>
+          </p:cNvPr>
+          <p:cNvSpPr>
+            <a:spLocks noGrp="1" noRot="1" noChangeAspect="1" noMove="1" noResize="1" noEditPoints="1" noAdjustHandles="1" noChangeArrowheads="1" noChangeShapeType="1" noTextEdit="1"/>
+          </p:cNvSpPr>
+          <p:nvPr>
+            <p:extLst>
+              <p:ext uri="{386F3935-93C4-4BCD-93E2-E3B085C9AB24}">
+                <p16:designElem xmlns:p16="http://schemas.microsoft.com/office/powerpoint/2015/main" val="1"/>
+              </p:ext>
+            </p:extLst>
+          </p:nvPr>
+        </p:nvSpPr>
+        <p:spPr>
+          <a:xfrm rot="10800000" flipH="1">
+            <a:off x="8123333" y="-5"/>
+            <a:ext cx="4092521" cy="6858000"/>
+          </a:xfrm>
+          <a:prstGeom prst="rect">
+            <a:avLst/>
+          </a:prstGeom>
+          <a:gradFill>
+            <a:gsLst>
+              <a:gs pos="8000">
+                <a:srgbClr val="000000">
+                  <a:alpha val="94000"/>
+                </a:srgbClr>
+              </a:gs>
+              <a:gs pos="100000">
+                <a:schemeClr val="accent1"/>
+              </a:gs>
+            </a:gsLst>
+            <a:lin ang="2400000" scaled="0"/>
+          </a:gradFill>
+          <a:ln>
+            <a:noFill/>
+          </a:ln>
+        </p:spPr>
+        <p:style>
+          <a:lnRef idx="2">
+            <a:schemeClr val="accent1">
+              <a:shade val="50000"/>
+            </a:schemeClr>
+          </a:lnRef>
+          <a:fillRef idx="1">
+            <a:schemeClr val="accent1"/>
+          </a:fillRef>
+          <a:effectRef idx="0">
+            <a:schemeClr val="accent1"/>
+          </a:effectRef>
+          <a:fontRef idx="minor">
+            <a:schemeClr val="lt1"/>
+          </a:fontRef>
+        </p:style>
+        <p:txBody>
+          <a:bodyPr rtlCol="0" anchor="ctr"/>
+          <a:lstStyle/>
+          <a:p>
+            <a:pPr algn="ctr"/>
+            <a:endParaRPr lang="en-US"/>
+          </a:p>
+        </p:txBody>
+      </p:sp>
+      <p:sp>
+        <p:nvSpPr>
+          <p:cNvPr id="16" name="Rectangle 15">
+            <a:extLst>
+              <a:ext uri="{FF2B5EF4-FFF2-40B4-BE49-F238E27FC236}">
+                <a16:creationId xmlns:a16="http://schemas.microsoft.com/office/drawing/2014/main" id="{B8B8D07F-F13E-443E-BA68-2D26672D76B9}"/>
+              </a:ext>
+              <a:ext uri="{C183D7F6-B498-43B3-948B-1728B52AA6E4}">
+                <adec:decorative xmlns:adec="http://schemas.microsoft.com/office/drawing/2017/decorative" val="1"/>
+              </a:ext>
+            </a:extLst>
+          </p:cNvPr>
+          <p:cNvSpPr>
+            <a:spLocks noGrp="1" noRot="1" noChangeAspect="1" noMove="1" noResize="1" noEditPoints="1" noAdjustHandles="1" noChangeArrowheads="1" noChangeShapeType="1" noTextEdit="1"/>
+          </p:cNvSpPr>
+          <p:nvPr>
+            <p:extLst>
+              <p:ext uri="{386F3935-93C4-4BCD-93E2-E3B085C9AB24}">
+                <p16:designElem xmlns:p16="http://schemas.microsoft.com/office/powerpoint/2015/main" val="1"/>
+              </p:ext>
+            </p:extLst>
+          </p:nvPr>
+        </p:nvSpPr>
+        <p:spPr>
+          <a:xfrm rot="10800000" flipH="1">
+            <a:off x="8123333" y="-2"/>
+            <a:ext cx="4092521" cy="6400369"/>
+          </a:xfrm>
+          <a:prstGeom prst="rect">
+            <a:avLst/>
+          </a:prstGeom>
+          <a:gradFill>
+            <a:gsLst>
+              <a:gs pos="31000">
+                <a:schemeClr val="accent1">
+                  <a:lumMod val="50000"/>
+                  <a:alpha val="0"/>
+                </a:schemeClr>
+              </a:gs>
+              <a:gs pos="100000">
+                <a:schemeClr val="accent1">
+                  <a:lumMod val="50000"/>
+                  <a:alpha val="26000"/>
+                </a:schemeClr>
+              </a:gs>
+            </a:gsLst>
+            <a:lin ang="18000000" scaled="0"/>
+          </a:gradFill>
+          <a:ln>
+            <a:noFill/>
+          </a:ln>
+        </p:spPr>
+        <p:style>
+          <a:lnRef idx="2">
+            <a:schemeClr val="accent1">
+              <a:shade val="50000"/>
+            </a:schemeClr>
+          </a:lnRef>
+          <a:fillRef idx="1">
+            <a:schemeClr val="accent1"/>
+          </a:fillRef>
+          <a:effectRef idx="0">
+            <a:schemeClr val="accent1"/>
+          </a:effectRef>
+          <a:fontRef idx="minor">
+            <a:schemeClr val="lt1"/>
+          </a:fontRef>
+        </p:style>
+        <p:txBody>
+          <a:bodyPr rtlCol="0" anchor="ctr"/>
+          <a:lstStyle/>
+          <a:p>
+            <a:pPr algn="ctr"/>
+            <a:endParaRPr lang="en-US" dirty="0"/>
+          </a:p>
+        </p:txBody>
+      </p:sp>
+      <p:sp>
+        <p:nvSpPr>
+          <p:cNvPr id="18" name="Rectangle 17">
+            <a:extLst>
+              <a:ext uri="{FF2B5EF4-FFF2-40B4-BE49-F238E27FC236}">
+                <a16:creationId xmlns:a16="http://schemas.microsoft.com/office/drawing/2014/main" id="{2813A4FA-24A5-41ED-A534-3807D1B2F344}"/>
+              </a:ext>
+              <a:ext uri="{C183D7F6-B498-43B3-948B-1728B52AA6E4}">
+                <adec:decorative xmlns:adec="http://schemas.microsoft.com/office/drawing/2017/decorative" val="1"/>
+              </a:ext>
+            </a:extLst>
+          </p:cNvPr>
+          <p:cNvSpPr>
+            <a:spLocks noGrp="1" noRot="1" noChangeAspect="1" noMove="1" noResize="1" noEditPoints="1" noAdjustHandles="1" noChangeArrowheads="1" noChangeShapeType="1" noTextEdit="1"/>
+          </p:cNvSpPr>
+          <p:nvPr>
+            <p:extLst>
+              <p:ext uri="{386F3935-93C4-4BCD-93E2-E3B085C9AB24}">
+                <p16:designElem xmlns:p16="http://schemas.microsoft.com/office/powerpoint/2015/main" val="1"/>
+              </p:ext>
+            </p:extLst>
+          </p:nvPr>
+        </p:nvSpPr>
+        <p:spPr>
+          <a:xfrm rot="10800000" flipH="1">
+            <a:off x="8123333" y="-22"/>
+            <a:ext cx="4068667" cy="6400389"/>
+          </a:xfrm>
+          <a:prstGeom prst="rect">
+            <a:avLst/>
+          </a:prstGeom>
+          <a:gradFill>
+            <a:gsLst>
+              <a:gs pos="0">
+                <a:schemeClr val="accent1">
+                  <a:alpha val="0"/>
+                </a:schemeClr>
+              </a:gs>
+              <a:gs pos="72000">
+                <a:srgbClr val="000000">
+                  <a:alpha val="21000"/>
+                </a:srgbClr>
+              </a:gs>
+            </a:gsLst>
+            <a:lin ang="3000000" scaled="0"/>
+          </a:gradFill>
+          <a:ln>
+            <a:noFill/>
+          </a:ln>
+        </p:spPr>
+        <p:style>
+          <a:lnRef idx="2">
+            <a:schemeClr val="accent1">
+              <a:shade val="50000"/>
+            </a:schemeClr>
+          </a:lnRef>
+          <a:fillRef idx="1">
+            <a:schemeClr val="accent1"/>
+          </a:fillRef>
+          <a:effectRef idx="0">
+            <a:schemeClr val="accent1"/>
+          </a:effectRef>
+          <a:fontRef idx="minor">
+            <a:schemeClr val="lt1"/>
+          </a:fontRef>
+        </p:style>
+        <p:txBody>
+          <a:bodyPr rtlCol="0" anchor="ctr"/>
+          <a:lstStyle/>
+          <a:p>
+            <a:pPr algn="ctr"/>
+            <a:endParaRPr lang="en-US" dirty="0"/>
+          </a:p>
+        </p:txBody>
+      </p:sp>
+      <p:sp>
+        <p:nvSpPr>
+          <p:cNvPr id="20" name="Rectangle 19">
+            <a:extLst>
+              <a:ext uri="{FF2B5EF4-FFF2-40B4-BE49-F238E27FC236}">
+                <a16:creationId xmlns:a16="http://schemas.microsoft.com/office/drawing/2014/main" id="{C3944F27-CA70-4E84-A51A-E6BF89558979}"/>
+              </a:ext>
+              <a:ext uri="{C183D7F6-B498-43B3-948B-1728B52AA6E4}">
+                <adec:decorative xmlns:adec="http://schemas.microsoft.com/office/drawing/2017/decorative" val="1"/>
+              </a:ext>
+            </a:extLst>
+          </p:cNvPr>
+          <p:cNvSpPr>
+            <a:spLocks noGrp="1" noRot="1" noChangeAspect="1" noMove="1" noResize="1" noEditPoints="1" noAdjustHandles="1" noChangeArrowheads="1" noChangeShapeType="1" noTextEdit="1"/>
+          </p:cNvSpPr>
+          <p:nvPr>
+            <p:extLst>
+              <p:ext uri="{386F3935-93C4-4BCD-93E2-E3B085C9AB24}">
+                <p16:designElem xmlns:p16="http://schemas.microsoft.com/office/powerpoint/2015/main" val="1"/>
+              </p:ext>
+            </p:extLst>
+          </p:nvPr>
+        </p:nvSpPr>
+        <p:spPr>
+          <a:xfrm rot="10800000" flipH="1">
+            <a:off x="8123333" y="-10"/>
+            <a:ext cx="3611467" cy="6857997"/>
+          </a:xfrm>
+          <a:prstGeom prst="rect">
+            <a:avLst/>
+          </a:prstGeom>
+          <a:gradFill>
+            <a:gsLst>
+              <a:gs pos="0">
+                <a:schemeClr val="accent1">
+                  <a:alpha val="0"/>
+                </a:schemeClr>
+              </a:gs>
+              <a:gs pos="93000">
+                <a:srgbClr val="000000">
+                  <a:alpha val="29000"/>
+                </a:srgbClr>
+              </a:gs>
+            </a:gsLst>
+            <a:lin ang="5400000" scaled="0"/>
+          </a:gradFill>
+          <a:ln>
+            <a:noFill/>
+          </a:ln>
+        </p:spPr>
+        <p:style>
+          <a:lnRef idx="2">
+            <a:schemeClr val="accent1">
+              <a:shade val="50000"/>
+            </a:schemeClr>
+          </a:lnRef>
+          <a:fillRef idx="1">
+            <a:schemeClr val="accent1"/>
+          </a:fillRef>
+          <a:effectRef idx="0">
+            <a:schemeClr val="accent1"/>
+          </a:effectRef>
+          <a:fontRef idx="minor">
+            <a:schemeClr val="lt1"/>
+          </a:fontRef>
+        </p:style>
+        <p:txBody>
+          <a:bodyPr rtlCol="0" anchor="ctr"/>
+          <a:lstStyle/>
+          <a:p>
+            <a:pPr algn="ctr"/>
+            <a:endParaRPr lang="en-US" dirty="0"/>
           </a:p>
         </p:txBody>
       </p:sp>
@@ -3489,82 +4734,14 @@
         </p:blipFill>
         <p:spPr>
           <a:xfrm>
-            <a:off x="322931" y="1690688"/>
-            <a:ext cx="5002104" cy="3400797"/>
+            <a:off x="7075967" y="2271985"/>
+            <a:ext cx="4170530" cy="2345922"/>
           </a:xfrm>
           <a:prstGeom prst="rect">
             <a:avLst/>
           </a:prstGeom>
         </p:spPr>
       </p:pic>
-      <p:sp>
-        <p:nvSpPr>
-          <p:cNvPr id="7" name="TextBox 6">
-            <a:extLst>
-              <a:ext uri="{FF2B5EF4-FFF2-40B4-BE49-F238E27FC236}">
-                <a16:creationId xmlns:a16="http://schemas.microsoft.com/office/drawing/2014/main" id="{5234FFB8-D65E-8DC6-AEC9-2647BC251AF3}"/>
-              </a:ext>
-            </a:extLst>
-          </p:cNvPr>
-          <p:cNvSpPr txBox="1"/>
-          <p:nvPr/>
-        </p:nvSpPr>
-        <p:spPr>
-          <a:xfrm>
-            <a:off x="5687736" y="1774272"/>
-            <a:ext cx="5561901" cy="2585323"/>
-          </a:xfrm>
-          <a:prstGeom prst="rect">
-            <a:avLst/>
-          </a:prstGeom>
-          <a:noFill/>
-        </p:spPr>
-        <p:txBody>
-          <a:bodyPr wrap="square" rtlCol="0">
-            <a:spAutoFit/>
-          </a:bodyPr>
-          <a:lstStyle/>
-          <a:p>
-            <a:r>
-              <a:rPr lang="en-GB" dirty="0"/>
-              <a:t> - The assigned task was to make our own 3D model of a silo by:</a:t>
-            </a:r>
-          </a:p>
-          <a:p>
-            <a:endParaRPr lang="en-GB" dirty="0"/>
-          </a:p>
-          <a:p>
-            <a:r>
-              <a:rPr lang="en-GB" dirty="0"/>
-              <a:t>-Using the Splash Damage art test silo as a reference</a:t>
-            </a:r>
-          </a:p>
-          <a:p>
-            <a:r>
-              <a:rPr lang="en-GB" dirty="0"/>
-              <a:t>-Creating a low poly and high poly model with a complete UV unwrap</a:t>
-            </a:r>
-          </a:p>
-          <a:p>
-            <a:r>
-              <a:rPr lang="en-GB" dirty="0"/>
-              <a:t>-Bake the model in Adobe Substance Painter</a:t>
-            </a:r>
-          </a:p>
-          <a:p>
-            <a:r>
-              <a:rPr lang="en-GB" dirty="0"/>
-              <a:t>-Fully texture the model in Adobe Substance Painter</a:t>
-            </a:r>
-          </a:p>
-          <a:p>
-            <a:r>
-              <a:rPr lang="en-GB" dirty="0"/>
-              <a:t>-Render the completed model in Unreal Engine</a:t>
-            </a:r>
-          </a:p>
-        </p:txBody>
-      </p:sp>
     </p:spTree>
     <p:extLst>
       <p:ext uri="{BB962C8B-B14F-4D97-AF65-F5344CB8AC3E}">
@@ -3581,6 +4758,14 @@
 <file path=ppt/slides/slide3.xml><?xml version="1.0" encoding="utf-8"?>
 <p:sld xmlns:a="http://schemas.openxmlformats.org/drawingml/2006/main" xmlns:r="http://schemas.openxmlformats.org/officeDocument/2006/relationships" xmlns:p="http://schemas.openxmlformats.org/presentationml/2006/main">
   <p:cSld>
+    <p:bg>
+      <p:bgPr>
+        <a:solidFill>
+          <a:schemeClr val="bg1"/>
+        </a:solidFill>
+        <a:effectLst/>
+      </p:bgPr>
+    </p:bg>
     <p:spTree>
       <p:nvGrpSpPr>
         <p:cNvPr id="1" name=""/>
@@ -3595,83 +4780,379 @@
           <a:chExt cx="0" cy="0"/>
         </a:xfrm>
       </p:grpSpPr>
-      <p:sp>
-        <p:nvSpPr>
-          <p:cNvPr id="2" name="Title 1">
-            <a:extLst>
-              <a:ext uri="{FF2B5EF4-FFF2-40B4-BE49-F238E27FC236}">
-                <a16:creationId xmlns:a16="http://schemas.microsoft.com/office/drawing/2014/main" id="{2ACF745D-C833-D9AA-2A1F-AE5FAE7BB1EA}"/>
-              </a:ext>
-            </a:extLst>
-          </p:cNvPr>
-          <p:cNvSpPr>
-            <a:spLocks noGrp="1"/>
-          </p:cNvSpPr>
-          <p:nvPr>
-            <p:ph type="title"/>
+      <p:sp useBgFill="1">
+        <p:nvSpPr>
+          <p:cNvPr id="27" name="Rectangle 26">
+            <a:extLst>
+              <a:ext uri="{FF2B5EF4-FFF2-40B4-BE49-F238E27FC236}">
+                <a16:creationId xmlns:a16="http://schemas.microsoft.com/office/drawing/2014/main" id="{50D1C5B3-B60D-4696-AE60-100D5EC8AB5D}"/>
+              </a:ext>
+              <a:ext uri="{C183D7F6-B498-43B3-948B-1728B52AA6E4}">
+                <adec:decorative xmlns:adec="http://schemas.microsoft.com/office/drawing/2017/decorative" val="1"/>
+              </a:ext>
+            </a:extLst>
+          </p:cNvPr>
+          <p:cNvSpPr>
+            <a:spLocks noGrp="1" noRot="1" noChangeAspect="1" noMove="1" noResize="1" noEditPoints="1" noAdjustHandles="1" noChangeArrowheads="1" noChangeShapeType="1" noTextEdit="1"/>
+          </p:cNvSpPr>
+          <p:nvPr>
+            <p:extLst>
+              <p:ext uri="{386F3935-93C4-4BCD-93E2-E3B085C9AB24}">
+                <p16:designElem xmlns:p16="http://schemas.microsoft.com/office/powerpoint/2015/main" val="1"/>
+              </p:ext>
+            </p:extLst>
           </p:nvPr>
         </p:nvSpPr>
         <p:spPr>
           <a:xfrm>
-            <a:off x="-62917" y="0"/>
-            <a:ext cx="10720431" cy="616592"/>
-          </a:xfrm>
+            <a:off x="0" y="0"/>
+            <a:ext cx="12192000" cy="6858000"/>
+          </a:xfrm>
+          <a:prstGeom prst="rect">
+            <a:avLst/>
+          </a:prstGeom>
+          <a:ln w="12700" cap="flat" cmpd="sng" algn="ctr">
+            <a:noFill/>
+            <a:prstDash val="solid"/>
+            <a:miter lim="800000"/>
+          </a:ln>
+          <a:effectLst/>
+          <a:extLst>
+            <a:ext uri="{91240B29-F687-4F45-9708-019B960494DF}">
+              <a14:hiddenLine xmlns:a14="http://schemas.microsoft.com/office/drawing/2010/main" w="12700" cap="flat" cmpd="sng" algn="ctr">
+                <a:solidFill>
+                  <a:schemeClr val="accent1">
+                    <a:shade val="50000"/>
+                  </a:schemeClr>
+                </a:solidFill>
+                <a:prstDash val="solid"/>
+                <a:miter lim="800000"/>
+              </a14:hiddenLine>
+            </a:ext>
+          </a:extLst>
         </p:spPr>
-        <p:txBody>
-          <a:bodyPr>
-            <a:normAutofit fontScale="90000"/>
+        <p:style>
+          <a:lnRef idx="2">
+            <a:schemeClr val="accent1">
+              <a:shade val="50000"/>
+            </a:schemeClr>
+          </a:lnRef>
+          <a:fillRef idx="1">
+            <a:schemeClr val="accent1"/>
+          </a:fillRef>
+          <a:effectRef idx="0">
+            <a:schemeClr val="accent1"/>
+          </a:effectRef>
+          <a:fontRef idx="minor">
+            <a:schemeClr val="lt1"/>
+          </a:fontRef>
+        </p:style>
+        <p:txBody>
+          <a:bodyPr rtlCol="0" anchor="ctr"/>
+          <a:lstStyle/>
+          <a:p>
+            <a:pPr algn="ctr"/>
+            <a:endParaRPr lang="en-US"/>
+          </a:p>
+        </p:txBody>
+      </p:sp>
+      <p:grpSp>
+        <p:nvGrpSpPr>
+          <p:cNvPr id="29" name="Group 28">
+            <a:extLst>
+              <a:ext uri="{FF2B5EF4-FFF2-40B4-BE49-F238E27FC236}">
+                <a16:creationId xmlns:a16="http://schemas.microsoft.com/office/drawing/2014/main" id="{73EDDF53-0851-48D4-A466-6FE0DCE91E73}"/>
+              </a:ext>
+              <a:ext uri="{C183D7F6-B498-43B3-948B-1728B52AA6E4}">
+                <adec:decorative xmlns:adec="http://schemas.microsoft.com/office/drawing/2017/decorative" val="1"/>
+              </a:ext>
+            </a:extLst>
+          </p:cNvPr>
+          <p:cNvGrpSpPr>
+            <a:grpSpLocks noGrp="1" noUngrp="1" noRot="1" noChangeAspect="1" noMove="1" noResize="1"/>
+          </p:cNvGrpSpPr>
+          <p:nvPr>
+            <p:extLst>
+              <p:ext uri="{386F3935-93C4-4BCD-93E2-E3B085C9AB24}">
+                <p16:designElem xmlns:p16="http://schemas.microsoft.com/office/powerpoint/2015/main" val="1"/>
+              </p:ext>
+            </p:extLst>
+          </p:nvPr>
+        </p:nvGrpSpPr>
+        <p:grpSpPr>
+          <a:xfrm>
+            <a:off x="0" y="0"/>
+            <a:ext cx="12192002" cy="1576446"/>
+            <a:chOff x="0" y="0"/>
+            <a:chExt cx="12192002" cy="1576446"/>
+          </a:xfrm>
+        </p:grpSpPr>
+        <p:sp>
+          <p:nvSpPr>
+            <p:cNvPr id="30" name="Rectangle 29">
+              <a:extLst>
+                <a:ext uri="{FF2B5EF4-FFF2-40B4-BE49-F238E27FC236}">
+                  <a16:creationId xmlns:a16="http://schemas.microsoft.com/office/drawing/2014/main" id="{D074D04C-85E8-4A3E-90D7-86A10AE04827}"/>
+                </a:ext>
+                <a:ext uri="{C183D7F6-B498-43B3-948B-1728B52AA6E4}">
+                  <adec:decorative xmlns:adec="http://schemas.microsoft.com/office/drawing/2017/decorative" val="1"/>
+                </a:ext>
+              </a:extLst>
+            </p:cNvPr>
+            <p:cNvSpPr/>
+            <p:nvPr>
+              <p:extLst>
+                <p:ext uri="{386F3935-93C4-4BCD-93E2-E3B085C9AB24}">
+                  <p16:designElem xmlns:p16="http://schemas.microsoft.com/office/powerpoint/2015/main" val="1"/>
+                </p:ext>
+              </p:extLst>
+            </p:nvPr>
+          </p:nvSpPr>
+          <p:spPr>
+            <a:xfrm rot="10800000" flipH="1">
+              <a:off x="2" y="0"/>
+              <a:ext cx="12191998" cy="1575955"/>
+            </a:xfrm>
+            <a:prstGeom prst="rect">
+              <a:avLst/>
+            </a:prstGeom>
+            <a:gradFill>
+              <a:gsLst>
+                <a:gs pos="0">
+                  <a:srgbClr val="000000">
+                    <a:alpha val="96000"/>
+                  </a:srgbClr>
+                </a:gs>
+                <a:gs pos="100000">
+                  <a:schemeClr val="accent1">
+                    <a:lumMod val="75000"/>
+                  </a:schemeClr>
+                </a:gs>
+              </a:gsLst>
+              <a:lin ang="8400000" scaled="0"/>
+            </a:gradFill>
+            <a:ln>
+              <a:noFill/>
+            </a:ln>
+          </p:spPr>
+          <p:style>
+            <a:lnRef idx="2">
+              <a:schemeClr val="accent1">
+                <a:shade val="50000"/>
+              </a:schemeClr>
+            </a:lnRef>
+            <a:fillRef idx="1">
+              <a:schemeClr val="accent1"/>
+            </a:fillRef>
+            <a:effectRef idx="0">
+              <a:schemeClr val="accent1"/>
+            </a:effectRef>
+            <a:fontRef idx="minor">
+              <a:schemeClr val="lt1"/>
+            </a:fontRef>
+          </p:style>
+          <p:txBody>
+            <a:bodyPr rtlCol="0" anchor="ctr"/>
+            <a:lstStyle/>
+            <a:p>
+              <a:pPr algn="ctr"/>
+              <a:endParaRPr lang="en-US"/>
+            </a:p>
+          </p:txBody>
+        </p:sp>
+        <p:sp>
+          <p:nvSpPr>
+            <p:cNvPr id="31" name="Rectangle 30">
+              <a:extLst>
+                <a:ext uri="{FF2B5EF4-FFF2-40B4-BE49-F238E27FC236}">
+                  <a16:creationId xmlns:a16="http://schemas.microsoft.com/office/drawing/2014/main" id="{4097020A-86B6-43BD-A2AA-66AE72CA3110}"/>
+                </a:ext>
+                <a:ext uri="{C183D7F6-B498-43B3-948B-1728B52AA6E4}">
+                  <adec:decorative xmlns:adec="http://schemas.microsoft.com/office/drawing/2017/decorative" val="1"/>
+                </a:ext>
+              </a:extLst>
+            </p:cNvPr>
+            <p:cNvSpPr/>
+            <p:nvPr>
+              <p:extLst>
+                <p:ext uri="{386F3935-93C4-4BCD-93E2-E3B085C9AB24}">
+                  <p16:designElem xmlns:p16="http://schemas.microsoft.com/office/powerpoint/2015/main" val="1"/>
+                </p:ext>
+              </p:extLst>
+            </p:nvPr>
+          </p:nvSpPr>
+          <p:spPr>
+            <a:xfrm rot="16200000">
+              <a:off x="5307778" y="-5307778"/>
+              <a:ext cx="1576446" cy="12192002"/>
+            </a:xfrm>
+            <a:prstGeom prst="rect">
+              <a:avLst/>
+            </a:prstGeom>
+            <a:gradFill>
+              <a:gsLst>
+                <a:gs pos="45000">
+                  <a:schemeClr val="accent1">
+                    <a:alpha val="0"/>
+                  </a:schemeClr>
+                </a:gs>
+                <a:gs pos="99000">
+                  <a:srgbClr val="000000">
+                    <a:alpha val="74000"/>
+                  </a:srgbClr>
+                </a:gs>
+              </a:gsLst>
+              <a:lin ang="11400000" scaled="0"/>
+            </a:gradFill>
+            <a:ln>
+              <a:noFill/>
+            </a:ln>
+          </p:spPr>
+          <p:style>
+            <a:lnRef idx="2">
+              <a:schemeClr val="accent1">
+                <a:shade val="50000"/>
+              </a:schemeClr>
+            </a:lnRef>
+            <a:fillRef idx="1">
+              <a:schemeClr val="accent1"/>
+            </a:fillRef>
+            <a:effectRef idx="0">
+              <a:schemeClr val="accent1"/>
+            </a:effectRef>
+            <a:fontRef idx="minor">
+              <a:schemeClr val="lt1"/>
+            </a:fontRef>
+          </p:style>
+          <p:txBody>
+            <a:bodyPr rtlCol="0" anchor="ctr"/>
+            <a:lstStyle/>
+            <a:p>
+              <a:pPr algn="ctr"/>
+              <a:endParaRPr lang="en-US" dirty="0"/>
+            </a:p>
+          </p:txBody>
+        </p:sp>
+        <p:sp>
+          <p:nvSpPr>
+            <p:cNvPr id="32" name="Rectangle 31">
+              <a:extLst>
+                <a:ext uri="{FF2B5EF4-FFF2-40B4-BE49-F238E27FC236}">
+                  <a16:creationId xmlns:a16="http://schemas.microsoft.com/office/drawing/2014/main" id="{20C6C743-32FE-4E24-AA22-45D3B1C7C0A1}"/>
+                </a:ext>
+                <a:ext uri="{C183D7F6-B498-43B3-948B-1728B52AA6E4}">
+                  <adec:decorative xmlns:adec="http://schemas.microsoft.com/office/drawing/2017/decorative" val="1"/>
+                </a:ext>
+              </a:extLst>
+            </p:cNvPr>
+            <p:cNvSpPr/>
+            <p:nvPr>
+              <p:extLst>
+                <p:ext uri="{386F3935-93C4-4BCD-93E2-E3B085C9AB24}">
+                  <p16:designElem xmlns:p16="http://schemas.microsoft.com/office/powerpoint/2015/main" val="1"/>
+                </p:ext>
+              </p:extLst>
+            </p:nvPr>
+          </p:nvSpPr>
+          <p:spPr>
+            <a:xfrm>
+              <a:off x="3825434" y="0"/>
+              <a:ext cx="4303422" cy="1575461"/>
+            </a:xfrm>
+            <a:prstGeom prst="rect">
+              <a:avLst/>
+            </a:prstGeom>
+            <a:gradFill>
+              <a:gsLst>
+                <a:gs pos="0">
+                  <a:schemeClr val="accent1">
+                    <a:alpha val="17000"/>
+                  </a:schemeClr>
+                </a:gs>
+                <a:gs pos="74000">
+                  <a:schemeClr val="accent1">
+                    <a:lumMod val="50000"/>
+                    <a:alpha val="0"/>
+                  </a:schemeClr>
+                </a:gs>
+              </a:gsLst>
+              <a:lin ang="14400000" scaled="0"/>
+            </a:gradFill>
+            <a:ln>
+              <a:noFill/>
+            </a:ln>
+          </p:spPr>
+          <p:style>
+            <a:lnRef idx="2">
+              <a:schemeClr val="accent1">
+                <a:shade val="50000"/>
+              </a:schemeClr>
+            </a:lnRef>
+            <a:fillRef idx="1">
+              <a:schemeClr val="accent1"/>
+            </a:fillRef>
+            <a:effectRef idx="0">
+              <a:schemeClr val="accent1"/>
+            </a:effectRef>
+            <a:fontRef idx="minor">
+              <a:schemeClr val="lt1"/>
+            </a:fontRef>
+          </p:style>
+          <p:txBody>
+            <a:bodyPr rtlCol="0" anchor="ctr"/>
+            <a:lstStyle/>
+            <a:p>
+              <a:pPr algn="ctr"/>
+              <a:endParaRPr lang="en-US"/>
+            </a:p>
+          </p:txBody>
+        </p:sp>
+      </p:grpSp>
+      <p:sp>
+        <p:nvSpPr>
+          <p:cNvPr id="2" name="Title 1">
+            <a:extLst>
+              <a:ext uri="{FF2B5EF4-FFF2-40B4-BE49-F238E27FC236}">
+                <a16:creationId xmlns:a16="http://schemas.microsoft.com/office/drawing/2014/main" id="{2ACF745D-C833-D9AA-2A1F-AE5FAE7BB1EA}"/>
+              </a:ext>
+            </a:extLst>
+          </p:cNvPr>
+          <p:cNvSpPr>
+            <a:spLocks noGrp="1"/>
+          </p:cNvSpPr>
+          <p:nvPr>
+            <p:ph type="title"/>
+          </p:nvPr>
+        </p:nvSpPr>
+        <p:spPr>
+          <a:xfrm>
+            <a:off x="1371600" y="407695"/>
+            <a:ext cx="9724030" cy="834251"/>
+          </a:xfrm>
+        </p:spPr>
+        <p:txBody>
+          <a:bodyPr anchor="ctr">
+            <a:normAutofit/>
           </a:bodyPr>
           <a:lstStyle/>
           <a:p>
             <a:r>
-              <a:rPr lang="en-GB" dirty="0"/>
+              <a:rPr lang="en-GB" sz="4000">
+                <a:solidFill>
+                  <a:srgbClr val="FFFFFF"/>
+                </a:solidFill>
+              </a:rPr>
               <a:t>Basic Block Out</a:t>
             </a:r>
           </a:p>
         </p:txBody>
       </p:sp>
-      <p:sp>
-        <p:nvSpPr>
-          <p:cNvPr id="3" name="Content Placeholder 2">
-            <a:extLst>
-              <a:ext uri="{FF2B5EF4-FFF2-40B4-BE49-F238E27FC236}">
-                <a16:creationId xmlns:a16="http://schemas.microsoft.com/office/drawing/2014/main" id="{4007411F-5C48-221A-2D74-7D983FC3C6E5}"/>
-              </a:ext>
-            </a:extLst>
-          </p:cNvPr>
-          <p:cNvSpPr>
-            <a:spLocks noGrp="1"/>
-          </p:cNvSpPr>
-          <p:nvPr>
-            <p:ph idx="1"/>
-          </p:nvPr>
-        </p:nvSpPr>
-        <p:spPr>
-          <a:xfrm>
-            <a:off x="838200" y="4811086"/>
-            <a:ext cx="10515600" cy="1365876"/>
-          </a:xfrm>
-        </p:spPr>
-        <p:txBody>
-          <a:bodyPr/>
-          <a:lstStyle/>
-          <a:p>
-            <a:pPr marL="0" indent="0">
-              <a:buNone/>
-            </a:pPr>
-            <a:r>
-              <a:rPr lang="en-GB" dirty="0"/>
-              <a:t>My first step in creating the model was to block out the shape of the silo using basic shapes while still making a to-scale version of what the complete silo should look like</a:t>
-            </a:r>
-          </a:p>
-        </p:txBody>
-      </p:sp>
       <p:pic>
         <p:nvPicPr>
-          <p:cNvPr id="5" name="Picture 4">
-            <a:extLst>
-              <a:ext uri="{FF2B5EF4-FFF2-40B4-BE49-F238E27FC236}">
-                <a16:creationId xmlns:a16="http://schemas.microsoft.com/office/drawing/2014/main" id="{383032DE-B371-92A1-1869-39E6A7FFE1AA}"/>
+          <p:cNvPr id="7" name="Picture 6">
+            <a:extLst>
+              <a:ext uri="{FF2B5EF4-FFF2-40B4-BE49-F238E27FC236}">
+                <a16:creationId xmlns:a16="http://schemas.microsoft.com/office/drawing/2014/main" id="{A0AB7018-0DA5-4686-129B-35B14826B7E7}"/>
               </a:ext>
             </a:extLst>
           </p:cNvPr>
@@ -3688,14 +5169,15 @@
               </a:ext>
             </a:extLst>
           </a:blip>
+          <a:srcRect t="1250" r="4" b="4"/>
           <a:stretch>
             <a:fillRect/>
           </a:stretch>
         </p:blipFill>
         <p:spPr>
           <a:xfrm>
-            <a:off x="503507" y="665858"/>
-            <a:ext cx="3676839" cy="4095961"/>
+            <a:off x="2145701" y="2200459"/>
+            <a:ext cx="2133001" cy="2133001"/>
           </a:xfrm>
           <a:prstGeom prst="rect">
             <a:avLst/>
@@ -3704,10 +5186,10 @@
       </p:pic>
       <p:pic>
         <p:nvPicPr>
-          <p:cNvPr id="7" name="Picture 6">
-            <a:extLst>
-              <a:ext uri="{FF2B5EF4-FFF2-40B4-BE49-F238E27FC236}">
-                <a16:creationId xmlns:a16="http://schemas.microsoft.com/office/drawing/2014/main" id="{A0AB7018-0DA5-4686-129B-35B14826B7E7}"/>
+          <p:cNvPr id="5" name="Picture 4">
+            <a:extLst>
+              <a:ext uri="{FF2B5EF4-FFF2-40B4-BE49-F238E27FC236}">
+                <a16:creationId xmlns:a16="http://schemas.microsoft.com/office/drawing/2014/main" id="{383032DE-B371-92A1-1869-39E6A7FFE1AA}"/>
               </a:ext>
             </a:extLst>
           </p:cNvPr>
@@ -3724,14 +5206,15 @@
               </a:ext>
             </a:extLst>
           </a:blip>
+          <a:srcRect t="7014" r="-2" b="3234"/>
           <a:stretch>
             <a:fillRect/>
           </a:stretch>
         </p:blipFill>
         <p:spPr>
           <a:xfrm>
-            <a:off x="4437429" y="665858"/>
-            <a:ext cx="3962500" cy="4095961"/>
+            <a:off x="5036300" y="2200459"/>
+            <a:ext cx="2132994" cy="2133001"/>
           </a:xfrm>
           <a:prstGeom prst="rect">
             <a:avLst/>
@@ -3754,20 +5237,59 @@
         </p:nvPicPr>
         <p:blipFill>
           <a:blip r:embed="rId4"/>
+          <a:srcRect r="2501" b="1"/>
           <a:stretch>
             <a:fillRect/>
           </a:stretch>
         </p:blipFill>
         <p:spPr>
           <a:xfrm>
-            <a:off x="8471647" y="665857"/>
-            <a:ext cx="3534520" cy="4095961"/>
+            <a:off x="7913295" y="2200459"/>
+            <a:ext cx="2133001" cy="2133001"/>
           </a:xfrm>
           <a:prstGeom prst="rect">
             <a:avLst/>
           </a:prstGeom>
         </p:spPr>
       </p:pic>
+      <p:sp>
+        <p:nvSpPr>
+          <p:cNvPr id="3" name="Content Placeholder 2">
+            <a:extLst>
+              <a:ext uri="{FF2B5EF4-FFF2-40B4-BE49-F238E27FC236}">
+                <a16:creationId xmlns:a16="http://schemas.microsoft.com/office/drawing/2014/main" id="{4007411F-5C48-221A-2D74-7D983FC3C6E5}"/>
+              </a:ext>
+            </a:extLst>
+          </p:cNvPr>
+          <p:cNvSpPr>
+            <a:spLocks noGrp="1"/>
+          </p:cNvSpPr>
+          <p:nvPr>
+            <p:ph idx="1"/>
+          </p:nvPr>
+        </p:nvSpPr>
+        <p:spPr>
+          <a:xfrm>
+            <a:off x="1371601" y="4786744"/>
+            <a:ext cx="9448800" cy="1442631"/>
+          </a:xfrm>
+        </p:spPr>
+        <p:txBody>
+          <a:bodyPr>
+            <a:normAutofit/>
+          </a:bodyPr>
+          <a:lstStyle/>
+          <a:p>
+            <a:pPr marL="0" indent="0">
+              <a:buNone/>
+            </a:pPr>
+            <a:r>
+              <a:rPr lang="en-GB" sz="2000"/>
+              <a:t>My first step in creating the model was to block out the shape of the silo using basic shapes while still making a to-scale version of what the complete silo should look like</a:t>
+            </a:r>
+          </a:p>
+        </p:txBody>
+      </p:sp>
     </p:spTree>
     <p:extLst>
       <p:ext uri="{BB962C8B-B14F-4D97-AF65-F5344CB8AC3E}">
@@ -3784,6 +5306,14 @@
 <file path=ppt/slides/slide4.xml><?xml version="1.0" encoding="utf-8"?>
 <p:sld xmlns:a="http://schemas.openxmlformats.org/drawingml/2006/main" xmlns:r="http://schemas.openxmlformats.org/officeDocument/2006/relationships" xmlns:p="http://schemas.openxmlformats.org/presentationml/2006/main">
   <p:cSld>
+    <p:bg>
+      <p:bgPr>
+        <a:solidFill>
+          <a:schemeClr val="bg1"/>
+        </a:solidFill>
+        <a:effectLst/>
+      </p:bgPr>
+    </p:bg>
     <p:spTree>
       <p:nvGrpSpPr>
         <p:cNvPr id="1" name=""/>
@@ -3798,88 +5328,379 @@
           <a:chExt cx="0" cy="0"/>
         </a:xfrm>
       </p:grpSpPr>
-      <p:sp>
-        <p:nvSpPr>
-          <p:cNvPr id="2" name="Title 1">
-            <a:extLst>
-              <a:ext uri="{FF2B5EF4-FFF2-40B4-BE49-F238E27FC236}">
-                <a16:creationId xmlns:a16="http://schemas.microsoft.com/office/drawing/2014/main" id="{EBA4E04B-06A8-D6E2-3141-8FAB48F2B4F8}"/>
-              </a:ext>
-            </a:extLst>
-          </p:cNvPr>
-          <p:cNvSpPr>
-            <a:spLocks noGrp="1"/>
-          </p:cNvSpPr>
-          <p:nvPr>
-            <p:ph type="title"/>
+      <p:sp useBgFill="1">
+        <p:nvSpPr>
+          <p:cNvPr id="12" name="Rectangle 11">
+            <a:extLst>
+              <a:ext uri="{FF2B5EF4-FFF2-40B4-BE49-F238E27FC236}">
+                <a16:creationId xmlns:a16="http://schemas.microsoft.com/office/drawing/2014/main" id="{B712E947-0734-45F9-9C4F-41114EC3A33E}"/>
+              </a:ext>
+              <a:ext uri="{C183D7F6-B498-43B3-948B-1728B52AA6E4}">
+                <adec:decorative xmlns:adec="http://schemas.microsoft.com/office/drawing/2017/decorative" val="1"/>
+              </a:ext>
+            </a:extLst>
+          </p:cNvPr>
+          <p:cNvSpPr>
+            <a:spLocks noGrp="1" noRot="1" noChangeAspect="1" noMove="1" noResize="1" noEditPoints="1" noAdjustHandles="1" noChangeArrowheads="1" noChangeShapeType="1" noTextEdit="1"/>
+          </p:cNvSpPr>
+          <p:nvPr>
+            <p:extLst>
+              <p:ext uri="{386F3935-93C4-4BCD-93E2-E3B085C9AB24}">
+                <p16:designElem xmlns:p16="http://schemas.microsoft.com/office/powerpoint/2015/main" val="1"/>
+              </p:ext>
+            </p:extLst>
           </p:nvPr>
         </p:nvSpPr>
         <p:spPr>
           <a:xfrm>
-            <a:off x="-58271" y="-52014"/>
-            <a:ext cx="10336306" cy="733051"/>
-          </a:xfrm>
+            <a:off x="14285" y="0"/>
+            <a:ext cx="12192000" cy="6858000"/>
+          </a:xfrm>
+          <a:prstGeom prst="rect">
+            <a:avLst/>
+          </a:prstGeom>
+          <a:ln w="12700" cap="flat" cmpd="sng" algn="ctr">
+            <a:noFill/>
+            <a:prstDash val="solid"/>
+            <a:miter lim="800000"/>
+          </a:ln>
+          <a:effectLst/>
+          <a:extLst>
+            <a:ext uri="{91240B29-F687-4F45-9708-019B960494DF}">
+              <a14:hiddenLine xmlns:a14="http://schemas.microsoft.com/office/drawing/2010/main" w="12700" cap="flat" cmpd="sng" algn="ctr">
+                <a:solidFill>
+                  <a:schemeClr val="accent1">
+                    <a:shade val="50000"/>
+                  </a:schemeClr>
+                </a:solidFill>
+                <a:prstDash val="solid"/>
+                <a:miter lim="800000"/>
+              </a14:hiddenLine>
+            </a:ext>
+          </a:extLst>
         </p:spPr>
-        <p:txBody>
-          <a:bodyPr/>
+        <p:style>
+          <a:lnRef idx="2">
+            <a:schemeClr val="accent1">
+              <a:shade val="50000"/>
+            </a:schemeClr>
+          </a:lnRef>
+          <a:fillRef idx="1">
+            <a:schemeClr val="accent1"/>
+          </a:fillRef>
+          <a:effectRef idx="0">
+            <a:schemeClr val="accent1"/>
+          </a:effectRef>
+          <a:fontRef idx="minor">
+            <a:schemeClr val="lt1"/>
+          </a:fontRef>
+        </p:style>
+        <p:txBody>
+          <a:bodyPr rtlCol="0" anchor="ctr"/>
+          <a:lstStyle/>
+          <a:p>
+            <a:pPr algn="ctr"/>
+            <a:endParaRPr lang="en-US"/>
+          </a:p>
+        </p:txBody>
+      </p:sp>
+      <p:grpSp>
+        <p:nvGrpSpPr>
+          <p:cNvPr id="14" name="Group 13">
+            <a:extLst>
+              <a:ext uri="{FF2B5EF4-FFF2-40B4-BE49-F238E27FC236}">
+                <a16:creationId xmlns:a16="http://schemas.microsoft.com/office/drawing/2014/main" id="{12B3290A-D3BF-4B87-B55B-FD9A98B49727}"/>
+              </a:ext>
+              <a:ext uri="{C183D7F6-B498-43B3-948B-1728B52AA6E4}">
+                <adec:decorative xmlns:adec="http://schemas.microsoft.com/office/drawing/2017/decorative" val="1"/>
+              </a:ext>
+            </a:extLst>
+          </p:cNvPr>
+          <p:cNvGrpSpPr>
+            <a:grpSpLocks noGrp="1" noUngrp="1" noRot="1" noChangeAspect="1" noMove="1" noResize="1"/>
+          </p:cNvGrpSpPr>
+          <p:nvPr>
+            <p:extLst>
+              <p:ext uri="{386F3935-93C4-4BCD-93E2-E3B085C9AB24}">
+                <p16:designElem xmlns:p16="http://schemas.microsoft.com/office/powerpoint/2015/main" val="1"/>
+              </p:ext>
+            </p:extLst>
+          </p:nvPr>
+        </p:nvGrpSpPr>
+        <p:grpSpPr>
+          <a:xfrm>
+            <a:off x="0" y="0"/>
+            <a:ext cx="12199030" cy="1576446"/>
+            <a:chOff x="0" y="0"/>
+            <a:chExt cx="12192002" cy="1576446"/>
+          </a:xfrm>
+        </p:grpSpPr>
+        <p:sp>
+          <p:nvSpPr>
+            <p:cNvPr id="15" name="Rectangle 14">
+              <a:extLst>
+                <a:ext uri="{FF2B5EF4-FFF2-40B4-BE49-F238E27FC236}">
+                  <a16:creationId xmlns:a16="http://schemas.microsoft.com/office/drawing/2014/main" id="{033A715A-0686-440A-8F40-441B42A6605C}"/>
+                </a:ext>
+                <a:ext uri="{C183D7F6-B498-43B3-948B-1728B52AA6E4}">
+                  <adec:decorative xmlns:adec="http://schemas.microsoft.com/office/drawing/2017/decorative" val="1"/>
+                </a:ext>
+              </a:extLst>
+            </p:cNvPr>
+            <p:cNvSpPr/>
+            <p:nvPr>
+              <p:extLst>
+                <p:ext uri="{386F3935-93C4-4BCD-93E2-E3B085C9AB24}">
+                  <p16:designElem xmlns:p16="http://schemas.microsoft.com/office/powerpoint/2015/main" val="1"/>
+                </p:ext>
+              </p:extLst>
+            </p:nvPr>
+          </p:nvSpPr>
+          <p:spPr>
+            <a:xfrm rot="10800000" flipH="1">
+              <a:off x="2" y="0"/>
+              <a:ext cx="12191998" cy="1575955"/>
+            </a:xfrm>
+            <a:prstGeom prst="rect">
+              <a:avLst/>
+            </a:prstGeom>
+            <a:gradFill>
+              <a:gsLst>
+                <a:gs pos="0">
+                  <a:srgbClr val="000000">
+                    <a:alpha val="96000"/>
+                  </a:srgbClr>
+                </a:gs>
+                <a:gs pos="100000">
+                  <a:schemeClr val="accent1">
+                    <a:lumMod val="75000"/>
+                  </a:schemeClr>
+                </a:gs>
+              </a:gsLst>
+              <a:lin ang="8400000" scaled="0"/>
+            </a:gradFill>
+            <a:ln>
+              <a:noFill/>
+            </a:ln>
+          </p:spPr>
+          <p:style>
+            <a:lnRef idx="2">
+              <a:schemeClr val="accent1">
+                <a:shade val="50000"/>
+              </a:schemeClr>
+            </a:lnRef>
+            <a:fillRef idx="1">
+              <a:schemeClr val="accent1"/>
+            </a:fillRef>
+            <a:effectRef idx="0">
+              <a:schemeClr val="accent1"/>
+            </a:effectRef>
+            <a:fontRef idx="minor">
+              <a:schemeClr val="lt1"/>
+            </a:fontRef>
+          </p:style>
+          <p:txBody>
+            <a:bodyPr rtlCol="0" anchor="ctr"/>
+            <a:lstStyle/>
+            <a:p>
+              <a:pPr algn="ctr"/>
+              <a:endParaRPr lang="en-US"/>
+            </a:p>
+          </p:txBody>
+        </p:sp>
+        <p:sp>
+          <p:nvSpPr>
+            <p:cNvPr id="16" name="Rectangle 15">
+              <a:extLst>
+                <a:ext uri="{FF2B5EF4-FFF2-40B4-BE49-F238E27FC236}">
+                  <a16:creationId xmlns:a16="http://schemas.microsoft.com/office/drawing/2014/main" id="{4761657F-19F2-425B-B7E9-0118CD13C334}"/>
+                </a:ext>
+                <a:ext uri="{C183D7F6-B498-43B3-948B-1728B52AA6E4}">
+                  <adec:decorative xmlns:adec="http://schemas.microsoft.com/office/drawing/2017/decorative" val="1"/>
+                </a:ext>
+              </a:extLst>
+            </p:cNvPr>
+            <p:cNvSpPr/>
+            <p:nvPr>
+              <p:extLst>
+                <p:ext uri="{386F3935-93C4-4BCD-93E2-E3B085C9AB24}">
+                  <p16:designElem xmlns:p16="http://schemas.microsoft.com/office/powerpoint/2015/main" val="1"/>
+                </p:ext>
+              </p:extLst>
+            </p:nvPr>
+          </p:nvSpPr>
+          <p:spPr>
+            <a:xfrm rot="16200000">
+              <a:off x="5307778" y="-5307778"/>
+              <a:ext cx="1576446" cy="12192002"/>
+            </a:xfrm>
+            <a:prstGeom prst="rect">
+              <a:avLst/>
+            </a:prstGeom>
+            <a:gradFill>
+              <a:gsLst>
+                <a:gs pos="45000">
+                  <a:schemeClr val="accent1">
+                    <a:alpha val="0"/>
+                  </a:schemeClr>
+                </a:gs>
+                <a:gs pos="99000">
+                  <a:srgbClr val="000000">
+                    <a:alpha val="74000"/>
+                  </a:srgbClr>
+                </a:gs>
+              </a:gsLst>
+              <a:lin ang="11400000" scaled="0"/>
+            </a:gradFill>
+            <a:ln>
+              <a:noFill/>
+            </a:ln>
+          </p:spPr>
+          <p:style>
+            <a:lnRef idx="2">
+              <a:schemeClr val="accent1">
+                <a:shade val="50000"/>
+              </a:schemeClr>
+            </a:lnRef>
+            <a:fillRef idx="1">
+              <a:schemeClr val="accent1"/>
+            </a:fillRef>
+            <a:effectRef idx="0">
+              <a:schemeClr val="accent1"/>
+            </a:effectRef>
+            <a:fontRef idx="minor">
+              <a:schemeClr val="lt1"/>
+            </a:fontRef>
+          </p:style>
+          <p:txBody>
+            <a:bodyPr rtlCol="0" anchor="ctr"/>
+            <a:lstStyle/>
+            <a:p>
+              <a:pPr algn="ctr"/>
+              <a:endParaRPr lang="en-US" dirty="0"/>
+            </a:p>
+          </p:txBody>
+        </p:sp>
+        <p:sp>
+          <p:nvSpPr>
+            <p:cNvPr id="17" name="Rectangle 16">
+              <a:extLst>
+                <a:ext uri="{FF2B5EF4-FFF2-40B4-BE49-F238E27FC236}">
+                  <a16:creationId xmlns:a16="http://schemas.microsoft.com/office/drawing/2014/main" id="{E27B6634-79D3-4EDD-A77A-1065D6F3A4F2}"/>
+                </a:ext>
+                <a:ext uri="{C183D7F6-B498-43B3-948B-1728B52AA6E4}">
+                  <adec:decorative xmlns:adec="http://schemas.microsoft.com/office/drawing/2017/decorative" val="1"/>
+                </a:ext>
+              </a:extLst>
+            </p:cNvPr>
+            <p:cNvSpPr/>
+            <p:nvPr>
+              <p:extLst>
+                <p:ext uri="{386F3935-93C4-4BCD-93E2-E3B085C9AB24}">
+                  <p16:designElem xmlns:p16="http://schemas.microsoft.com/office/powerpoint/2015/main" val="1"/>
+                </p:ext>
+              </p:extLst>
+            </p:nvPr>
+          </p:nvSpPr>
+          <p:spPr>
+            <a:xfrm>
+              <a:off x="3825434" y="0"/>
+              <a:ext cx="4303422" cy="1575461"/>
+            </a:xfrm>
+            <a:prstGeom prst="rect">
+              <a:avLst/>
+            </a:prstGeom>
+            <a:gradFill>
+              <a:gsLst>
+                <a:gs pos="0">
+                  <a:schemeClr val="accent1">
+                    <a:alpha val="17000"/>
+                  </a:schemeClr>
+                </a:gs>
+                <a:gs pos="74000">
+                  <a:schemeClr val="accent1">
+                    <a:lumMod val="50000"/>
+                    <a:alpha val="0"/>
+                  </a:schemeClr>
+                </a:gs>
+              </a:gsLst>
+              <a:lin ang="14400000" scaled="0"/>
+            </a:gradFill>
+            <a:ln>
+              <a:noFill/>
+            </a:ln>
+          </p:spPr>
+          <p:style>
+            <a:lnRef idx="2">
+              <a:schemeClr val="accent1">
+                <a:shade val="50000"/>
+              </a:schemeClr>
+            </a:lnRef>
+            <a:fillRef idx="1">
+              <a:schemeClr val="accent1"/>
+            </a:fillRef>
+            <a:effectRef idx="0">
+              <a:schemeClr val="accent1"/>
+            </a:effectRef>
+            <a:fontRef idx="minor">
+              <a:schemeClr val="lt1"/>
+            </a:fontRef>
+          </p:style>
+          <p:txBody>
+            <a:bodyPr rtlCol="0" anchor="ctr"/>
+            <a:lstStyle/>
+            <a:p>
+              <a:pPr algn="ctr"/>
+              <a:endParaRPr lang="en-US"/>
+            </a:p>
+          </p:txBody>
+        </p:sp>
+      </p:grpSp>
+      <p:sp>
+        <p:nvSpPr>
+          <p:cNvPr id="2" name="Title 1">
+            <a:extLst>
+              <a:ext uri="{FF2B5EF4-FFF2-40B4-BE49-F238E27FC236}">
+                <a16:creationId xmlns:a16="http://schemas.microsoft.com/office/drawing/2014/main" id="{EBA4E04B-06A8-D6E2-3141-8FAB48F2B4F8}"/>
+              </a:ext>
+            </a:extLst>
+          </p:cNvPr>
+          <p:cNvSpPr>
+            <a:spLocks noGrp="1"/>
+          </p:cNvSpPr>
+          <p:nvPr>
+            <p:ph type="title"/>
+          </p:nvPr>
+        </p:nvSpPr>
+        <p:spPr>
+          <a:xfrm>
+            <a:off x="1371598" y="319314"/>
+            <a:ext cx="9477377" cy="1030515"/>
+          </a:xfrm>
+        </p:spPr>
+        <p:txBody>
+          <a:bodyPr anchor="ctr">
+            <a:normAutofit/>
+          </a:bodyPr>
           <a:lstStyle/>
           <a:p>
             <a:r>
-              <a:rPr lang="en-GB" dirty="0"/>
+              <a:rPr lang="en-GB" sz="4000">
+                <a:solidFill>
+                  <a:srgbClr val="FFFFFF"/>
+                </a:solidFill>
+              </a:rPr>
               <a:t>Low Poly Model</a:t>
             </a:r>
           </a:p>
         </p:txBody>
       </p:sp>
-      <p:sp>
-        <p:nvSpPr>
-          <p:cNvPr id="3" name="Content Placeholder 2">
-            <a:extLst>
-              <a:ext uri="{FF2B5EF4-FFF2-40B4-BE49-F238E27FC236}">
-                <a16:creationId xmlns:a16="http://schemas.microsoft.com/office/drawing/2014/main" id="{D308B46B-E224-B941-716F-D61B0FB76974}"/>
-              </a:ext>
-            </a:extLst>
-          </p:cNvPr>
-          <p:cNvSpPr>
-            <a:spLocks noGrp="1"/>
-          </p:cNvSpPr>
-          <p:nvPr>
-            <p:ph idx="1"/>
-          </p:nvPr>
-        </p:nvSpPr>
-        <p:spPr>
-          <a:xfrm>
-            <a:off x="280332" y="571343"/>
-            <a:ext cx="10515600" cy="1869216"/>
-          </a:xfrm>
-        </p:spPr>
-        <p:txBody>
-          <a:bodyPr>
-            <a:normAutofit lnSpcReduction="10000"/>
-          </a:bodyPr>
-          <a:lstStyle/>
-          <a:p>
-            <a:pPr marL="0" indent="0">
-              <a:buNone/>
-            </a:pPr>
-            <a:r>
-              <a:rPr lang="en-GB" dirty="0"/>
-              <a:t>Based on the block out design, I created a complete model of the silo with features like bevels that contains very little edge loops to keep the polygon count as low as possible and prevent the model from appearing very smooth while also trying to have a clean topology, lacking n-</a:t>
-            </a:r>
-            <a:r>
-              <a:rPr lang="en-GB" dirty="0" err="1"/>
-              <a:t>gons</a:t>
-            </a:r>
-            <a:endParaRPr lang="en-GB" dirty="0"/>
-          </a:p>
-        </p:txBody>
-      </p:sp>
       <p:pic>
         <p:nvPicPr>
-          <p:cNvPr id="5" name="Picture 4">
-            <a:extLst>
-              <a:ext uri="{FF2B5EF4-FFF2-40B4-BE49-F238E27FC236}">
-                <a16:creationId xmlns:a16="http://schemas.microsoft.com/office/drawing/2014/main" id="{B2115B27-E5B5-949E-2872-811A4D9D4305}"/>
+          <p:cNvPr id="7" name="Picture 6">
+            <a:extLst>
+              <a:ext uri="{FF2B5EF4-FFF2-40B4-BE49-F238E27FC236}">
+                <a16:creationId xmlns:a16="http://schemas.microsoft.com/office/drawing/2014/main" id="{0838A3EE-055C-6C03-A92C-A72EB71F230C}"/>
               </a:ext>
             </a:extLst>
           </p:cNvPr>
@@ -3902,8 +5723,2084 @@
         </p:blipFill>
         <p:spPr>
           <a:xfrm>
-            <a:off x="1771972" y="2650281"/>
-            <a:ext cx="2991374" cy="3944101"/>
+            <a:off x="3936282" y="2050595"/>
+            <a:ext cx="2000567" cy="2617365"/>
+          </a:xfrm>
+          <a:prstGeom prst="rect">
+            <a:avLst/>
+          </a:prstGeom>
+        </p:spPr>
+      </p:pic>
+      <p:pic>
+        <p:nvPicPr>
+          <p:cNvPr id="5" name="Picture 4">
+            <a:extLst>
+              <a:ext uri="{FF2B5EF4-FFF2-40B4-BE49-F238E27FC236}">
+                <a16:creationId xmlns:a16="http://schemas.microsoft.com/office/drawing/2014/main" id="{B2115B27-E5B5-949E-2872-811A4D9D4305}"/>
+              </a:ext>
+            </a:extLst>
+          </p:cNvPr>
+          <p:cNvPicPr>
+            <a:picLocks noChangeAspect="1"/>
+          </p:cNvPicPr>
+          <p:nvPr/>
+        </p:nvPicPr>
+        <p:blipFill>
+          <a:blip r:embed="rId3">
+            <a:extLst>
+              <a:ext uri="{28A0092B-C50C-407E-A947-70E740481C1C}">
+                <a14:useLocalDpi xmlns:a14="http://schemas.microsoft.com/office/drawing/2010/main" val="0"/>
+              </a:ext>
+            </a:extLst>
+          </a:blip>
+          <a:stretch>
+            <a:fillRect/>
+          </a:stretch>
+        </p:blipFill>
+        <p:spPr>
+          <a:xfrm>
+            <a:off x="6267671" y="2074130"/>
+            <a:ext cx="2203070" cy="2617365"/>
+          </a:xfrm>
+          <a:prstGeom prst="rect">
+            <a:avLst/>
+          </a:prstGeom>
+        </p:spPr>
+      </p:pic>
+      <p:sp>
+        <p:nvSpPr>
+          <p:cNvPr id="3" name="Content Placeholder 2">
+            <a:extLst>
+              <a:ext uri="{FF2B5EF4-FFF2-40B4-BE49-F238E27FC236}">
+                <a16:creationId xmlns:a16="http://schemas.microsoft.com/office/drawing/2014/main" id="{D308B46B-E224-B941-716F-D61B0FB76974}"/>
+              </a:ext>
+            </a:extLst>
+          </p:cNvPr>
+          <p:cNvSpPr>
+            <a:spLocks noGrp="1"/>
+          </p:cNvSpPr>
+          <p:nvPr>
+            <p:ph idx="1"/>
+          </p:nvPr>
+        </p:nvSpPr>
+        <p:spPr>
+          <a:xfrm>
+            <a:off x="1371598" y="5070346"/>
+            <a:ext cx="9496427" cy="1385266"/>
+          </a:xfrm>
+        </p:spPr>
+        <p:txBody>
+          <a:bodyPr>
+            <a:normAutofit/>
+          </a:bodyPr>
+          <a:lstStyle/>
+          <a:p>
+            <a:pPr marL="0" indent="0">
+              <a:buNone/>
+            </a:pPr>
+            <a:r>
+              <a:rPr lang="en-GB" sz="2000"/>
+              <a:t>Based on the block out design, I created a complete model of the silo with features like bevels that contains very little edge loops to keep the polygon count as low as possible and prevent the model from appearing very smooth while also trying to have a clean topology, lacking n-gons</a:t>
+            </a:r>
+          </a:p>
+        </p:txBody>
+      </p:sp>
+    </p:spTree>
+    <p:extLst>
+      <p:ext uri="{BB962C8B-B14F-4D97-AF65-F5344CB8AC3E}">
+        <p14:creationId xmlns:p14="http://schemas.microsoft.com/office/powerpoint/2010/main" val="701177140"/>
+      </p:ext>
+    </p:extLst>
+  </p:cSld>
+  <p:clrMapOvr>
+    <a:masterClrMapping/>
+  </p:clrMapOvr>
+</p:sld>
+</file>
+
+<file path=ppt/slides/slide5.xml><?xml version="1.0" encoding="utf-8"?>
+<p:sld xmlns:a="http://schemas.openxmlformats.org/drawingml/2006/main" xmlns:r="http://schemas.openxmlformats.org/officeDocument/2006/relationships" xmlns:p="http://schemas.openxmlformats.org/presentationml/2006/main">
+  <p:cSld>
+    <p:bg>
+      <p:bgPr>
+        <a:solidFill>
+          <a:schemeClr val="bg1"/>
+        </a:solidFill>
+        <a:effectLst/>
+      </p:bgPr>
+    </p:bg>
+    <p:spTree>
+      <p:nvGrpSpPr>
+        <p:cNvPr id="1" name=""/>
+        <p:cNvGrpSpPr/>
+        <p:nvPr/>
+      </p:nvGrpSpPr>
+      <p:grpSpPr>
+        <a:xfrm>
+          <a:off x="0" y="0"/>
+          <a:ext cx="0" cy="0"/>
+          <a:chOff x="0" y="0"/>
+          <a:chExt cx="0" cy="0"/>
+        </a:xfrm>
+      </p:grpSpPr>
+      <p:sp useBgFill="1">
+        <p:nvSpPr>
+          <p:cNvPr id="22" name="Rectangle 21">
+            <a:extLst>
+              <a:ext uri="{FF2B5EF4-FFF2-40B4-BE49-F238E27FC236}">
+                <a16:creationId xmlns:a16="http://schemas.microsoft.com/office/drawing/2014/main" id="{50D1C5B3-B60D-4696-AE60-100D5EC8AB5D}"/>
+              </a:ext>
+              <a:ext uri="{C183D7F6-B498-43B3-948B-1728B52AA6E4}">
+                <adec:decorative xmlns:adec="http://schemas.microsoft.com/office/drawing/2017/decorative" val="1"/>
+              </a:ext>
+            </a:extLst>
+          </p:cNvPr>
+          <p:cNvSpPr>
+            <a:spLocks noGrp="1" noRot="1" noChangeAspect="1" noMove="1" noResize="1" noEditPoints="1" noAdjustHandles="1" noChangeArrowheads="1" noChangeShapeType="1" noTextEdit="1"/>
+          </p:cNvSpPr>
+          <p:nvPr>
+            <p:extLst>
+              <p:ext uri="{386F3935-93C4-4BCD-93E2-E3B085C9AB24}">
+                <p16:designElem xmlns:p16="http://schemas.microsoft.com/office/powerpoint/2015/main" val="1"/>
+              </p:ext>
+            </p:extLst>
+          </p:nvPr>
+        </p:nvSpPr>
+        <p:spPr>
+          <a:xfrm>
+            <a:off x="0" y="0"/>
+            <a:ext cx="12192000" cy="6858000"/>
+          </a:xfrm>
+          <a:prstGeom prst="rect">
+            <a:avLst/>
+          </a:prstGeom>
+          <a:ln w="12700" cap="flat" cmpd="sng" algn="ctr">
+            <a:noFill/>
+            <a:prstDash val="solid"/>
+            <a:miter lim="800000"/>
+          </a:ln>
+          <a:effectLst/>
+          <a:extLst>
+            <a:ext uri="{91240B29-F687-4F45-9708-019B960494DF}">
+              <a14:hiddenLine xmlns:a14="http://schemas.microsoft.com/office/drawing/2010/main" w="12700" cap="flat" cmpd="sng" algn="ctr">
+                <a:solidFill>
+                  <a:schemeClr val="accent1">
+                    <a:shade val="50000"/>
+                  </a:schemeClr>
+                </a:solidFill>
+                <a:prstDash val="solid"/>
+                <a:miter lim="800000"/>
+              </a14:hiddenLine>
+            </a:ext>
+          </a:extLst>
+        </p:spPr>
+        <p:style>
+          <a:lnRef idx="2">
+            <a:schemeClr val="accent1">
+              <a:shade val="50000"/>
+            </a:schemeClr>
+          </a:lnRef>
+          <a:fillRef idx="1">
+            <a:schemeClr val="accent1"/>
+          </a:fillRef>
+          <a:effectRef idx="0">
+            <a:schemeClr val="accent1"/>
+          </a:effectRef>
+          <a:fontRef idx="minor">
+            <a:schemeClr val="lt1"/>
+          </a:fontRef>
+        </p:style>
+        <p:txBody>
+          <a:bodyPr rtlCol="0" anchor="ctr"/>
+          <a:lstStyle/>
+          <a:p>
+            <a:pPr algn="ctr"/>
+            <a:endParaRPr lang="en-US"/>
+          </a:p>
+        </p:txBody>
+      </p:sp>
+      <p:grpSp>
+        <p:nvGrpSpPr>
+          <p:cNvPr id="24" name="Group 23">
+            <a:extLst>
+              <a:ext uri="{FF2B5EF4-FFF2-40B4-BE49-F238E27FC236}">
+                <a16:creationId xmlns:a16="http://schemas.microsoft.com/office/drawing/2014/main" id="{73EDDF53-0851-48D4-A466-6FE0DCE91E73}"/>
+              </a:ext>
+              <a:ext uri="{C183D7F6-B498-43B3-948B-1728B52AA6E4}">
+                <adec:decorative xmlns:adec="http://schemas.microsoft.com/office/drawing/2017/decorative" val="1"/>
+              </a:ext>
+            </a:extLst>
+          </p:cNvPr>
+          <p:cNvGrpSpPr>
+            <a:grpSpLocks noGrp="1" noUngrp="1" noRot="1" noChangeAspect="1" noMove="1" noResize="1"/>
+          </p:cNvGrpSpPr>
+          <p:nvPr>
+            <p:extLst>
+              <p:ext uri="{386F3935-93C4-4BCD-93E2-E3B085C9AB24}">
+                <p16:designElem xmlns:p16="http://schemas.microsoft.com/office/powerpoint/2015/main" val="1"/>
+              </p:ext>
+            </p:extLst>
+          </p:nvPr>
+        </p:nvGrpSpPr>
+        <p:grpSpPr>
+          <a:xfrm>
+            <a:off x="0" y="0"/>
+            <a:ext cx="12192002" cy="1576446"/>
+            <a:chOff x="0" y="0"/>
+            <a:chExt cx="12192002" cy="1576446"/>
+          </a:xfrm>
+        </p:grpSpPr>
+        <p:sp>
+          <p:nvSpPr>
+            <p:cNvPr id="25" name="Rectangle 24">
+              <a:extLst>
+                <a:ext uri="{FF2B5EF4-FFF2-40B4-BE49-F238E27FC236}">
+                  <a16:creationId xmlns:a16="http://schemas.microsoft.com/office/drawing/2014/main" id="{D074D04C-85E8-4A3E-90D7-86A10AE04827}"/>
+                </a:ext>
+                <a:ext uri="{C183D7F6-B498-43B3-948B-1728B52AA6E4}">
+                  <adec:decorative xmlns:adec="http://schemas.microsoft.com/office/drawing/2017/decorative" val="1"/>
+                </a:ext>
+              </a:extLst>
+            </p:cNvPr>
+            <p:cNvSpPr/>
+            <p:nvPr>
+              <p:extLst>
+                <p:ext uri="{386F3935-93C4-4BCD-93E2-E3B085C9AB24}">
+                  <p16:designElem xmlns:p16="http://schemas.microsoft.com/office/powerpoint/2015/main" val="1"/>
+                </p:ext>
+              </p:extLst>
+            </p:nvPr>
+          </p:nvSpPr>
+          <p:spPr>
+            <a:xfrm rot="10800000" flipH="1">
+              <a:off x="2" y="0"/>
+              <a:ext cx="12191998" cy="1575955"/>
+            </a:xfrm>
+            <a:prstGeom prst="rect">
+              <a:avLst/>
+            </a:prstGeom>
+            <a:gradFill>
+              <a:gsLst>
+                <a:gs pos="0">
+                  <a:srgbClr val="000000">
+                    <a:alpha val="96000"/>
+                  </a:srgbClr>
+                </a:gs>
+                <a:gs pos="100000">
+                  <a:schemeClr val="accent1">
+                    <a:lumMod val="75000"/>
+                  </a:schemeClr>
+                </a:gs>
+              </a:gsLst>
+              <a:lin ang="8400000" scaled="0"/>
+            </a:gradFill>
+            <a:ln>
+              <a:noFill/>
+            </a:ln>
+          </p:spPr>
+          <p:style>
+            <a:lnRef idx="2">
+              <a:schemeClr val="accent1">
+                <a:shade val="50000"/>
+              </a:schemeClr>
+            </a:lnRef>
+            <a:fillRef idx="1">
+              <a:schemeClr val="accent1"/>
+            </a:fillRef>
+            <a:effectRef idx="0">
+              <a:schemeClr val="accent1"/>
+            </a:effectRef>
+            <a:fontRef idx="minor">
+              <a:schemeClr val="lt1"/>
+            </a:fontRef>
+          </p:style>
+          <p:txBody>
+            <a:bodyPr rtlCol="0" anchor="ctr"/>
+            <a:lstStyle/>
+            <a:p>
+              <a:pPr algn="ctr"/>
+              <a:endParaRPr lang="en-US"/>
+            </a:p>
+          </p:txBody>
+        </p:sp>
+        <p:sp>
+          <p:nvSpPr>
+            <p:cNvPr id="26" name="Rectangle 25">
+              <a:extLst>
+                <a:ext uri="{FF2B5EF4-FFF2-40B4-BE49-F238E27FC236}">
+                  <a16:creationId xmlns:a16="http://schemas.microsoft.com/office/drawing/2014/main" id="{4097020A-86B6-43BD-A2AA-66AE72CA3110}"/>
+                </a:ext>
+                <a:ext uri="{C183D7F6-B498-43B3-948B-1728B52AA6E4}">
+                  <adec:decorative xmlns:adec="http://schemas.microsoft.com/office/drawing/2017/decorative" val="1"/>
+                </a:ext>
+              </a:extLst>
+            </p:cNvPr>
+            <p:cNvSpPr/>
+            <p:nvPr>
+              <p:extLst>
+                <p:ext uri="{386F3935-93C4-4BCD-93E2-E3B085C9AB24}">
+                  <p16:designElem xmlns:p16="http://schemas.microsoft.com/office/powerpoint/2015/main" val="1"/>
+                </p:ext>
+              </p:extLst>
+            </p:nvPr>
+          </p:nvSpPr>
+          <p:spPr>
+            <a:xfrm rot="16200000">
+              <a:off x="5307778" y="-5307778"/>
+              <a:ext cx="1576446" cy="12192002"/>
+            </a:xfrm>
+            <a:prstGeom prst="rect">
+              <a:avLst/>
+            </a:prstGeom>
+            <a:gradFill>
+              <a:gsLst>
+                <a:gs pos="45000">
+                  <a:schemeClr val="accent1">
+                    <a:alpha val="0"/>
+                  </a:schemeClr>
+                </a:gs>
+                <a:gs pos="99000">
+                  <a:srgbClr val="000000">
+                    <a:alpha val="74000"/>
+                  </a:srgbClr>
+                </a:gs>
+              </a:gsLst>
+              <a:lin ang="11400000" scaled="0"/>
+            </a:gradFill>
+            <a:ln>
+              <a:noFill/>
+            </a:ln>
+          </p:spPr>
+          <p:style>
+            <a:lnRef idx="2">
+              <a:schemeClr val="accent1">
+                <a:shade val="50000"/>
+              </a:schemeClr>
+            </a:lnRef>
+            <a:fillRef idx="1">
+              <a:schemeClr val="accent1"/>
+            </a:fillRef>
+            <a:effectRef idx="0">
+              <a:schemeClr val="accent1"/>
+            </a:effectRef>
+            <a:fontRef idx="minor">
+              <a:schemeClr val="lt1"/>
+            </a:fontRef>
+          </p:style>
+          <p:txBody>
+            <a:bodyPr rtlCol="0" anchor="ctr"/>
+            <a:lstStyle/>
+            <a:p>
+              <a:pPr algn="ctr"/>
+              <a:endParaRPr lang="en-US" dirty="0"/>
+            </a:p>
+          </p:txBody>
+        </p:sp>
+        <p:sp>
+          <p:nvSpPr>
+            <p:cNvPr id="27" name="Rectangle 26">
+              <a:extLst>
+                <a:ext uri="{FF2B5EF4-FFF2-40B4-BE49-F238E27FC236}">
+                  <a16:creationId xmlns:a16="http://schemas.microsoft.com/office/drawing/2014/main" id="{20C6C743-32FE-4E24-AA22-45D3B1C7C0A1}"/>
+                </a:ext>
+                <a:ext uri="{C183D7F6-B498-43B3-948B-1728B52AA6E4}">
+                  <adec:decorative xmlns:adec="http://schemas.microsoft.com/office/drawing/2017/decorative" val="1"/>
+                </a:ext>
+              </a:extLst>
+            </p:cNvPr>
+            <p:cNvSpPr/>
+            <p:nvPr>
+              <p:extLst>
+                <p:ext uri="{386F3935-93C4-4BCD-93E2-E3B085C9AB24}">
+                  <p16:designElem xmlns:p16="http://schemas.microsoft.com/office/powerpoint/2015/main" val="1"/>
+                </p:ext>
+              </p:extLst>
+            </p:nvPr>
+          </p:nvSpPr>
+          <p:spPr>
+            <a:xfrm>
+              <a:off x="3825434" y="0"/>
+              <a:ext cx="4303422" cy="1575461"/>
+            </a:xfrm>
+            <a:prstGeom prst="rect">
+              <a:avLst/>
+            </a:prstGeom>
+            <a:gradFill>
+              <a:gsLst>
+                <a:gs pos="0">
+                  <a:schemeClr val="accent1">
+                    <a:alpha val="17000"/>
+                  </a:schemeClr>
+                </a:gs>
+                <a:gs pos="74000">
+                  <a:schemeClr val="accent1">
+                    <a:lumMod val="50000"/>
+                    <a:alpha val="0"/>
+                  </a:schemeClr>
+                </a:gs>
+              </a:gsLst>
+              <a:lin ang="14400000" scaled="0"/>
+            </a:gradFill>
+            <a:ln>
+              <a:noFill/>
+            </a:ln>
+          </p:spPr>
+          <p:style>
+            <a:lnRef idx="2">
+              <a:schemeClr val="accent1">
+                <a:shade val="50000"/>
+              </a:schemeClr>
+            </a:lnRef>
+            <a:fillRef idx="1">
+              <a:schemeClr val="accent1"/>
+            </a:fillRef>
+            <a:effectRef idx="0">
+              <a:schemeClr val="accent1"/>
+            </a:effectRef>
+            <a:fontRef idx="minor">
+              <a:schemeClr val="lt1"/>
+            </a:fontRef>
+          </p:style>
+          <p:txBody>
+            <a:bodyPr rtlCol="0" anchor="ctr"/>
+            <a:lstStyle/>
+            <a:p>
+              <a:pPr algn="ctr"/>
+              <a:endParaRPr lang="en-US"/>
+            </a:p>
+          </p:txBody>
+        </p:sp>
+      </p:grpSp>
+      <p:sp>
+        <p:nvSpPr>
+          <p:cNvPr id="2" name="Title 1">
+            <a:extLst>
+              <a:ext uri="{FF2B5EF4-FFF2-40B4-BE49-F238E27FC236}">
+                <a16:creationId xmlns:a16="http://schemas.microsoft.com/office/drawing/2014/main" id="{1F4DDE59-AE15-4726-E211-3602EFE1BB38}"/>
+              </a:ext>
+            </a:extLst>
+          </p:cNvPr>
+          <p:cNvSpPr>
+            <a:spLocks noGrp="1"/>
+          </p:cNvSpPr>
+          <p:nvPr>
+            <p:ph type="title"/>
+          </p:nvPr>
+        </p:nvSpPr>
+        <p:spPr>
+          <a:xfrm>
+            <a:off x="1371600" y="407695"/>
+            <a:ext cx="9724030" cy="834251"/>
+          </a:xfrm>
+        </p:spPr>
+        <p:txBody>
+          <a:bodyPr anchor="ctr">
+            <a:normAutofit/>
+          </a:bodyPr>
+          <a:lstStyle/>
+          <a:p>
+            <a:r>
+              <a:rPr lang="en-GB" sz="4000">
+                <a:solidFill>
+                  <a:srgbClr val="FFFFFF"/>
+                </a:solidFill>
+              </a:rPr>
+              <a:t>High Poly Model</a:t>
+            </a:r>
+          </a:p>
+        </p:txBody>
+      </p:sp>
+      <p:pic>
+        <p:nvPicPr>
+          <p:cNvPr id="15" name="Picture 14">
+            <a:extLst>
+              <a:ext uri="{FF2B5EF4-FFF2-40B4-BE49-F238E27FC236}">
+                <a16:creationId xmlns:a16="http://schemas.microsoft.com/office/drawing/2014/main" id="{CECD77A8-3812-2D97-9005-C6CAE6C675D2}"/>
+              </a:ext>
+            </a:extLst>
+          </p:cNvPr>
+          <p:cNvPicPr>
+            <a:picLocks noChangeAspect="1"/>
+          </p:cNvPicPr>
+          <p:nvPr/>
+        </p:nvPicPr>
+        <p:blipFill>
+          <a:blip r:embed="rId2"/>
+          <a:stretch>
+            <a:fillRect/>
+          </a:stretch>
+        </p:blipFill>
+        <p:spPr>
+          <a:xfrm>
+            <a:off x="2161699" y="2200459"/>
+            <a:ext cx="2117003" cy="2133001"/>
+          </a:xfrm>
+          <a:prstGeom prst="rect">
+            <a:avLst/>
+          </a:prstGeom>
+        </p:spPr>
+      </p:pic>
+      <p:pic>
+        <p:nvPicPr>
+          <p:cNvPr id="17" name="Picture 16">
+            <a:extLst>
+              <a:ext uri="{FF2B5EF4-FFF2-40B4-BE49-F238E27FC236}">
+                <a16:creationId xmlns:a16="http://schemas.microsoft.com/office/drawing/2014/main" id="{92C1E772-86DA-503B-1C55-47EBAA757EA8}"/>
+              </a:ext>
+            </a:extLst>
+          </p:cNvPr>
+          <p:cNvPicPr>
+            <a:picLocks noChangeAspect="1"/>
+          </p:cNvPicPr>
+          <p:nvPr/>
+        </p:nvPicPr>
+        <p:blipFill>
+          <a:blip r:embed="rId3"/>
+          <a:stretch>
+            <a:fillRect/>
+          </a:stretch>
+        </p:blipFill>
+        <p:spPr>
+          <a:xfrm>
+            <a:off x="5078957" y="2200459"/>
+            <a:ext cx="2047681" cy="2133001"/>
+          </a:xfrm>
+          <a:prstGeom prst="rect">
+            <a:avLst/>
+          </a:prstGeom>
+        </p:spPr>
+      </p:pic>
+      <p:pic>
+        <p:nvPicPr>
+          <p:cNvPr id="11" name="Picture 10">
+            <a:extLst>
+              <a:ext uri="{FF2B5EF4-FFF2-40B4-BE49-F238E27FC236}">
+                <a16:creationId xmlns:a16="http://schemas.microsoft.com/office/drawing/2014/main" id="{FD63CCD4-6861-7AD4-3423-D2442CA87DD8}"/>
+              </a:ext>
+            </a:extLst>
+          </p:cNvPr>
+          <p:cNvPicPr>
+            <a:picLocks noChangeAspect="1"/>
+          </p:cNvPicPr>
+          <p:nvPr/>
+        </p:nvPicPr>
+        <p:blipFill>
+          <a:blip r:embed="rId4"/>
+          <a:srcRect r="9460"/>
+          <a:stretch>
+            <a:fillRect/>
+          </a:stretch>
+        </p:blipFill>
+        <p:spPr>
+          <a:xfrm>
+            <a:off x="7913295" y="2200459"/>
+            <a:ext cx="1945812" cy="2133001"/>
+          </a:xfrm>
+          <a:prstGeom prst="rect">
+            <a:avLst/>
+          </a:prstGeom>
+        </p:spPr>
+      </p:pic>
+      <p:sp>
+        <p:nvSpPr>
+          <p:cNvPr id="9" name="Content Placeholder 8">
+            <a:extLst>
+              <a:ext uri="{FF2B5EF4-FFF2-40B4-BE49-F238E27FC236}">
+                <a16:creationId xmlns:a16="http://schemas.microsoft.com/office/drawing/2014/main" id="{AA2F1771-073C-F013-0FD3-766E370E265D}"/>
+              </a:ext>
+            </a:extLst>
+          </p:cNvPr>
+          <p:cNvSpPr>
+            <a:spLocks noGrp="1"/>
+          </p:cNvSpPr>
+          <p:nvPr>
+            <p:ph idx="1"/>
+          </p:nvPr>
+        </p:nvSpPr>
+        <p:spPr>
+          <a:xfrm>
+            <a:off x="1371601" y="4786744"/>
+            <a:ext cx="9448800" cy="1442631"/>
+          </a:xfrm>
+        </p:spPr>
+        <p:txBody>
+          <a:bodyPr>
+            <a:normAutofit/>
+          </a:bodyPr>
+          <a:lstStyle/>
+          <a:p>
+            <a:pPr marL="0" indent="0">
+              <a:buNone/>
+            </a:pPr>
+            <a:r>
+              <a:rPr lang="en-GB" sz="2000"/>
+              <a:t>By adding a lot of edge loops to a duplicate model, I was able to smooth out all the edges of the model. Once I was happy with the final appearance of the high poly model preview, I smoothed  mesh preview to polygons to permanently smooth the model.</a:t>
+            </a:r>
+          </a:p>
+        </p:txBody>
+      </p:sp>
+    </p:spTree>
+    <p:extLst>
+      <p:ext uri="{BB962C8B-B14F-4D97-AF65-F5344CB8AC3E}">
+        <p14:creationId xmlns:p14="http://schemas.microsoft.com/office/powerpoint/2010/main" val="3145986586"/>
+      </p:ext>
+    </p:extLst>
+  </p:cSld>
+  <p:clrMapOvr>
+    <a:masterClrMapping/>
+  </p:clrMapOvr>
+</p:sld>
+</file>
+
+<file path=ppt/slides/slide6.xml><?xml version="1.0" encoding="utf-8"?>
+<p:sld xmlns:a="http://schemas.openxmlformats.org/drawingml/2006/main" xmlns:r="http://schemas.openxmlformats.org/officeDocument/2006/relationships" xmlns:p="http://schemas.openxmlformats.org/presentationml/2006/main">
+  <p:cSld>
+    <p:bg>
+      <p:bgPr>
+        <a:solidFill>
+          <a:schemeClr val="bg1"/>
+        </a:solidFill>
+        <a:effectLst/>
+      </p:bgPr>
+    </p:bg>
+    <p:spTree>
+      <p:nvGrpSpPr>
+        <p:cNvPr id="1" name=""/>
+        <p:cNvGrpSpPr/>
+        <p:nvPr/>
+      </p:nvGrpSpPr>
+      <p:grpSpPr>
+        <a:xfrm>
+          <a:off x="0" y="0"/>
+          <a:ext cx="0" cy="0"/>
+          <a:chOff x="0" y="0"/>
+          <a:chExt cx="0" cy="0"/>
+        </a:xfrm>
+      </p:grpSpPr>
+      <p:sp useBgFill="1">
+        <p:nvSpPr>
+          <p:cNvPr id="12" name="Rectangle 11">
+            <a:extLst>
+              <a:ext uri="{FF2B5EF4-FFF2-40B4-BE49-F238E27FC236}">
+                <a16:creationId xmlns:a16="http://schemas.microsoft.com/office/drawing/2014/main" id="{12609869-9E80-471B-A487-A53288E0E791}"/>
+              </a:ext>
+              <a:ext uri="{C183D7F6-B498-43B3-948B-1728B52AA6E4}">
+                <adec:decorative xmlns:adec="http://schemas.microsoft.com/office/drawing/2017/decorative" val="1"/>
+              </a:ext>
+            </a:extLst>
+          </p:cNvPr>
+          <p:cNvSpPr>
+            <a:spLocks noGrp="1" noRot="1" noChangeAspect="1" noMove="1" noResize="1" noEditPoints="1" noAdjustHandles="1" noChangeArrowheads="1" noChangeShapeType="1" noTextEdit="1"/>
+          </p:cNvSpPr>
+          <p:nvPr>
+            <p:extLst>
+              <p:ext uri="{386F3935-93C4-4BCD-93E2-E3B085C9AB24}">
+                <p16:designElem xmlns:p16="http://schemas.microsoft.com/office/powerpoint/2015/main" val="1"/>
+              </p:ext>
+            </p:extLst>
+          </p:nvPr>
+        </p:nvSpPr>
+        <p:spPr>
+          <a:xfrm>
+            <a:off x="0" y="0"/>
+            <a:ext cx="12192000" cy="6858000"/>
+          </a:xfrm>
+          <a:prstGeom prst="rect">
+            <a:avLst/>
+          </a:prstGeom>
+          <a:ln w="12700" cap="flat" cmpd="sng" algn="ctr">
+            <a:noFill/>
+            <a:prstDash val="solid"/>
+            <a:miter lim="800000"/>
+          </a:ln>
+          <a:effectLst/>
+          <a:extLst>
+            <a:ext uri="{91240B29-F687-4F45-9708-019B960494DF}">
+              <a14:hiddenLine xmlns:a14="http://schemas.microsoft.com/office/drawing/2010/main" w="12700" cap="flat" cmpd="sng" algn="ctr">
+                <a:solidFill>
+                  <a:schemeClr val="accent1">
+                    <a:shade val="50000"/>
+                  </a:schemeClr>
+                </a:solidFill>
+                <a:prstDash val="solid"/>
+                <a:miter lim="800000"/>
+              </a14:hiddenLine>
+            </a:ext>
+          </a:extLst>
+        </p:spPr>
+        <p:style>
+          <a:lnRef idx="2">
+            <a:schemeClr val="accent1">
+              <a:shade val="50000"/>
+            </a:schemeClr>
+          </a:lnRef>
+          <a:fillRef idx="1">
+            <a:schemeClr val="accent1"/>
+          </a:fillRef>
+          <a:effectRef idx="0">
+            <a:schemeClr val="accent1"/>
+          </a:effectRef>
+          <a:fontRef idx="minor">
+            <a:schemeClr val="lt1"/>
+          </a:fontRef>
+        </p:style>
+        <p:txBody>
+          <a:bodyPr rtlCol="0" anchor="ctr"/>
+          <a:lstStyle/>
+          <a:p>
+            <a:pPr algn="ctr"/>
+            <a:endParaRPr lang="en-US"/>
+          </a:p>
+        </p:txBody>
+      </p:sp>
+      <p:sp>
+        <p:nvSpPr>
+          <p:cNvPr id="2" name="Title 1">
+            <a:extLst>
+              <a:ext uri="{FF2B5EF4-FFF2-40B4-BE49-F238E27FC236}">
+                <a16:creationId xmlns:a16="http://schemas.microsoft.com/office/drawing/2014/main" id="{BD396534-F190-960F-50A0-EB90ADEAECD6}"/>
+              </a:ext>
+            </a:extLst>
+          </p:cNvPr>
+          <p:cNvSpPr>
+            <a:spLocks noGrp="1"/>
+          </p:cNvSpPr>
+          <p:nvPr>
+            <p:ph type="title"/>
+          </p:nvPr>
+        </p:nvSpPr>
+        <p:spPr>
+          <a:xfrm>
+            <a:off x="1136397" y="502020"/>
+            <a:ext cx="5323715" cy="1642970"/>
+          </a:xfrm>
+        </p:spPr>
+        <p:txBody>
+          <a:bodyPr anchor="b">
+            <a:normAutofit/>
+          </a:bodyPr>
+          <a:lstStyle/>
+          <a:p>
+            <a:r>
+              <a:rPr lang="en-GB" sz="4000"/>
+              <a:t>UV Unwrap</a:t>
+            </a:r>
+          </a:p>
+        </p:txBody>
+      </p:sp>
+      <p:sp>
+        <p:nvSpPr>
+          <p:cNvPr id="3" name="Content Placeholder 2">
+            <a:extLst>
+              <a:ext uri="{FF2B5EF4-FFF2-40B4-BE49-F238E27FC236}">
+                <a16:creationId xmlns:a16="http://schemas.microsoft.com/office/drawing/2014/main" id="{1F2B883D-C7AB-866E-5CB9-28F38650283A}"/>
+              </a:ext>
+            </a:extLst>
+          </p:cNvPr>
+          <p:cNvSpPr>
+            <a:spLocks noGrp="1"/>
+          </p:cNvSpPr>
+          <p:nvPr>
+            <p:ph idx="1"/>
+          </p:nvPr>
+        </p:nvSpPr>
+        <p:spPr>
+          <a:xfrm>
+            <a:off x="1144923" y="2405894"/>
+            <a:ext cx="5315189" cy="3535083"/>
+          </a:xfrm>
+        </p:spPr>
+        <p:txBody>
+          <a:bodyPr anchor="t">
+            <a:normAutofit/>
+          </a:bodyPr>
+          <a:lstStyle/>
+          <a:p>
+            <a:pPr marL="0" indent="0">
+              <a:buNone/>
+            </a:pPr>
+            <a:r>
+              <a:rPr lang="en-GB" sz="2000"/>
+              <a:t>My UV is made to prevent component overlap to ensure that individual parts of the model can be properly textured without errors   </a:t>
+            </a:r>
+          </a:p>
+        </p:txBody>
+      </p:sp>
+      <p:sp>
+        <p:nvSpPr>
+          <p:cNvPr id="14" name="Rectangle 13">
+            <a:extLst>
+              <a:ext uri="{FF2B5EF4-FFF2-40B4-BE49-F238E27FC236}">
+                <a16:creationId xmlns:a16="http://schemas.microsoft.com/office/drawing/2014/main" id="{7004738A-9D34-43E8-97D2-CA0EED4F8BE0}"/>
+              </a:ext>
+              <a:ext uri="{C183D7F6-B498-43B3-948B-1728B52AA6E4}">
+                <adec:decorative xmlns:adec="http://schemas.microsoft.com/office/drawing/2017/decorative" val="1"/>
+              </a:ext>
+            </a:extLst>
+          </p:cNvPr>
+          <p:cNvSpPr>
+            <a:spLocks noGrp="1" noRot="1" noChangeAspect="1" noMove="1" noResize="1" noEditPoints="1" noAdjustHandles="1" noChangeArrowheads="1" noChangeShapeType="1" noTextEdit="1"/>
+          </p:cNvSpPr>
+          <p:nvPr>
+            <p:extLst>
+              <p:ext uri="{386F3935-93C4-4BCD-93E2-E3B085C9AB24}">
+                <p16:designElem xmlns:p16="http://schemas.microsoft.com/office/powerpoint/2015/main" val="1"/>
+              </p:ext>
+            </p:extLst>
+          </p:nvPr>
+        </p:nvSpPr>
+        <p:spPr>
+          <a:xfrm rot="10800000" flipH="1">
+            <a:off x="8123333" y="-5"/>
+            <a:ext cx="4092521" cy="6858000"/>
+          </a:xfrm>
+          <a:prstGeom prst="rect">
+            <a:avLst/>
+          </a:prstGeom>
+          <a:gradFill>
+            <a:gsLst>
+              <a:gs pos="8000">
+                <a:srgbClr val="000000">
+                  <a:alpha val="94000"/>
+                </a:srgbClr>
+              </a:gs>
+              <a:gs pos="100000">
+                <a:schemeClr val="accent1"/>
+              </a:gs>
+            </a:gsLst>
+            <a:lin ang="2400000" scaled="0"/>
+          </a:gradFill>
+          <a:ln>
+            <a:noFill/>
+          </a:ln>
+        </p:spPr>
+        <p:style>
+          <a:lnRef idx="2">
+            <a:schemeClr val="accent1">
+              <a:shade val="50000"/>
+            </a:schemeClr>
+          </a:lnRef>
+          <a:fillRef idx="1">
+            <a:schemeClr val="accent1"/>
+          </a:fillRef>
+          <a:effectRef idx="0">
+            <a:schemeClr val="accent1"/>
+          </a:effectRef>
+          <a:fontRef idx="minor">
+            <a:schemeClr val="lt1"/>
+          </a:fontRef>
+        </p:style>
+        <p:txBody>
+          <a:bodyPr rtlCol="0" anchor="ctr"/>
+          <a:lstStyle/>
+          <a:p>
+            <a:pPr algn="ctr"/>
+            <a:endParaRPr lang="en-US"/>
+          </a:p>
+        </p:txBody>
+      </p:sp>
+      <p:sp>
+        <p:nvSpPr>
+          <p:cNvPr id="16" name="Rectangle 15">
+            <a:extLst>
+              <a:ext uri="{FF2B5EF4-FFF2-40B4-BE49-F238E27FC236}">
+                <a16:creationId xmlns:a16="http://schemas.microsoft.com/office/drawing/2014/main" id="{B8B8D07F-F13E-443E-BA68-2D26672D76B9}"/>
+              </a:ext>
+              <a:ext uri="{C183D7F6-B498-43B3-948B-1728B52AA6E4}">
+                <adec:decorative xmlns:adec="http://schemas.microsoft.com/office/drawing/2017/decorative" val="1"/>
+              </a:ext>
+            </a:extLst>
+          </p:cNvPr>
+          <p:cNvSpPr>
+            <a:spLocks noGrp="1" noRot="1" noChangeAspect="1" noMove="1" noResize="1" noEditPoints="1" noAdjustHandles="1" noChangeArrowheads="1" noChangeShapeType="1" noTextEdit="1"/>
+          </p:cNvSpPr>
+          <p:nvPr>
+            <p:extLst>
+              <p:ext uri="{386F3935-93C4-4BCD-93E2-E3B085C9AB24}">
+                <p16:designElem xmlns:p16="http://schemas.microsoft.com/office/powerpoint/2015/main" val="1"/>
+              </p:ext>
+            </p:extLst>
+          </p:nvPr>
+        </p:nvSpPr>
+        <p:spPr>
+          <a:xfrm rot="10800000" flipH="1">
+            <a:off x="8123333" y="-2"/>
+            <a:ext cx="4092521" cy="6400369"/>
+          </a:xfrm>
+          <a:prstGeom prst="rect">
+            <a:avLst/>
+          </a:prstGeom>
+          <a:gradFill>
+            <a:gsLst>
+              <a:gs pos="31000">
+                <a:schemeClr val="accent1">
+                  <a:lumMod val="50000"/>
+                  <a:alpha val="0"/>
+                </a:schemeClr>
+              </a:gs>
+              <a:gs pos="100000">
+                <a:schemeClr val="accent1">
+                  <a:lumMod val="50000"/>
+                  <a:alpha val="26000"/>
+                </a:schemeClr>
+              </a:gs>
+            </a:gsLst>
+            <a:lin ang="18000000" scaled="0"/>
+          </a:gradFill>
+          <a:ln>
+            <a:noFill/>
+          </a:ln>
+        </p:spPr>
+        <p:style>
+          <a:lnRef idx="2">
+            <a:schemeClr val="accent1">
+              <a:shade val="50000"/>
+            </a:schemeClr>
+          </a:lnRef>
+          <a:fillRef idx="1">
+            <a:schemeClr val="accent1"/>
+          </a:fillRef>
+          <a:effectRef idx="0">
+            <a:schemeClr val="accent1"/>
+          </a:effectRef>
+          <a:fontRef idx="minor">
+            <a:schemeClr val="lt1"/>
+          </a:fontRef>
+        </p:style>
+        <p:txBody>
+          <a:bodyPr rtlCol="0" anchor="ctr"/>
+          <a:lstStyle/>
+          <a:p>
+            <a:pPr algn="ctr"/>
+            <a:endParaRPr lang="en-US" dirty="0"/>
+          </a:p>
+        </p:txBody>
+      </p:sp>
+      <p:sp>
+        <p:nvSpPr>
+          <p:cNvPr id="18" name="Rectangle 17">
+            <a:extLst>
+              <a:ext uri="{FF2B5EF4-FFF2-40B4-BE49-F238E27FC236}">
+                <a16:creationId xmlns:a16="http://schemas.microsoft.com/office/drawing/2014/main" id="{2813A4FA-24A5-41ED-A534-3807D1B2F344}"/>
+              </a:ext>
+              <a:ext uri="{C183D7F6-B498-43B3-948B-1728B52AA6E4}">
+                <adec:decorative xmlns:adec="http://schemas.microsoft.com/office/drawing/2017/decorative" val="1"/>
+              </a:ext>
+            </a:extLst>
+          </p:cNvPr>
+          <p:cNvSpPr>
+            <a:spLocks noGrp="1" noRot="1" noChangeAspect="1" noMove="1" noResize="1" noEditPoints="1" noAdjustHandles="1" noChangeArrowheads="1" noChangeShapeType="1" noTextEdit="1"/>
+          </p:cNvSpPr>
+          <p:nvPr>
+            <p:extLst>
+              <p:ext uri="{386F3935-93C4-4BCD-93E2-E3B085C9AB24}">
+                <p16:designElem xmlns:p16="http://schemas.microsoft.com/office/powerpoint/2015/main" val="1"/>
+              </p:ext>
+            </p:extLst>
+          </p:nvPr>
+        </p:nvSpPr>
+        <p:spPr>
+          <a:xfrm rot="10800000" flipH="1">
+            <a:off x="8123333" y="-22"/>
+            <a:ext cx="4068667" cy="6400389"/>
+          </a:xfrm>
+          <a:prstGeom prst="rect">
+            <a:avLst/>
+          </a:prstGeom>
+          <a:gradFill>
+            <a:gsLst>
+              <a:gs pos="0">
+                <a:schemeClr val="accent1">
+                  <a:alpha val="0"/>
+                </a:schemeClr>
+              </a:gs>
+              <a:gs pos="72000">
+                <a:srgbClr val="000000">
+                  <a:alpha val="21000"/>
+                </a:srgbClr>
+              </a:gs>
+            </a:gsLst>
+            <a:lin ang="3000000" scaled="0"/>
+          </a:gradFill>
+          <a:ln>
+            <a:noFill/>
+          </a:ln>
+        </p:spPr>
+        <p:style>
+          <a:lnRef idx="2">
+            <a:schemeClr val="accent1">
+              <a:shade val="50000"/>
+            </a:schemeClr>
+          </a:lnRef>
+          <a:fillRef idx="1">
+            <a:schemeClr val="accent1"/>
+          </a:fillRef>
+          <a:effectRef idx="0">
+            <a:schemeClr val="accent1"/>
+          </a:effectRef>
+          <a:fontRef idx="minor">
+            <a:schemeClr val="lt1"/>
+          </a:fontRef>
+        </p:style>
+        <p:txBody>
+          <a:bodyPr rtlCol="0" anchor="ctr"/>
+          <a:lstStyle/>
+          <a:p>
+            <a:pPr algn="ctr"/>
+            <a:endParaRPr lang="en-US" dirty="0"/>
+          </a:p>
+        </p:txBody>
+      </p:sp>
+      <p:sp>
+        <p:nvSpPr>
+          <p:cNvPr id="20" name="Rectangle 19">
+            <a:extLst>
+              <a:ext uri="{FF2B5EF4-FFF2-40B4-BE49-F238E27FC236}">
+                <a16:creationId xmlns:a16="http://schemas.microsoft.com/office/drawing/2014/main" id="{C3944F27-CA70-4E84-A51A-E6BF89558979}"/>
+              </a:ext>
+              <a:ext uri="{C183D7F6-B498-43B3-948B-1728B52AA6E4}">
+                <adec:decorative xmlns:adec="http://schemas.microsoft.com/office/drawing/2017/decorative" val="1"/>
+              </a:ext>
+            </a:extLst>
+          </p:cNvPr>
+          <p:cNvSpPr>
+            <a:spLocks noGrp="1" noRot="1" noChangeAspect="1" noMove="1" noResize="1" noEditPoints="1" noAdjustHandles="1" noChangeArrowheads="1" noChangeShapeType="1" noTextEdit="1"/>
+          </p:cNvSpPr>
+          <p:nvPr>
+            <p:extLst>
+              <p:ext uri="{386F3935-93C4-4BCD-93E2-E3B085C9AB24}">
+                <p16:designElem xmlns:p16="http://schemas.microsoft.com/office/powerpoint/2015/main" val="1"/>
+              </p:ext>
+            </p:extLst>
+          </p:nvPr>
+        </p:nvSpPr>
+        <p:spPr>
+          <a:xfrm rot="10800000" flipH="1">
+            <a:off x="8123333" y="-10"/>
+            <a:ext cx="3611467" cy="6857997"/>
+          </a:xfrm>
+          <a:prstGeom prst="rect">
+            <a:avLst/>
+          </a:prstGeom>
+          <a:gradFill>
+            <a:gsLst>
+              <a:gs pos="0">
+                <a:schemeClr val="accent1">
+                  <a:alpha val="0"/>
+                </a:schemeClr>
+              </a:gs>
+              <a:gs pos="93000">
+                <a:srgbClr val="000000">
+                  <a:alpha val="29000"/>
+                </a:srgbClr>
+              </a:gs>
+            </a:gsLst>
+            <a:lin ang="5400000" scaled="0"/>
+          </a:gradFill>
+          <a:ln>
+            <a:noFill/>
+          </a:ln>
+        </p:spPr>
+        <p:style>
+          <a:lnRef idx="2">
+            <a:schemeClr val="accent1">
+              <a:shade val="50000"/>
+            </a:schemeClr>
+          </a:lnRef>
+          <a:fillRef idx="1">
+            <a:schemeClr val="accent1"/>
+          </a:fillRef>
+          <a:effectRef idx="0">
+            <a:schemeClr val="accent1"/>
+          </a:effectRef>
+          <a:fontRef idx="minor">
+            <a:schemeClr val="lt1"/>
+          </a:fontRef>
+        </p:style>
+        <p:txBody>
+          <a:bodyPr rtlCol="0" anchor="ctr"/>
+          <a:lstStyle/>
+          <a:p>
+            <a:pPr algn="ctr"/>
+            <a:endParaRPr lang="en-US" dirty="0"/>
+          </a:p>
+        </p:txBody>
+      </p:sp>
+      <p:pic>
+        <p:nvPicPr>
+          <p:cNvPr id="7" name="Picture 6">
+            <a:extLst>
+              <a:ext uri="{FF2B5EF4-FFF2-40B4-BE49-F238E27FC236}">
+                <a16:creationId xmlns:a16="http://schemas.microsoft.com/office/drawing/2014/main" id="{800B8AF7-45DA-7B0F-3548-9E0FB7F6C612}"/>
+              </a:ext>
+            </a:extLst>
+          </p:cNvPr>
+          <p:cNvPicPr>
+            <a:picLocks noChangeAspect="1"/>
+          </p:cNvPicPr>
+          <p:nvPr/>
+        </p:nvPicPr>
+        <p:blipFill>
+          <a:blip r:embed="rId2"/>
+          <a:stretch>
+            <a:fillRect/>
+          </a:stretch>
+        </p:blipFill>
+        <p:spPr>
+          <a:xfrm>
+            <a:off x="7075967" y="1557782"/>
+            <a:ext cx="4170530" cy="3774329"/>
+          </a:xfrm>
+          <a:prstGeom prst="rect">
+            <a:avLst/>
+          </a:prstGeom>
+        </p:spPr>
+      </p:pic>
+    </p:spTree>
+    <p:extLst>
+      <p:ext uri="{BB962C8B-B14F-4D97-AF65-F5344CB8AC3E}">
+        <p14:creationId xmlns:p14="http://schemas.microsoft.com/office/powerpoint/2010/main" val="3269459437"/>
+      </p:ext>
+    </p:extLst>
+  </p:cSld>
+  <p:clrMapOvr>
+    <a:masterClrMapping/>
+  </p:clrMapOvr>
+</p:sld>
+</file>
+
+<file path=ppt/slides/slide7.xml><?xml version="1.0" encoding="utf-8"?>
+<p:sld xmlns:a="http://schemas.openxmlformats.org/drawingml/2006/main" xmlns:r="http://schemas.openxmlformats.org/officeDocument/2006/relationships" xmlns:p="http://schemas.openxmlformats.org/presentationml/2006/main">
+  <p:cSld>
+    <p:bg>
+      <p:bgPr>
+        <a:solidFill>
+          <a:schemeClr val="bg1"/>
+        </a:solidFill>
+        <a:effectLst/>
+      </p:bgPr>
+    </p:bg>
+    <p:spTree>
+      <p:nvGrpSpPr>
+        <p:cNvPr id="1" name=""/>
+        <p:cNvGrpSpPr/>
+        <p:nvPr/>
+      </p:nvGrpSpPr>
+      <p:grpSpPr>
+        <a:xfrm>
+          <a:off x="0" y="0"/>
+          <a:ext cx="0" cy="0"/>
+          <a:chOff x="0" y="0"/>
+          <a:chExt cx="0" cy="0"/>
+        </a:xfrm>
+      </p:grpSpPr>
+      <p:sp useBgFill="1">
+        <p:nvSpPr>
+          <p:cNvPr id="12" name="Rectangle 11">
+            <a:extLst>
+              <a:ext uri="{FF2B5EF4-FFF2-40B4-BE49-F238E27FC236}">
+                <a16:creationId xmlns:a16="http://schemas.microsoft.com/office/drawing/2014/main" id="{B712E947-0734-45F9-9C4F-41114EC3A33E}"/>
+              </a:ext>
+              <a:ext uri="{C183D7F6-B498-43B3-948B-1728B52AA6E4}">
+                <adec:decorative xmlns:adec="http://schemas.microsoft.com/office/drawing/2017/decorative" val="1"/>
+              </a:ext>
+            </a:extLst>
+          </p:cNvPr>
+          <p:cNvSpPr>
+            <a:spLocks noGrp="1" noRot="1" noChangeAspect="1" noMove="1" noResize="1" noEditPoints="1" noAdjustHandles="1" noChangeArrowheads="1" noChangeShapeType="1" noTextEdit="1"/>
+          </p:cNvSpPr>
+          <p:nvPr>
+            <p:extLst>
+              <p:ext uri="{386F3935-93C4-4BCD-93E2-E3B085C9AB24}">
+                <p16:designElem xmlns:p16="http://schemas.microsoft.com/office/powerpoint/2015/main" val="1"/>
+              </p:ext>
+            </p:extLst>
+          </p:nvPr>
+        </p:nvSpPr>
+        <p:spPr>
+          <a:xfrm>
+            <a:off x="0" y="0"/>
+            <a:ext cx="12192000" cy="6858000"/>
+          </a:xfrm>
+          <a:prstGeom prst="rect">
+            <a:avLst/>
+          </a:prstGeom>
+          <a:ln w="12700" cap="flat" cmpd="sng" algn="ctr">
+            <a:noFill/>
+            <a:prstDash val="solid"/>
+            <a:miter lim="800000"/>
+          </a:ln>
+          <a:effectLst/>
+          <a:extLst>
+            <a:ext uri="{91240B29-F687-4F45-9708-019B960494DF}">
+              <a14:hiddenLine xmlns:a14="http://schemas.microsoft.com/office/drawing/2010/main" w="12700" cap="flat" cmpd="sng" algn="ctr">
+                <a:solidFill>
+                  <a:schemeClr val="accent1">
+                    <a:shade val="50000"/>
+                  </a:schemeClr>
+                </a:solidFill>
+                <a:prstDash val="solid"/>
+                <a:miter lim="800000"/>
+              </a14:hiddenLine>
+            </a:ext>
+          </a:extLst>
+        </p:spPr>
+        <p:style>
+          <a:lnRef idx="2">
+            <a:schemeClr val="accent1">
+              <a:shade val="50000"/>
+            </a:schemeClr>
+          </a:lnRef>
+          <a:fillRef idx="1">
+            <a:schemeClr val="accent1"/>
+          </a:fillRef>
+          <a:effectRef idx="0">
+            <a:schemeClr val="accent1"/>
+          </a:effectRef>
+          <a:fontRef idx="minor">
+            <a:schemeClr val="lt1"/>
+          </a:fontRef>
+        </p:style>
+        <p:txBody>
+          <a:bodyPr rtlCol="0" anchor="ctr"/>
+          <a:lstStyle/>
+          <a:p>
+            <a:pPr algn="ctr"/>
+            <a:endParaRPr lang="en-US"/>
+          </a:p>
+        </p:txBody>
+      </p:sp>
+      <p:sp>
+        <p:nvSpPr>
+          <p:cNvPr id="2" name="Title 1">
+            <a:extLst>
+              <a:ext uri="{FF2B5EF4-FFF2-40B4-BE49-F238E27FC236}">
+                <a16:creationId xmlns:a16="http://schemas.microsoft.com/office/drawing/2014/main" id="{D6ADCBB4-7B65-4B4A-8557-B08BBDDF43C6}"/>
+              </a:ext>
+            </a:extLst>
+          </p:cNvPr>
+          <p:cNvSpPr>
+            <a:spLocks noGrp="1"/>
+          </p:cNvSpPr>
+          <p:nvPr>
+            <p:ph type="title"/>
+          </p:nvPr>
+        </p:nvSpPr>
+        <p:spPr>
+          <a:xfrm>
+            <a:off x="1144506" y="457201"/>
+            <a:ext cx="4065669" cy="1933574"/>
+          </a:xfrm>
+        </p:spPr>
+        <p:txBody>
+          <a:bodyPr anchor="b">
+            <a:normAutofit/>
+          </a:bodyPr>
+          <a:lstStyle/>
+          <a:p>
+            <a:r>
+              <a:rPr lang="en-GB" sz="4000"/>
+              <a:t>Naming Conventions</a:t>
+            </a:r>
+          </a:p>
+        </p:txBody>
+      </p:sp>
+      <p:sp>
+        <p:nvSpPr>
+          <p:cNvPr id="3" name="Content Placeholder 2">
+            <a:extLst>
+              <a:ext uri="{FF2B5EF4-FFF2-40B4-BE49-F238E27FC236}">
+                <a16:creationId xmlns:a16="http://schemas.microsoft.com/office/drawing/2014/main" id="{BA5893D0-540F-E8FA-4807-B158FFE815F8}"/>
+              </a:ext>
+            </a:extLst>
+          </p:cNvPr>
+          <p:cNvSpPr>
+            <a:spLocks noGrp="1"/>
+          </p:cNvSpPr>
+          <p:nvPr>
+            <p:ph idx="1"/>
+          </p:nvPr>
+        </p:nvSpPr>
+        <p:spPr>
+          <a:xfrm>
+            <a:off x="1144505" y="2714625"/>
+            <a:ext cx="4065668" cy="3023566"/>
+          </a:xfrm>
+        </p:spPr>
+        <p:txBody>
+          <a:bodyPr>
+            <a:normAutofit/>
+          </a:bodyPr>
+          <a:lstStyle/>
+          <a:p>
+            <a:pPr marL="0" indent="0">
+              <a:buNone/>
+            </a:pPr>
+            <a:r>
+              <a:rPr lang="en-GB" sz="1700"/>
+              <a:t>To allow for more efficient baking in Substance Painter, each part of the models were named so I could instantly tell what part of the model I would be looking at. The names were the same for each part of the model with the exception of the suffix ‘_low’ for components on the low poly model and ‘_high’ for the high poly components. At this point, the two models were ready to be exported as two .fbx files for the texturing process in Substance Painter.</a:t>
+            </a:r>
+          </a:p>
+        </p:txBody>
+      </p:sp>
+      <p:pic>
+        <p:nvPicPr>
+          <p:cNvPr id="7" name="Picture 6">
+            <a:extLst>
+              <a:ext uri="{FF2B5EF4-FFF2-40B4-BE49-F238E27FC236}">
+                <a16:creationId xmlns:a16="http://schemas.microsoft.com/office/drawing/2014/main" id="{81E3C894-408B-7F53-3E7B-DFDD6CEE4D20}"/>
+              </a:ext>
+            </a:extLst>
+          </p:cNvPr>
+          <p:cNvPicPr>
+            <a:picLocks noChangeAspect="1"/>
+          </p:cNvPicPr>
+          <p:nvPr/>
+        </p:nvPicPr>
+        <p:blipFill>
+          <a:blip r:embed="rId2"/>
+          <a:srcRect t="3116" b="3081"/>
+          <a:stretch>
+            <a:fillRect/>
+          </a:stretch>
+        </p:blipFill>
+        <p:spPr>
+          <a:xfrm>
+            <a:off x="5534026" y="1367157"/>
+            <a:ext cx="2682054" cy="3895149"/>
+          </a:xfrm>
+          <a:prstGeom prst="rect">
+            <a:avLst/>
+          </a:prstGeom>
+        </p:spPr>
+      </p:pic>
+      <p:pic>
+        <p:nvPicPr>
+          <p:cNvPr id="5" name="Picture 4">
+            <a:extLst>
+              <a:ext uri="{FF2B5EF4-FFF2-40B4-BE49-F238E27FC236}">
+                <a16:creationId xmlns:a16="http://schemas.microsoft.com/office/drawing/2014/main" id="{DE6C6FF1-47B1-9C0F-FE55-8B5DD9B70999}"/>
+              </a:ext>
+            </a:extLst>
+          </p:cNvPr>
+          <p:cNvPicPr>
+            <a:picLocks noChangeAspect="1"/>
+          </p:cNvPicPr>
+          <p:nvPr/>
+        </p:nvPicPr>
+        <p:blipFill>
+          <a:blip r:embed="rId3"/>
+          <a:srcRect t="3180"/>
+          <a:stretch>
+            <a:fillRect/>
+          </a:stretch>
+        </p:blipFill>
+        <p:spPr>
+          <a:xfrm>
+            <a:off x="8537813" y="1922732"/>
+            <a:ext cx="2682054" cy="2783993"/>
+          </a:xfrm>
+          <a:prstGeom prst="rect">
+            <a:avLst/>
+          </a:prstGeom>
+        </p:spPr>
+      </p:pic>
+      <p:sp>
+        <p:nvSpPr>
+          <p:cNvPr id="14" name="Rectangle 13">
+            <a:extLst>
+              <a:ext uri="{FF2B5EF4-FFF2-40B4-BE49-F238E27FC236}">
+                <a16:creationId xmlns:a16="http://schemas.microsoft.com/office/drawing/2014/main" id="{5A65989E-BBD5-44D7-AA86-7AFD5D46BBC0}"/>
+              </a:ext>
+              <a:ext uri="{C183D7F6-B498-43B3-948B-1728B52AA6E4}">
+                <adec:decorative xmlns:adec="http://schemas.microsoft.com/office/drawing/2017/decorative" val="1"/>
+              </a:ext>
+            </a:extLst>
+          </p:cNvPr>
+          <p:cNvSpPr>
+            <a:spLocks noGrp="1" noRot="1" noChangeAspect="1" noMove="1" noResize="1" noEditPoints="1" noAdjustHandles="1" noChangeArrowheads="1" noChangeShapeType="1" noTextEdit="1"/>
+          </p:cNvSpPr>
+          <p:nvPr>
+            <p:extLst>
+              <p:ext uri="{386F3935-93C4-4BCD-93E2-E3B085C9AB24}">
+                <p16:designElem xmlns:p16="http://schemas.microsoft.com/office/powerpoint/2015/main" val="1"/>
+              </p:ext>
+            </p:extLst>
+          </p:nvPr>
+        </p:nvSpPr>
+        <p:spPr>
+          <a:xfrm rot="10800000" flipH="1">
+            <a:off x="0" y="6400799"/>
+            <a:ext cx="12192000" cy="456773"/>
+          </a:xfrm>
+          <a:prstGeom prst="rect">
+            <a:avLst/>
+          </a:prstGeom>
+          <a:gradFill>
+            <a:gsLst>
+              <a:gs pos="0">
+                <a:schemeClr val="accent1"/>
+              </a:gs>
+              <a:gs pos="56000">
+                <a:srgbClr val="000000"/>
+              </a:gs>
+            </a:gsLst>
+            <a:lin ang="2400000" scaled="0"/>
+          </a:gradFill>
+          <a:ln>
+            <a:noFill/>
+          </a:ln>
+        </p:spPr>
+        <p:style>
+          <a:lnRef idx="2">
+            <a:schemeClr val="accent1">
+              <a:shade val="50000"/>
+            </a:schemeClr>
+          </a:lnRef>
+          <a:fillRef idx="1">
+            <a:schemeClr val="accent1"/>
+          </a:fillRef>
+          <a:effectRef idx="0">
+            <a:schemeClr val="accent1"/>
+          </a:effectRef>
+          <a:fontRef idx="minor">
+            <a:schemeClr val="lt1"/>
+          </a:fontRef>
+        </p:style>
+        <p:txBody>
+          <a:bodyPr rtlCol="0" anchor="ctr"/>
+          <a:lstStyle/>
+          <a:p>
+            <a:pPr algn="ctr"/>
+            <a:endParaRPr lang="en-US"/>
+          </a:p>
+        </p:txBody>
+      </p:sp>
+      <p:sp>
+        <p:nvSpPr>
+          <p:cNvPr id="16" name="Rectangle 15">
+            <a:extLst>
+              <a:ext uri="{FF2B5EF4-FFF2-40B4-BE49-F238E27FC236}">
+                <a16:creationId xmlns:a16="http://schemas.microsoft.com/office/drawing/2014/main" id="{231A2881-D8D7-4A7D-ACA3-E9F849F853D8}"/>
+              </a:ext>
+              <a:ext uri="{C183D7F6-B498-43B3-948B-1728B52AA6E4}">
+                <adec:decorative xmlns:adec="http://schemas.microsoft.com/office/drawing/2017/decorative" val="1"/>
+              </a:ext>
+            </a:extLst>
+          </p:cNvPr>
+          <p:cNvSpPr>
+            <a:spLocks noGrp="1" noRot="1" noChangeAspect="1" noMove="1" noResize="1" noEditPoints="1" noAdjustHandles="1" noChangeArrowheads="1" noChangeShapeType="1" noTextEdit="1"/>
+          </p:cNvSpPr>
+          <p:nvPr>
+            <p:extLst>
+              <p:ext uri="{386F3935-93C4-4BCD-93E2-E3B085C9AB24}">
+                <p16:designElem xmlns:p16="http://schemas.microsoft.com/office/powerpoint/2015/main" val="1"/>
+              </p:ext>
+            </p:extLst>
+          </p:nvPr>
+        </p:nvSpPr>
+        <p:spPr>
+          <a:xfrm flipH="1">
+            <a:off x="4038600" y="6400799"/>
+            <a:ext cx="8153398" cy="456772"/>
+          </a:xfrm>
+          <a:prstGeom prst="rect">
+            <a:avLst/>
+          </a:prstGeom>
+          <a:gradFill>
+            <a:gsLst>
+              <a:gs pos="0">
+                <a:srgbClr val="000000">
+                  <a:alpha val="63000"/>
+                </a:srgbClr>
+              </a:gs>
+              <a:gs pos="100000">
+                <a:schemeClr val="accent1">
+                  <a:lumMod val="75000"/>
+                </a:schemeClr>
+              </a:gs>
+            </a:gsLst>
+            <a:lin ang="13800000" scaled="0"/>
+          </a:gradFill>
+          <a:ln>
+            <a:noFill/>
+          </a:ln>
+        </p:spPr>
+        <p:style>
+          <a:lnRef idx="2">
+            <a:schemeClr val="accent1">
+              <a:shade val="50000"/>
+            </a:schemeClr>
+          </a:lnRef>
+          <a:fillRef idx="1">
+            <a:schemeClr val="accent1"/>
+          </a:fillRef>
+          <a:effectRef idx="0">
+            <a:schemeClr val="accent1"/>
+          </a:effectRef>
+          <a:fontRef idx="minor">
+            <a:schemeClr val="lt1"/>
+          </a:fontRef>
+        </p:style>
+        <p:txBody>
+          <a:bodyPr rtlCol="0" anchor="ctr"/>
+          <a:lstStyle/>
+          <a:p>
+            <a:pPr algn="ctr"/>
+            <a:endParaRPr lang="en-US"/>
+          </a:p>
+        </p:txBody>
+      </p:sp>
+    </p:spTree>
+    <p:extLst>
+      <p:ext uri="{BB962C8B-B14F-4D97-AF65-F5344CB8AC3E}">
+        <p14:creationId xmlns:p14="http://schemas.microsoft.com/office/powerpoint/2010/main" val="1927909753"/>
+      </p:ext>
+    </p:extLst>
+  </p:cSld>
+  <p:clrMapOvr>
+    <a:masterClrMapping/>
+  </p:clrMapOvr>
+</p:sld>
+</file>
+
+<file path=ppt/slides/slide8.xml><?xml version="1.0" encoding="utf-8"?>
+<p:sld xmlns:a="http://schemas.openxmlformats.org/drawingml/2006/main" xmlns:r="http://schemas.openxmlformats.org/officeDocument/2006/relationships" xmlns:p="http://schemas.openxmlformats.org/presentationml/2006/main">
+  <p:cSld>
+    <p:bg>
+      <p:bgPr>
+        <a:solidFill>
+          <a:schemeClr val="bg1"/>
+        </a:solidFill>
+        <a:effectLst/>
+      </p:bgPr>
+    </p:bg>
+    <p:spTree>
+      <p:nvGrpSpPr>
+        <p:cNvPr id="1" name=""/>
+        <p:cNvGrpSpPr/>
+        <p:nvPr/>
+      </p:nvGrpSpPr>
+      <p:grpSpPr>
+        <a:xfrm>
+          <a:off x="0" y="0"/>
+          <a:ext cx="0" cy="0"/>
+          <a:chOff x="0" y="0"/>
+          <a:chExt cx="0" cy="0"/>
+        </a:xfrm>
+      </p:grpSpPr>
+      <p:sp>
+        <p:nvSpPr>
+          <p:cNvPr id="14" name="Rectangle 13">
+            <a:extLst>
+              <a:ext uri="{FF2B5EF4-FFF2-40B4-BE49-F238E27FC236}">
+                <a16:creationId xmlns:a16="http://schemas.microsoft.com/office/drawing/2014/main" id="{EDC07B27-4E3C-4BCF-ABDB-6AA72857C058}"/>
+              </a:ext>
+              <a:ext uri="{C183D7F6-B498-43B3-948B-1728B52AA6E4}">
+                <adec:decorative xmlns:adec="http://schemas.microsoft.com/office/drawing/2017/decorative" val="1"/>
+              </a:ext>
+            </a:extLst>
+          </p:cNvPr>
+          <p:cNvSpPr>
+            <a:spLocks noGrp="1" noRot="1" noChangeAspect="1" noMove="1" noResize="1" noEditPoints="1" noAdjustHandles="1" noChangeArrowheads="1" noChangeShapeType="1" noTextEdit="1"/>
+          </p:cNvSpPr>
+          <p:nvPr>
+            <p:extLst>
+              <p:ext uri="{386F3935-93C4-4BCD-93E2-E3B085C9AB24}">
+                <p16:designElem xmlns:p16="http://schemas.microsoft.com/office/powerpoint/2015/main" val="1"/>
+              </p:ext>
+            </p:extLst>
+          </p:nvPr>
+        </p:nvSpPr>
+        <p:spPr>
+          <a:xfrm flipH="1">
+            <a:off x="2" y="-1500"/>
+            <a:ext cx="12191998" cy="6858000"/>
+          </a:xfrm>
+          <a:prstGeom prst="rect">
+            <a:avLst/>
+          </a:prstGeom>
+          <a:gradFill>
+            <a:gsLst>
+              <a:gs pos="19000">
+                <a:srgbClr val="000000">
+                  <a:alpha val="96000"/>
+                </a:srgbClr>
+              </a:gs>
+              <a:gs pos="100000">
+                <a:schemeClr val="accent1"/>
+              </a:gs>
+            </a:gsLst>
+            <a:lin ang="9000000" scaled="0"/>
+          </a:gradFill>
+          <a:ln>
+            <a:noFill/>
+          </a:ln>
+        </p:spPr>
+        <p:style>
+          <a:lnRef idx="2">
+            <a:schemeClr val="accent1">
+              <a:shade val="50000"/>
+            </a:schemeClr>
+          </a:lnRef>
+          <a:fillRef idx="1">
+            <a:schemeClr val="accent1"/>
+          </a:fillRef>
+          <a:effectRef idx="0">
+            <a:schemeClr val="accent1"/>
+          </a:effectRef>
+          <a:fontRef idx="minor">
+            <a:schemeClr val="lt1"/>
+          </a:fontRef>
+        </p:style>
+        <p:txBody>
+          <a:bodyPr rtlCol="0" anchor="ctr"/>
+          <a:lstStyle/>
+          <a:p>
+            <a:pPr algn="ctr"/>
+            <a:endParaRPr lang="en-US"/>
+          </a:p>
+        </p:txBody>
+      </p:sp>
+      <p:sp>
+        <p:nvSpPr>
+          <p:cNvPr id="16" name="Rectangle 15">
+            <a:extLst>
+              <a:ext uri="{FF2B5EF4-FFF2-40B4-BE49-F238E27FC236}">
+                <a16:creationId xmlns:a16="http://schemas.microsoft.com/office/drawing/2014/main" id="{83D11BE6-2A04-4DBB-842D-88602B5EC728}"/>
+              </a:ext>
+              <a:ext uri="{C183D7F6-B498-43B3-948B-1728B52AA6E4}">
+                <adec:decorative xmlns:adec="http://schemas.microsoft.com/office/drawing/2017/decorative" val="1"/>
+              </a:ext>
+            </a:extLst>
+          </p:cNvPr>
+          <p:cNvSpPr>
+            <a:spLocks noGrp="1" noRot="1" noChangeAspect="1" noMove="1" noResize="1" noEditPoints="1" noAdjustHandles="1" noChangeArrowheads="1" noChangeShapeType="1" noTextEdit="1"/>
+          </p:cNvSpPr>
+          <p:nvPr>
+            <p:extLst>
+              <p:ext uri="{386F3935-93C4-4BCD-93E2-E3B085C9AB24}">
+                <p16:designElem xmlns:p16="http://schemas.microsoft.com/office/powerpoint/2015/main" val="1"/>
+              </p:ext>
+            </p:extLst>
+          </p:nvPr>
+        </p:nvSpPr>
+        <p:spPr>
+          <a:xfrm flipH="1">
+            <a:off x="478536" y="12437"/>
+            <a:ext cx="11713464" cy="6844063"/>
+          </a:xfrm>
+          <a:prstGeom prst="rect">
+            <a:avLst/>
+          </a:prstGeom>
+          <a:gradFill>
+            <a:gsLst>
+              <a:gs pos="0">
+                <a:srgbClr val="000000">
+                  <a:alpha val="71765"/>
+                </a:srgbClr>
+              </a:gs>
+              <a:gs pos="100000">
+                <a:schemeClr val="accent1">
+                  <a:alpha val="20000"/>
+                </a:schemeClr>
+              </a:gs>
+            </a:gsLst>
+            <a:lin ang="15600000" scaled="0"/>
+          </a:gradFill>
+          <a:ln>
+            <a:noFill/>
+          </a:ln>
+        </p:spPr>
+        <p:style>
+          <a:lnRef idx="2">
+            <a:schemeClr val="accent1">
+              <a:shade val="50000"/>
+            </a:schemeClr>
+          </a:lnRef>
+          <a:fillRef idx="1">
+            <a:schemeClr val="accent1"/>
+          </a:fillRef>
+          <a:effectRef idx="0">
+            <a:schemeClr val="accent1"/>
+          </a:effectRef>
+          <a:fontRef idx="minor">
+            <a:schemeClr val="lt1"/>
+          </a:fontRef>
+        </p:style>
+        <p:txBody>
+          <a:bodyPr rtlCol="0" anchor="ctr"/>
+          <a:lstStyle/>
+          <a:p>
+            <a:pPr algn="ctr"/>
+            <a:endParaRPr lang="en-US"/>
+          </a:p>
+        </p:txBody>
+      </p:sp>
+      <p:sp>
+        <p:nvSpPr>
+          <p:cNvPr id="18" name="Rectangle 17">
+            <a:extLst>
+              <a:ext uri="{FF2B5EF4-FFF2-40B4-BE49-F238E27FC236}">
+                <a16:creationId xmlns:a16="http://schemas.microsoft.com/office/drawing/2014/main" id="{2A05E02A-9AA9-45EC-B87B-B46F043F3F97}"/>
+              </a:ext>
+              <a:ext uri="{C183D7F6-B498-43B3-948B-1728B52AA6E4}">
+                <adec:decorative xmlns:adec="http://schemas.microsoft.com/office/drawing/2017/decorative" val="1"/>
+              </a:ext>
+            </a:extLst>
+          </p:cNvPr>
+          <p:cNvSpPr>
+            <a:spLocks noGrp="1" noRot="1" noChangeAspect="1" noMove="1" noResize="1" noEditPoints="1" noAdjustHandles="1" noChangeArrowheads="1" noChangeShapeType="1" noTextEdit="1"/>
+          </p:cNvSpPr>
+          <p:nvPr>
+            <p:extLst>
+              <p:ext uri="{386F3935-93C4-4BCD-93E2-E3B085C9AB24}">
+                <p16:designElem xmlns:p16="http://schemas.microsoft.com/office/powerpoint/2015/main" val="1"/>
+              </p:ext>
+            </p:extLst>
+          </p:nvPr>
+        </p:nvSpPr>
+        <p:spPr>
+          <a:xfrm flipH="1">
+            <a:off x="-9" y="2724072"/>
+            <a:ext cx="12192008" cy="4114801"/>
+          </a:xfrm>
+          <a:prstGeom prst="rect">
+            <a:avLst/>
+          </a:prstGeom>
+          <a:gradFill>
+            <a:gsLst>
+              <a:gs pos="30000">
+                <a:schemeClr val="accent1">
+                  <a:lumMod val="75000"/>
+                  <a:alpha val="19000"/>
+                </a:schemeClr>
+              </a:gs>
+              <a:gs pos="100000">
+                <a:schemeClr val="accent1">
+                  <a:alpha val="24000"/>
+                </a:schemeClr>
+              </a:gs>
+            </a:gsLst>
+            <a:lin ang="21594000" scaled="0"/>
+          </a:gradFill>
+          <a:ln>
+            <a:noFill/>
+          </a:ln>
+        </p:spPr>
+        <p:style>
+          <a:lnRef idx="2">
+            <a:schemeClr val="accent1">
+              <a:shade val="50000"/>
+            </a:schemeClr>
+          </a:lnRef>
+          <a:fillRef idx="1">
+            <a:schemeClr val="accent1"/>
+          </a:fillRef>
+          <a:effectRef idx="0">
+            <a:schemeClr val="accent1"/>
+          </a:effectRef>
+          <a:fontRef idx="minor">
+            <a:schemeClr val="lt1"/>
+          </a:fontRef>
+        </p:style>
+        <p:txBody>
+          <a:bodyPr rtlCol="0" anchor="ctr"/>
+          <a:lstStyle/>
+          <a:p>
+            <a:pPr algn="ctr"/>
+            <a:endParaRPr lang="en-US"/>
+          </a:p>
+        </p:txBody>
+      </p:sp>
+      <p:sp>
+        <p:nvSpPr>
+          <p:cNvPr id="20" name="Rectangle 19">
+            <a:extLst>
+              <a:ext uri="{FF2B5EF4-FFF2-40B4-BE49-F238E27FC236}">
+                <a16:creationId xmlns:a16="http://schemas.microsoft.com/office/drawing/2014/main" id="{0E91EDBA-E8E0-4575-8147-B700345215CE}"/>
+              </a:ext>
+              <a:ext uri="{C183D7F6-B498-43B3-948B-1728B52AA6E4}">
+                <adec:decorative xmlns:adec="http://schemas.microsoft.com/office/drawing/2017/decorative" val="1"/>
+              </a:ext>
+            </a:extLst>
+          </p:cNvPr>
+          <p:cNvSpPr>
+            <a:spLocks noGrp="1" noRot="1" noChangeAspect="1" noMove="1" noResize="1" noEditPoints="1" noAdjustHandles="1" noChangeArrowheads="1" noChangeShapeType="1" noTextEdit="1"/>
+          </p:cNvSpPr>
+          <p:nvPr>
+            <p:extLst>
+              <p:ext uri="{386F3935-93C4-4BCD-93E2-E3B085C9AB24}">
+                <p16:designElem xmlns:p16="http://schemas.microsoft.com/office/powerpoint/2015/main" val="1"/>
+              </p:ext>
+            </p:extLst>
+          </p:nvPr>
+        </p:nvSpPr>
+        <p:spPr>
+          <a:xfrm rot="16200000" flipH="1">
+            <a:off x="-1709672" y="1716338"/>
+            <a:ext cx="6858003" cy="3422328"/>
+          </a:xfrm>
+          <a:prstGeom prst="rect">
+            <a:avLst/>
+          </a:prstGeom>
+          <a:gradFill>
+            <a:gsLst>
+              <a:gs pos="0">
+                <a:schemeClr val="accent1">
+                  <a:alpha val="52000"/>
+                </a:schemeClr>
+              </a:gs>
+              <a:gs pos="76000">
+                <a:schemeClr val="accent1">
+                  <a:lumMod val="75000"/>
+                  <a:alpha val="0"/>
+                </a:schemeClr>
+              </a:gs>
+            </a:gsLst>
+            <a:lin ang="4800000" scaled="0"/>
+          </a:gradFill>
+          <a:ln>
+            <a:noFill/>
+          </a:ln>
+        </p:spPr>
+        <p:style>
+          <a:lnRef idx="2">
+            <a:schemeClr val="accent1">
+              <a:shade val="50000"/>
+            </a:schemeClr>
+          </a:lnRef>
+          <a:fillRef idx="1">
+            <a:schemeClr val="accent1"/>
+          </a:fillRef>
+          <a:effectRef idx="0">
+            <a:schemeClr val="accent1"/>
+          </a:effectRef>
+          <a:fontRef idx="minor">
+            <a:schemeClr val="lt1"/>
+          </a:fontRef>
+        </p:style>
+        <p:txBody>
+          <a:bodyPr rtlCol="0" anchor="ctr"/>
+          <a:lstStyle/>
+          <a:p>
+            <a:pPr algn="ctr"/>
+            <a:endParaRPr lang="en-US"/>
+          </a:p>
+        </p:txBody>
+      </p:sp>
+      <p:sp>
+        <p:nvSpPr>
+          <p:cNvPr id="2" name="Title 1">
+            <a:extLst>
+              <a:ext uri="{FF2B5EF4-FFF2-40B4-BE49-F238E27FC236}">
+                <a16:creationId xmlns:a16="http://schemas.microsoft.com/office/drawing/2014/main" id="{5966C5BB-77CB-230A-0D75-1764AF2BCD89}"/>
+              </a:ext>
+            </a:extLst>
+          </p:cNvPr>
+          <p:cNvSpPr>
+            <a:spLocks noGrp="1"/>
+          </p:cNvSpPr>
+          <p:nvPr>
+            <p:ph type="title"/>
+          </p:nvPr>
+        </p:nvSpPr>
+        <p:spPr>
+          <a:xfrm>
+            <a:off x="1166884" y="-382988"/>
+            <a:ext cx="9867331" cy="1167495"/>
+          </a:xfrm>
+        </p:spPr>
+        <p:txBody>
+          <a:bodyPr vert="horz" lIns="91440" tIns="45720" rIns="91440" bIns="45720" rtlCol="0" anchor="b">
+            <a:normAutofit/>
+          </a:bodyPr>
+          <a:lstStyle/>
+          <a:p>
+            <a:pPr algn="ctr"/>
+            <a:r>
+              <a:rPr lang="en-US" sz="4800" dirty="0">
+                <a:solidFill>
+                  <a:srgbClr val="FFFFFF"/>
+                </a:solidFill>
+              </a:rPr>
+              <a:t>Baking</a:t>
+            </a:r>
+          </a:p>
+        </p:txBody>
+      </p:sp>
+      <p:sp>
+        <p:nvSpPr>
+          <p:cNvPr id="22" name="Rectangle 21">
+            <a:extLst>
+              <a:ext uri="{FF2B5EF4-FFF2-40B4-BE49-F238E27FC236}">
+                <a16:creationId xmlns:a16="http://schemas.microsoft.com/office/drawing/2014/main" id="{DFEE4473-A122-4E96-8C31-B4C5AAA274FD}"/>
+              </a:ext>
+              <a:ext uri="{C183D7F6-B498-43B3-948B-1728B52AA6E4}">
+                <adec:decorative xmlns:adec="http://schemas.microsoft.com/office/drawing/2017/decorative" val="1"/>
+              </a:ext>
+            </a:extLst>
+          </p:cNvPr>
+          <p:cNvSpPr>
+            <a:spLocks noGrp="1" noRot="1" noChangeAspect="1" noMove="1" noResize="1" noEditPoints="1" noAdjustHandles="1" noChangeArrowheads="1" noChangeShapeType="1" noTextEdit="1"/>
+          </p:cNvSpPr>
+          <p:nvPr>
+            <p:extLst>
+              <p:ext uri="{386F3935-93C4-4BCD-93E2-E3B085C9AB24}">
+                <p16:designElem xmlns:p16="http://schemas.microsoft.com/office/powerpoint/2015/main" val="1"/>
+              </p:ext>
+            </p:extLst>
+          </p:nvPr>
+        </p:nvSpPr>
+        <p:spPr>
+          <a:xfrm flipH="1">
+            <a:off x="-3123" y="2706446"/>
+            <a:ext cx="12191997" cy="3711900"/>
+          </a:xfrm>
+          <a:prstGeom prst="rect">
+            <a:avLst/>
+          </a:prstGeom>
+          <a:gradFill>
+            <a:gsLst>
+              <a:gs pos="0">
+                <a:srgbClr val="000000">
+                  <a:alpha val="50000"/>
+                </a:srgbClr>
+              </a:gs>
+              <a:gs pos="92000">
+                <a:schemeClr val="accent1">
+                  <a:lumMod val="75000"/>
+                  <a:alpha val="0"/>
+                </a:schemeClr>
+              </a:gs>
+            </a:gsLst>
+            <a:lin ang="19200000" scaled="0"/>
+          </a:gradFill>
+          <a:ln>
+            <a:noFill/>
+          </a:ln>
+        </p:spPr>
+        <p:style>
+          <a:lnRef idx="2">
+            <a:schemeClr val="accent1">
+              <a:shade val="50000"/>
+            </a:schemeClr>
+          </a:lnRef>
+          <a:fillRef idx="1">
+            <a:schemeClr val="accent1"/>
+          </a:fillRef>
+          <a:effectRef idx="0">
+            <a:schemeClr val="accent1"/>
+          </a:effectRef>
+          <a:fontRef idx="minor">
+            <a:schemeClr val="lt1"/>
+          </a:fontRef>
+        </p:style>
+        <p:txBody>
+          <a:bodyPr rtlCol="0" anchor="ctr"/>
+          <a:lstStyle/>
+          <a:p>
+            <a:pPr algn="ctr"/>
+            <a:endParaRPr lang="en-US"/>
+          </a:p>
+        </p:txBody>
+      </p:sp>
+      <p:sp>
+        <p:nvSpPr>
+          <p:cNvPr id="3" name="Content Placeholder 2">
+            <a:extLst>
+              <a:ext uri="{FF2B5EF4-FFF2-40B4-BE49-F238E27FC236}">
+                <a16:creationId xmlns:a16="http://schemas.microsoft.com/office/drawing/2014/main" id="{AEB148AB-8C9C-6AEC-E2EF-F3AC9BFFC657}"/>
+              </a:ext>
+            </a:extLst>
+          </p:cNvPr>
+          <p:cNvSpPr>
+            <a:spLocks noGrp="1"/>
+          </p:cNvSpPr>
+          <p:nvPr>
+            <p:ph idx="1"/>
+          </p:nvPr>
+        </p:nvSpPr>
+        <p:spPr>
+          <a:xfrm>
+            <a:off x="965201" y="4292294"/>
+            <a:ext cx="2838450" cy="1835456"/>
+          </a:xfrm>
+        </p:spPr>
+        <p:txBody>
+          <a:bodyPr vert="horz" lIns="91440" tIns="45720" rIns="91440" bIns="45720" rtlCol="0">
+            <a:normAutofit fontScale="85000" lnSpcReduction="20000"/>
+          </a:bodyPr>
+          <a:lstStyle/>
+          <a:p>
+            <a:pPr marL="0" indent="0" algn="ctr">
+              <a:buNone/>
+            </a:pPr>
+            <a:r>
+              <a:rPr lang="en-US" sz="2400" dirty="0">
+                <a:solidFill>
+                  <a:srgbClr val="FFFFFF"/>
+                </a:solidFill>
+              </a:rPr>
+              <a:t>Due to the naming conventions I used, I was able to import my low poly into Substance Painter and baked the high poly on top of it by matching the names of each object </a:t>
+            </a:r>
+          </a:p>
+        </p:txBody>
+      </p:sp>
+      <p:pic>
+        <p:nvPicPr>
+          <p:cNvPr id="9" name="Picture 8">
+            <a:extLst>
+              <a:ext uri="{FF2B5EF4-FFF2-40B4-BE49-F238E27FC236}">
+                <a16:creationId xmlns:a16="http://schemas.microsoft.com/office/drawing/2014/main" id="{C9AB55E1-512A-7CC4-4F10-95ADCC5DF56D}"/>
+              </a:ext>
+            </a:extLst>
+          </p:cNvPr>
+          <p:cNvPicPr>
+            <a:picLocks noChangeAspect="1"/>
+          </p:cNvPicPr>
+          <p:nvPr/>
+        </p:nvPicPr>
+        <p:blipFill>
+          <a:blip r:embed="rId2"/>
+          <a:stretch>
+            <a:fillRect/>
+          </a:stretch>
+        </p:blipFill>
+        <p:spPr>
+          <a:xfrm>
+            <a:off x="8174810" y="892614"/>
+            <a:ext cx="2582477" cy="3232110"/>
+          </a:xfrm>
+          <a:prstGeom prst="rect">
+            <a:avLst/>
+          </a:prstGeom>
+        </p:spPr>
+      </p:pic>
+      <p:pic>
+        <p:nvPicPr>
+          <p:cNvPr id="5" name="Picture 4">
+            <a:extLst>
+              <a:ext uri="{FF2B5EF4-FFF2-40B4-BE49-F238E27FC236}">
+                <a16:creationId xmlns:a16="http://schemas.microsoft.com/office/drawing/2014/main" id="{8F26A963-28A1-0AB2-3146-53A97B259077}"/>
+              </a:ext>
+            </a:extLst>
+          </p:cNvPr>
+          <p:cNvPicPr>
+            <a:picLocks noChangeAspect="1"/>
+          </p:cNvPicPr>
+          <p:nvPr/>
+        </p:nvPicPr>
+        <p:blipFill>
+          <a:blip r:embed="rId3"/>
+          <a:stretch>
+            <a:fillRect/>
+          </a:stretch>
+        </p:blipFill>
+        <p:spPr>
+          <a:xfrm>
+            <a:off x="906262" y="906682"/>
+            <a:ext cx="2791650" cy="3218041"/>
           </a:xfrm>
           <a:prstGeom prst="rect">
             <a:avLst/>
@@ -3915,7 +7812,7 @@
           <p:cNvPr id="7" name="Picture 6">
             <a:extLst>
               <a:ext uri="{FF2B5EF4-FFF2-40B4-BE49-F238E27FC236}">
-                <a16:creationId xmlns:a16="http://schemas.microsoft.com/office/drawing/2014/main" id="{0838A3EE-055C-6C03-A92C-A72EB71F230C}"/>
+                <a16:creationId xmlns:a16="http://schemas.microsoft.com/office/drawing/2014/main" id="{1ABCE275-CD12-46F6-B960-A5473F0E815C}"/>
               </a:ext>
             </a:extLst>
           </p:cNvPr>
@@ -3925,31 +7822,452 @@
           <p:nvPr/>
         </p:nvPicPr>
         <p:blipFill>
-          <a:blip r:embed="rId3">
-            <a:extLst>
-              <a:ext uri="{28A0092B-C50C-407E-A947-70E740481C1C}">
-                <a14:useLocalDpi xmlns:a14="http://schemas.microsoft.com/office/drawing/2010/main" val="0"/>
-              </a:ext>
-            </a:extLst>
-          </a:blip>
+          <a:blip r:embed="rId4"/>
           <a:stretch>
             <a:fillRect/>
           </a:stretch>
         </p:blipFill>
         <p:spPr>
           <a:xfrm>
-            <a:off x="7034372" y="2650282"/>
-            <a:ext cx="2924555" cy="3944101"/>
+            <a:off x="4762508" y="892614"/>
+            <a:ext cx="2469846" cy="3232109"/>
           </a:xfrm>
           <a:prstGeom prst="rect">
             <a:avLst/>
           </a:prstGeom>
         </p:spPr>
       </p:pic>
+      <p:sp>
+        <p:nvSpPr>
+          <p:cNvPr id="10" name="Content Placeholder 2">
+            <a:extLst>
+              <a:ext uri="{FF2B5EF4-FFF2-40B4-BE49-F238E27FC236}">
+                <a16:creationId xmlns:a16="http://schemas.microsoft.com/office/drawing/2014/main" id="{1C083D79-88D9-7980-70B8-782FF80EECE9}"/>
+              </a:ext>
+            </a:extLst>
+          </p:cNvPr>
+          <p:cNvSpPr txBox="1">
+            <a:spLocks/>
+          </p:cNvSpPr>
+          <p:nvPr/>
+        </p:nvSpPr>
+        <p:spPr>
+          <a:xfrm>
+            <a:off x="4762508" y="4292294"/>
+            <a:ext cx="2838450" cy="1835456"/>
+          </a:xfrm>
+          <a:prstGeom prst="rect">
+            <a:avLst/>
+          </a:prstGeom>
+        </p:spPr>
+        <p:txBody>
+          <a:bodyPr vert="horz" lIns="91440" tIns="45720" rIns="91440" bIns="45720" rtlCol="0">
+            <a:normAutofit fontScale="77500" lnSpcReduction="20000"/>
+          </a:bodyPr>
+          <a:lstStyle>
+            <a:lvl1pPr marL="228600" indent="-228600" algn="l" defTabSz="914400" rtl="0" eaLnBrk="1" latinLnBrk="0" hangingPunct="1">
+              <a:lnSpc>
+                <a:spcPct val="90000"/>
+              </a:lnSpc>
+              <a:spcBef>
+                <a:spcPts val="1000"/>
+              </a:spcBef>
+              <a:buFont typeface="Arial" panose="020B0604020202020204" pitchFamily="34" charset="0"/>
+              <a:buChar char="•"/>
+              <a:defRPr sz="2800" kern="1200">
+                <a:solidFill>
+                  <a:schemeClr val="tx1"/>
+                </a:solidFill>
+                <a:latin typeface="+mn-lt"/>
+                <a:ea typeface="+mn-ea"/>
+                <a:cs typeface="+mn-cs"/>
+              </a:defRPr>
+            </a:lvl1pPr>
+            <a:lvl2pPr marL="685800" indent="-228600" algn="l" defTabSz="914400" rtl="0" eaLnBrk="1" latinLnBrk="0" hangingPunct="1">
+              <a:lnSpc>
+                <a:spcPct val="90000"/>
+              </a:lnSpc>
+              <a:spcBef>
+                <a:spcPts val="500"/>
+              </a:spcBef>
+              <a:buFont typeface="Arial" panose="020B0604020202020204" pitchFamily="34" charset="0"/>
+              <a:buChar char="•"/>
+              <a:defRPr sz="2400" kern="1200">
+                <a:solidFill>
+                  <a:schemeClr val="tx1"/>
+                </a:solidFill>
+                <a:latin typeface="+mn-lt"/>
+                <a:ea typeface="+mn-ea"/>
+                <a:cs typeface="+mn-cs"/>
+              </a:defRPr>
+            </a:lvl2pPr>
+            <a:lvl3pPr marL="1143000" indent="-228600" algn="l" defTabSz="914400" rtl="0" eaLnBrk="1" latinLnBrk="0" hangingPunct="1">
+              <a:lnSpc>
+                <a:spcPct val="90000"/>
+              </a:lnSpc>
+              <a:spcBef>
+                <a:spcPts val="500"/>
+              </a:spcBef>
+              <a:buFont typeface="Arial" panose="020B0604020202020204" pitchFamily="34" charset="0"/>
+              <a:buChar char="•"/>
+              <a:defRPr sz="2000" kern="1200">
+                <a:solidFill>
+                  <a:schemeClr val="tx1"/>
+                </a:solidFill>
+                <a:latin typeface="+mn-lt"/>
+                <a:ea typeface="+mn-ea"/>
+                <a:cs typeface="+mn-cs"/>
+              </a:defRPr>
+            </a:lvl3pPr>
+            <a:lvl4pPr marL="1600200" indent="-228600" algn="l" defTabSz="914400" rtl="0" eaLnBrk="1" latinLnBrk="0" hangingPunct="1">
+              <a:lnSpc>
+                <a:spcPct val="90000"/>
+              </a:lnSpc>
+              <a:spcBef>
+                <a:spcPts val="500"/>
+              </a:spcBef>
+              <a:buFont typeface="Arial" panose="020B0604020202020204" pitchFamily="34" charset="0"/>
+              <a:buChar char="•"/>
+              <a:defRPr sz="1800" kern="1200">
+                <a:solidFill>
+                  <a:schemeClr val="tx1"/>
+                </a:solidFill>
+                <a:latin typeface="+mn-lt"/>
+                <a:ea typeface="+mn-ea"/>
+                <a:cs typeface="+mn-cs"/>
+              </a:defRPr>
+            </a:lvl4pPr>
+            <a:lvl5pPr marL="2057400" indent="-228600" algn="l" defTabSz="914400" rtl="0" eaLnBrk="1" latinLnBrk="0" hangingPunct="1">
+              <a:lnSpc>
+                <a:spcPct val="90000"/>
+              </a:lnSpc>
+              <a:spcBef>
+                <a:spcPts val="500"/>
+              </a:spcBef>
+              <a:buFont typeface="Arial" panose="020B0604020202020204" pitchFamily="34" charset="0"/>
+              <a:buChar char="•"/>
+              <a:defRPr sz="1800" kern="1200">
+                <a:solidFill>
+                  <a:schemeClr val="tx1"/>
+                </a:solidFill>
+                <a:latin typeface="+mn-lt"/>
+                <a:ea typeface="+mn-ea"/>
+                <a:cs typeface="+mn-cs"/>
+              </a:defRPr>
+            </a:lvl5pPr>
+            <a:lvl6pPr marL="2514600" indent="-228600" algn="l" defTabSz="914400" rtl="0" eaLnBrk="1" latinLnBrk="0" hangingPunct="1">
+              <a:lnSpc>
+                <a:spcPct val="90000"/>
+              </a:lnSpc>
+              <a:spcBef>
+                <a:spcPts val="500"/>
+              </a:spcBef>
+              <a:buFont typeface="Arial" panose="020B0604020202020204" pitchFamily="34" charset="0"/>
+              <a:buChar char="•"/>
+              <a:defRPr sz="1800" kern="1200">
+                <a:solidFill>
+                  <a:schemeClr val="tx1"/>
+                </a:solidFill>
+                <a:latin typeface="+mn-lt"/>
+                <a:ea typeface="+mn-ea"/>
+                <a:cs typeface="+mn-cs"/>
+              </a:defRPr>
+            </a:lvl6pPr>
+            <a:lvl7pPr marL="2971800" indent="-228600" algn="l" defTabSz="914400" rtl="0" eaLnBrk="1" latinLnBrk="0" hangingPunct="1">
+              <a:lnSpc>
+                <a:spcPct val="90000"/>
+              </a:lnSpc>
+              <a:spcBef>
+                <a:spcPts val="500"/>
+              </a:spcBef>
+              <a:buFont typeface="Arial" panose="020B0604020202020204" pitchFamily="34" charset="0"/>
+              <a:buChar char="•"/>
+              <a:defRPr sz="1800" kern="1200">
+                <a:solidFill>
+                  <a:schemeClr val="tx1"/>
+                </a:solidFill>
+                <a:latin typeface="+mn-lt"/>
+                <a:ea typeface="+mn-ea"/>
+                <a:cs typeface="+mn-cs"/>
+              </a:defRPr>
+            </a:lvl7pPr>
+            <a:lvl8pPr marL="3429000" indent="-228600" algn="l" defTabSz="914400" rtl="0" eaLnBrk="1" latinLnBrk="0" hangingPunct="1">
+              <a:lnSpc>
+                <a:spcPct val="90000"/>
+              </a:lnSpc>
+              <a:spcBef>
+                <a:spcPts val="500"/>
+              </a:spcBef>
+              <a:buFont typeface="Arial" panose="020B0604020202020204" pitchFamily="34" charset="0"/>
+              <a:buChar char="•"/>
+              <a:defRPr sz="1800" kern="1200">
+                <a:solidFill>
+                  <a:schemeClr val="tx1"/>
+                </a:solidFill>
+                <a:latin typeface="+mn-lt"/>
+                <a:ea typeface="+mn-ea"/>
+                <a:cs typeface="+mn-cs"/>
+              </a:defRPr>
+            </a:lvl8pPr>
+            <a:lvl9pPr marL="3886200" indent="-228600" algn="l" defTabSz="914400" rtl="0" eaLnBrk="1" latinLnBrk="0" hangingPunct="1">
+              <a:lnSpc>
+                <a:spcPct val="90000"/>
+              </a:lnSpc>
+              <a:spcBef>
+                <a:spcPts val="500"/>
+              </a:spcBef>
+              <a:buFont typeface="Arial" panose="020B0604020202020204" pitchFamily="34" charset="0"/>
+              <a:buChar char="•"/>
+              <a:defRPr sz="1800" kern="1200">
+                <a:solidFill>
+                  <a:schemeClr val="tx1"/>
+                </a:solidFill>
+                <a:latin typeface="+mn-lt"/>
+                <a:ea typeface="+mn-ea"/>
+                <a:cs typeface="+mn-cs"/>
+              </a:defRPr>
+            </a:lvl9pPr>
+          </a:lstStyle>
+          <a:p>
+            <a:pPr marL="0" indent="0" algn="ctr">
+              <a:buFont typeface="Arial" panose="020B0604020202020204" pitchFamily="34" charset="0"/>
+              <a:buNone/>
+            </a:pPr>
+            <a:r>
+              <a:rPr lang="en-US" sz="2400" dirty="0">
+                <a:solidFill>
+                  <a:srgbClr val="FFFFFF"/>
+                </a:solidFill>
+              </a:rPr>
+              <a:t>After baking the model, I worked on the base colours for each of the objects comprising the model by applying masks to the model using materials available in Substance Painter</a:t>
+            </a:r>
+          </a:p>
+        </p:txBody>
+      </p:sp>
+      <p:sp>
+        <p:nvSpPr>
+          <p:cNvPr id="11" name="Content Placeholder 2">
+            <a:extLst>
+              <a:ext uri="{FF2B5EF4-FFF2-40B4-BE49-F238E27FC236}">
+                <a16:creationId xmlns:a16="http://schemas.microsoft.com/office/drawing/2014/main" id="{1BD912D2-C974-FFFF-72B6-D14D48C898D4}"/>
+              </a:ext>
+            </a:extLst>
+          </p:cNvPr>
+          <p:cNvSpPr txBox="1">
+            <a:spLocks/>
+          </p:cNvSpPr>
+          <p:nvPr/>
+        </p:nvSpPr>
+        <p:spPr>
+          <a:xfrm>
+            <a:off x="8046823" y="4292294"/>
+            <a:ext cx="2838450" cy="1835456"/>
+          </a:xfrm>
+          <a:prstGeom prst="rect">
+            <a:avLst/>
+          </a:prstGeom>
+        </p:spPr>
+        <p:txBody>
+          <a:bodyPr vert="horz" lIns="91440" tIns="45720" rIns="91440" bIns="45720" rtlCol="0">
+            <a:normAutofit fontScale="85000" lnSpcReduction="20000"/>
+          </a:bodyPr>
+          <a:lstStyle>
+            <a:lvl1pPr marL="228600" indent="-228600" algn="l" defTabSz="914400" rtl="0" eaLnBrk="1" latinLnBrk="0" hangingPunct="1">
+              <a:lnSpc>
+                <a:spcPct val="90000"/>
+              </a:lnSpc>
+              <a:spcBef>
+                <a:spcPts val="1000"/>
+              </a:spcBef>
+              <a:buFont typeface="Arial" panose="020B0604020202020204" pitchFamily="34" charset="0"/>
+              <a:buChar char="•"/>
+              <a:defRPr sz="2800" kern="1200">
+                <a:solidFill>
+                  <a:schemeClr val="tx1"/>
+                </a:solidFill>
+                <a:latin typeface="+mn-lt"/>
+                <a:ea typeface="+mn-ea"/>
+                <a:cs typeface="+mn-cs"/>
+              </a:defRPr>
+            </a:lvl1pPr>
+            <a:lvl2pPr marL="685800" indent="-228600" algn="l" defTabSz="914400" rtl="0" eaLnBrk="1" latinLnBrk="0" hangingPunct="1">
+              <a:lnSpc>
+                <a:spcPct val="90000"/>
+              </a:lnSpc>
+              <a:spcBef>
+                <a:spcPts val="500"/>
+              </a:spcBef>
+              <a:buFont typeface="Arial" panose="020B0604020202020204" pitchFamily="34" charset="0"/>
+              <a:buChar char="•"/>
+              <a:defRPr sz="2400" kern="1200">
+                <a:solidFill>
+                  <a:schemeClr val="tx1"/>
+                </a:solidFill>
+                <a:latin typeface="+mn-lt"/>
+                <a:ea typeface="+mn-ea"/>
+                <a:cs typeface="+mn-cs"/>
+              </a:defRPr>
+            </a:lvl2pPr>
+            <a:lvl3pPr marL="1143000" indent="-228600" algn="l" defTabSz="914400" rtl="0" eaLnBrk="1" latinLnBrk="0" hangingPunct="1">
+              <a:lnSpc>
+                <a:spcPct val="90000"/>
+              </a:lnSpc>
+              <a:spcBef>
+                <a:spcPts val="500"/>
+              </a:spcBef>
+              <a:buFont typeface="Arial" panose="020B0604020202020204" pitchFamily="34" charset="0"/>
+              <a:buChar char="•"/>
+              <a:defRPr sz="2000" kern="1200">
+                <a:solidFill>
+                  <a:schemeClr val="tx1"/>
+                </a:solidFill>
+                <a:latin typeface="+mn-lt"/>
+                <a:ea typeface="+mn-ea"/>
+                <a:cs typeface="+mn-cs"/>
+              </a:defRPr>
+            </a:lvl3pPr>
+            <a:lvl4pPr marL="1600200" indent="-228600" algn="l" defTabSz="914400" rtl="0" eaLnBrk="1" latinLnBrk="0" hangingPunct="1">
+              <a:lnSpc>
+                <a:spcPct val="90000"/>
+              </a:lnSpc>
+              <a:spcBef>
+                <a:spcPts val="500"/>
+              </a:spcBef>
+              <a:buFont typeface="Arial" panose="020B0604020202020204" pitchFamily="34" charset="0"/>
+              <a:buChar char="•"/>
+              <a:defRPr sz="1800" kern="1200">
+                <a:solidFill>
+                  <a:schemeClr val="tx1"/>
+                </a:solidFill>
+                <a:latin typeface="+mn-lt"/>
+                <a:ea typeface="+mn-ea"/>
+                <a:cs typeface="+mn-cs"/>
+              </a:defRPr>
+            </a:lvl4pPr>
+            <a:lvl5pPr marL="2057400" indent="-228600" algn="l" defTabSz="914400" rtl="0" eaLnBrk="1" latinLnBrk="0" hangingPunct="1">
+              <a:lnSpc>
+                <a:spcPct val="90000"/>
+              </a:lnSpc>
+              <a:spcBef>
+                <a:spcPts val="500"/>
+              </a:spcBef>
+              <a:buFont typeface="Arial" panose="020B0604020202020204" pitchFamily="34" charset="0"/>
+              <a:buChar char="•"/>
+              <a:defRPr sz="1800" kern="1200">
+                <a:solidFill>
+                  <a:schemeClr val="tx1"/>
+                </a:solidFill>
+                <a:latin typeface="+mn-lt"/>
+                <a:ea typeface="+mn-ea"/>
+                <a:cs typeface="+mn-cs"/>
+              </a:defRPr>
+            </a:lvl5pPr>
+            <a:lvl6pPr marL="2514600" indent="-228600" algn="l" defTabSz="914400" rtl="0" eaLnBrk="1" latinLnBrk="0" hangingPunct="1">
+              <a:lnSpc>
+                <a:spcPct val="90000"/>
+              </a:lnSpc>
+              <a:spcBef>
+                <a:spcPts val="500"/>
+              </a:spcBef>
+              <a:buFont typeface="Arial" panose="020B0604020202020204" pitchFamily="34" charset="0"/>
+              <a:buChar char="•"/>
+              <a:defRPr sz="1800" kern="1200">
+                <a:solidFill>
+                  <a:schemeClr val="tx1"/>
+                </a:solidFill>
+                <a:latin typeface="+mn-lt"/>
+                <a:ea typeface="+mn-ea"/>
+                <a:cs typeface="+mn-cs"/>
+              </a:defRPr>
+            </a:lvl6pPr>
+            <a:lvl7pPr marL="2971800" indent="-228600" algn="l" defTabSz="914400" rtl="0" eaLnBrk="1" latinLnBrk="0" hangingPunct="1">
+              <a:lnSpc>
+                <a:spcPct val="90000"/>
+              </a:lnSpc>
+              <a:spcBef>
+                <a:spcPts val="500"/>
+              </a:spcBef>
+              <a:buFont typeface="Arial" panose="020B0604020202020204" pitchFamily="34" charset="0"/>
+              <a:buChar char="•"/>
+              <a:defRPr sz="1800" kern="1200">
+                <a:solidFill>
+                  <a:schemeClr val="tx1"/>
+                </a:solidFill>
+                <a:latin typeface="+mn-lt"/>
+                <a:ea typeface="+mn-ea"/>
+                <a:cs typeface="+mn-cs"/>
+              </a:defRPr>
+            </a:lvl7pPr>
+            <a:lvl8pPr marL="3429000" indent="-228600" algn="l" defTabSz="914400" rtl="0" eaLnBrk="1" latinLnBrk="0" hangingPunct="1">
+              <a:lnSpc>
+                <a:spcPct val="90000"/>
+              </a:lnSpc>
+              <a:spcBef>
+                <a:spcPts val="500"/>
+              </a:spcBef>
+              <a:buFont typeface="Arial" panose="020B0604020202020204" pitchFamily="34" charset="0"/>
+              <a:buChar char="•"/>
+              <a:defRPr sz="1800" kern="1200">
+                <a:solidFill>
+                  <a:schemeClr val="tx1"/>
+                </a:solidFill>
+                <a:latin typeface="+mn-lt"/>
+                <a:ea typeface="+mn-ea"/>
+                <a:cs typeface="+mn-cs"/>
+              </a:defRPr>
+            </a:lvl8pPr>
+            <a:lvl9pPr marL="3886200" indent="-228600" algn="l" defTabSz="914400" rtl="0" eaLnBrk="1" latinLnBrk="0" hangingPunct="1">
+              <a:lnSpc>
+                <a:spcPct val="90000"/>
+              </a:lnSpc>
+              <a:spcBef>
+                <a:spcPts val="500"/>
+              </a:spcBef>
+              <a:buFont typeface="Arial" panose="020B0604020202020204" pitchFamily="34" charset="0"/>
+              <a:buChar char="•"/>
+              <a:defRPr sz="1800" kern="1200">
+                <a:solidFill>
+                  <a:schemeClr val="tx1"/>
+                </a:solidFill>
+                <a:latin typeface="+mn-lt"/>
+                <a:ea typeface="+mn-ea"/>
+                <a:cs typeface="+mn-cs"/>
+              </a:defRPr>
+            </a:lvl9pPr>
+          </a:lstStyle>
+          <a:p>
+            <a:pPr marL="0" indent="0" algn="ctr">
+              <a:buFont typeface="Arial" panose="020B0604020202020204" pitchFamily="34" charset="0"/>
+              <a:buNone/>
+            </a:pPr>
+            <a:r>
+              <a:rPr lang="en-US" sz="2400" dirty="0">
+                <a:solidFill>
+                  <a:srgbClr val="FFFFFF"/>
+                </a:solidFill>
+              </a:rPr>
+              <a:t>After texturing the base colours I added further detail to the model such as the arrowhead shapes on the model. These were added as stamps and applied to </a:t>
+            </a:r>
+            <a:r>
+              <a:rPr lang="en-US" sz="2400">
+                <a:solidFill>
+                  <a:srgbClr val="FFFFFF"/>
+                </a:solidFill>
+              </a:rPr>
+              <a:t>a brush as masks.</a:t>
+            </a:r>
+            <a:endParaRPr lang="en-US" sz="2400" dirty="0">
+              <a:solidFill>
+                <a:srgbClr val="FFFFFF"/>
+              </a:solidFill>
+            </a:endParaRPr>
+          </a:p>
+        </p:txBody>
+      </p:sp>
     </p:spTree>
     <p:extLst>
       <p:ext uri="{BB962C8B-B14F-4D97-AF65-F5344CB8AC3E}">
-        <p14:creationId xmlns:p14="http://schemas.microsoft.com/office/powerpoint/2010/main" val="701177140"/>
+        <p14:creationId xmlns:p14="http://schemas.microsoft.com/office/powerpoint/2010/main" val="413624685"/>
       </p:ext>
     </p:extLst>
   </p:cSld>

--- a/Modelling portfolio.pptx
+++ b/Modelling portfolio.pptx
@@ -13,6 +13,7 @@
     <p:sldId id="263" r:id="rId7"/>
     <p:sldId id="264" r:id="rId8"/>
     <p:sldId id="265" r:id="rId9"/>
+    <p:sldId id="266" r:id="rId10"/>
   </p:sldIdLst>
   <p:sldSz cx="12192000" cy="6858000"/>
   <p:notesSz cx="6858000" cy="9144000"/>
@@ -268,7 +269,7 @@
           <a:p>
             <a:fld id="{91A383FA-0073-4418-B5D6-6F8F732339E7}" type="datetimeFigureOut">
               <a:rPr lang="en-GB" smtClean="0"/>
-              <a:t>26/04/2026</a:t>
+              <a:t>29/04/2026</a:t>
             </a:fld>
             <a:endParaRPr lang="en-GB"/>
           </a:p>
@@ -468,7 +469,7 @@
           <a:p>
             <a:fld id="{91A383FA-0073-4418-B5D6-6F8F732339E7}" type="datetimeFigureOut">
               <a:rPr lang="en-GB" smtClean="0"/>
-              <a:t>26/04/2026</a:t>
+              <a:t>29/04/2026</a:t>
             </a:fld>
             <a:endParaRPr lang="en-GB"/>
           </a:p>
@@ -678,7 +679,7 @@
           <a:p>
             <a:fld id="{91A383FA-0073-4418-B5D6-6F8F732339E7}" type="datetimeFigureOut">
               <a:rPr lang="en-GB" smtClean="0"/>
-              <a:t>26/04/2026</a:t>
+              <a:t>29/04/2026</a:t>
             </a:fld>
             <a:endParaRPr lang="en-GB"/>
           </a:p>
@@ -878,7 +879,7 @@
           <a:p>
             <a:fld id="{91A383FA-0073-4418-B5D6-6F8F732339E7}" type="datetimeFigureOut">
               <a:rPr lang="en-GB" smtClean="0"/>
-              <a:t>26/04/2026</a:t>
+              <a:t>29/04/2026</a:t>
             </a:fld>
             <a:endParaRPr lang="en-GB"/>
           </a:p>
@@ -1154,7 +1155,7 @@
           <a:p>
             <a:fld id="{91A383FA-0073-4418-B5D6-6F8F732339E7}" type="datetimeFigureOut">
               <a:rPr lang="en-GB" smtClean="0"/>
-              <a:t>26/04/2026</a:t>
+              <a:t>29/04/2026</a:t>
             </a:fld>
             <a:endParaRPr lang="en-GB"/>
           </a:p>
@@ -1422,7 +1423,7 @@
           <a:p>
             <a:fld id="{91A383FA-0073-4418-B5D6-6F8F732339E7}" type="datetimeFigureOut">
               <a:rPr lang="en-GB" smtClean="0"/>
-              <a:t>26/04/2026</a:t>
+              <a:t>29/04/2026</a:t>
             </a:fld>
             <a:endParaRPr lang="en-GB"/>
           </a:p>
@@ -1837,7 +1838,7 @@
           <a:p>
             <a:fld id="{91A383FA-0073-4418-B5D6-6F8F732339E7}" type="datetimeFigureOut">
               <a:rPr lang="en-GB" smtClean="0"/>
-              <a:t>26/04/2026</a:t>
+              <a:t>29/04/2026</a:t>
             </a:fld>
             <a:endParaRPr lang="en-GB"/>
           </a:p>
@@ -1979,7 +1980,7 @@
           <a:p>
             <a:fld id="{91A383FA-0073-4418-B5D6-6F8F732339E7}" type="datetimeFigureOut">
               <a:rPr lang="en-GB" smtClean="0"/>
-              <a:t>26/04/2026</a:t>
+              <a:t>29/04/2026</a:t>
             </a:fld>
             <a:endParaRPr lang="en-GB"/>
           </a:p>
@@ -2092,7 +2093,7 @@
           <a:p>
             <a:fld id="{91A383FA-0073-4418-B5D6-6F8F732339E7}" type="datetimeFigureOut">
               <a:rPr lang="en-GB" smtClean="0"/>
-              <a:t>26/04/2026</a:t>
+              <a:t>29/04/2026</a:t>
             </a:fld>
             <a:endParaRPr lang="en-GB"/>
           </a:p>
@@ -2405,7 +2406,7 @@
           <a:p>
             <a:fld id="{91A383FA-0073-4418-B5D6-6F8F732339E7}" type="datetimeFigureOut">
               <a:rPr lang="en-GB" smtClean="0"/>
-              <a:t>26/04/2026</a:t>
+              <a:t>29/04/2026</a:t>
             </a:fld>
             <a:endParaRPr lang="en-GB"/>
           </a:p>
@@ -2694,7 +2695,7 @@
           <a:p>
             <a:fld id="{91A383FA-0073-4418-B5D6-6F8F732339E7}" type="datetimeFigureOut">
               <a:rPr lang="en-GB" smtClean="0"/>
-              <a:t>26/04/2026</a:t>
+              <a:t>29/04/2026</a:t>
             </a:fld>
             <a:endParaRPr lang="en-GB"/>
           </a:p>
@@ -2937,7 +2938,7 @@
           <a:p>
             <a:fld id="{91A383FA-0073-4418-B5D6-6F8F732339E7}" type="datetimeFigureOut">
               <a:rPr lang="en-GB" smtClean="0"/>
-              <a:t>26/04/2026</a:t>
+              <a:t>29/04/2026</a:t>
             </a:fld>
             <a:endParaRPr lang="en-GB"/>
           </a:p>
@@ -8277,6 +8278,514 @@
 </p:sld>
 </file>
 
+<file path=ppt/slides/slide9.xml><?xml version="1.0" encoding="utf-8"?>
+<p:sld xmlns:a="http://schemas.openxmlformats.org/drawingml/2006/main" xmlns:r="http://schemas.openxmlformats.org/officeDocument/2006/relationships" xmlns:p="http://schemas.openxmlformats.org/presentationml/2006/main">
+  <p:cSld>
+    <p:bg>
+      <p:bgPr>
+        <a:solidFill>
+          <a:schemeClr val="bg1"/>
+        </a:solidFill>
+        <a:effectLst/>
+      </p:bgPr>
+    </p:bg>
+    <p:spTree>
+      <p:nvGrpSpPr>
+        <p:cNvPr id="1" name=""/>
+        <p:cNvGrpSpPr/>
+        <p:nvPr/>
+      </p:nvGrpSpPr>
+      <p:grpSpPr>
+        <a:xfrm>
+          <a:off x="0" y="0"/>
+          <a:ext cx="0" cy="0"/>
+          <a:chOff x="0" y="0"/>
+          <a:chExt cx="0" cy="0"/>
+        </a:xfrm>
+      </p:grpSpPr>
+      <p:sp useBgFill="1">
+        <p:nvSpPr>
+          <p:cNvPr id="12" name="Rectangle 11">
+            <a:extLst>
+              <a:ext uri="{FF2B5EF4-FFF2-40B4-BE49-F238E27FC236}">
+                <a16:creationId xmlns:a16="http://schemas.microsoft.com/office/drawing/2014/main" id="{B712E947-0734-45F9-9C4F-41114EC3A33E}"/>
+              </a:ext>
+              <a:ext uri="{C183D7F6-B498-43B3-948B-1728B52AA6E4}">
+                <adec:decorative xmlns:adec="http://schemas.microsoft.com/office/drawing/2017/decorative" val="1"/>
+              </a:ext>
+            </a:extLst>
+          </p:cNvPr>
+          <p:cNvSpPr>
+            <a:spLocks noGrp="1" noRot="1" noChangeAspect="1" noMove="1" noResize="1" noEditPoints="1" noAdjustHandles="1" noChangeArrowheads="1" noChangeShapeType="1" noTextEdit="1"/>
+          </p:cNvSpPr>
+          <p:nvPr>
+            <p:extLst>
+              <p:ext uri="{386F3935-93C4-4BCD-93E2-E3B085C9AB24}">
+                <p16:designElem xmlns:p16="http://schemas.microsoft.com/office/powerpoint/2015/main" val="1"/>
+              </p:ext>
+            </p:extLst>
+          </p:nvPr>
+        </p:nvSpPr>
+        <p:spPr>
+          <a:xfrm>
+            <a:off x="14285" y="0"/>
+            <a:ext cx="12192000" cy="6858000"/>
+          </a:xfrm>
+          <a:prstGeom prst="rect">
+            <a:avLst/>
+          </a:prstGeom>
+          <a:ln w="12700" cap="flat" cmpd="sng" algn="ctr">
+            <a:noFill/>
+            <a:prstDash val="solid"/>
+            <a:miter lim="800000"/>
+          </a:ln>
+          <a:effectLst/>
+          <a:extLst>
+            <a:ext uri="{91240B29-F687-4F45-9708-019B960494DF}">
+              <a14:hiddenLine xmlns:a14="http://schemas.microsoft.com/office/drawing/2010/main" w="12700" cap="flat" cmpd="sng" algn="ctr">
+                <a:solidFill>
+                  <a:schemeClr val="accent1">
+                    <a:shade val="50000"/>
+                  </a:schemeClr>
+                </a:solidFill>
+                <a:prstDash val="solid"/>
+                <a:miter lim="800000"/>
+              </a14:hiddenLine>
+            </a:ext>
+          </a:extLst>
+        </p:spPr>
+        <p:style>
+          <a:lnRef idx="2">
+            <a:schemeClr val="accent1">
+              <a:shade val="50000"/>
+            </a:schemeClr>
+          </a:lnRef>
+          <a:fillRef idx="1">
+            <a:schemeClr val="accent1"/>
+          </a:fillRef>
+          <a:effectRef idx="0">
+            <a:schemeClr val="accent1"/>
+          </a:effectRef>
+          <a:fontRef idx="minor">
+            <a:schemeClr val="lt1"/>
+          </a:fontRef>
+        </p:style>
+        <p:txBody>
+          <a:bodyPr rtlCol="0" anchor="ctr"/>
+          <a:lstStyle/>
+          <a:p>
+            <a:pPr algn="ctr"/>
+            <a:endParaRPr lang="en-US"/>
+          </a:p>
+        </p:txBody>
+      </p:sp>
+      <p:grpSp>
+        <p:nvGrpSpPr>
+          <p:cNvPr id="14" name="Group 13">
+            <a:extLst>
+              <a:ext uri="{FF2B5EF4-FFF2-40B4-BE49-F238E27FC236}">
+                <a16:creationId xmlns:a16="http://schemas.microsoft.com/office/drawing/2014/main" id="{12B3290A-D3BF-4B87-B55B-FD9A98B49727}"/>
+              </a:ext>
+              <a:ext uri="{C183D7F6-B498-43B3-948B-1728B52AA6E4}">
+                <adec:decorative xmlns:adec="http://schemas.microsoft.com/office/drawing/2017/decorative" val="1"/>
+              </a:ext>
+            </a:extLst>
+          </p:cNvPr>
+          <p:cNvGrpSpPr>
+            <a:grpSpLocks noGrp="1" noUngrp="1" noRot="1" noChangeAspect="1" noMove="1" noResize="1"/>
+          </p:cNvGrpSpPr>
+          <p:nvPr>
+            <p:extLst>
+              <p:ext uri="{386F3935-93C4-4BCD-93E2-E3B085C9AB24}">
+                <p16:designElem xmlns:p16="http://schemas.microsoft.com/office/powerpoint/2015/main" val="1"/>
+              </p:ext>
+            </p:extLst>
+          </p:nvPr>
+        </p:nvGrpSpPr>
+        <p:grpSpPr>
+          <a:xfrm>
+            <a:off x="0" y="0"/>
+            <a:ext cx="12199030" cy="1576446"/>
+            <a:chOff x="0" y="0"/>
+            <a:chExt cx="12192002" cy="1576446"/>
+          </a:xfrm>
+        </p:grpSpPr>
+        <p:sp>
+          <p:nvSpPr>
+            <p:cNvPr id="15" name="Rectangle 14">
+              <a:extLst>
+                <a:ext uri="{FF2B5EF4-FFF2-40B4-BE49-F238E27FC236}">
+                  <a16:creationId xmlns:a16="http://schemas.microsoft.com/office/drawing/2014/main" id="{033A715A-0686-440A-8F40-441B42A6605C}"/>
+                </a:ext>
+                <a:ext uri="{C183D7F6-B498-43B3-948B-1728B52AA6E4}">
+                  <adec:decorative xmlns:adec="http://schemas.microsoft.com/office/drawing/2017/decorative" val="1"/>
+                </a:ext>
+              </a:extLst>
+            </p:cNvPr>
+            <p:cNvSpPr/>
+            <p:nvPr>
+              <p:extLst>
+                <p:ext uri="{386F3935-93C4-4BCD-93E2-E3B085C9AB24}">
+                  <p16:designElem xmlns:p16="http://schemas.microsoft.com/office/powerpoint/2015/main" val="1"/>
+                </p:ext>
+              </p:extLst>
+            </p:nvPr>
+          </p:nvSpPr>
+          <p:spPr>
+            <a:xfrm rot="10800000" flipH="1">
+              <a:off x="2" y="0"/>
+              <a:ext cx="12191998" cy="1575955"/>
+            </a:xfrm>
+            <a:prstGeom prst="rect">
+              <a:avLst/>
+            </a:prstGeom>
+            <a:gradFill>
+              <a:gsLst>
+                <a:gs pos="0">
+                  <a:srgbClr val="000000">
+                    <a:alpha val="96000"/>
+                  </a:srgbClr>
+                </a:gs>
+                <a:gs pos="100000">
+                  <a:schemeClr val="accent1">
+                    <a:lumMod val="75000"/>
+                  </a:schemeClr>
+                </a:gs>
+              </a:gsLst>
+              <a:lin ang="8400000" scaled="0"/>
+            </a:gradFill>
+            <a:ln>
+              <a:noFill/>
+            </a:ln>
+          </p:spPr>
+          <p:style>
+            <a:lnRef idx="2">
+              <a:schemeClr val="accent1">
+                <a:shade val="50000"/>
+              </a:schemeClr>
+            </a:lnRef>
+            <a:fillRef idx="1">
+              <a:schemeClr val="accent1"/>
+            </a:fillRef>
+            <a:effectRef idx="0">
+              <a:schemeClr val="accent1"/>
+            </a:effectRef>
+            <a:fontRef idx="minor">
+              <a:schemeClr val="lt1"/>
+            </a:fontRef>
+          </p:style>
+          <p:txBody>
+            <a:bodyPr rtlCol="0" anchor="ctr"/>
+            <a:lstStyle/>
+            <a:p>
+              <a:pPr algn="ctr"/>
+              <a:endParaRPr lang="en-US"/>
+            </a:p>
+          </p:txBody>
+        </p:sp>
+        <p:sp>
+          <p:nvSpPr>
+            <p:cNvPr id="16" name="Rectangle 15">
+              <a:extLst>
+                <a:ext uri="{FF2B5EF4-FFF2-40B4-BE49-F238E27FC236}">
+                  <a16:creationId xmlns:a16="http://schemas.microsoft.com/office/drawing/2014/main" id="{4761657F-19F2-425B-B7E9-0118CD13C334}"/>
+                </a:ext>
+                <a:ext uri="{C183D7F6-B498-43B3-948B-1728B52AA6E4}">
+                  <adec:decorative xmlns:adec="http://schemas.microsoft.com/office/drawing/2017/decorative" val="1"/>
+                </a:ext>
+              </a:extLst>
+            </p:cNvPr>
+            <p:cNvSpPr/>
+            <p:nvPr>
+              <p:extLst>
+                <p:ext uri="{386F3935-93C4-4BCD-93E2-E3B085C9AB24}">
+                  <p16:designElem xmlns:p16="http://schemas.microsoft.com/office/powerpoint/2015/main" val="1"/>
+                </p:ext>
+              </p:extLst>
+            </p:nvPr>
+          </p:nvSpPr>
+          <p:spPr>
+            <a:xfrm rot="16200000">
+              <a:off x="5307778" y="-5307778"/>
+              <a:ext cx="1576446" cy="12192002"/>
+            </a:xfrm>
+            <a:prstGeom prst="rect">
+              <a:avLst/>
+            </a:prstGeom>
+            <a:gradFill>
+              <a:gsLst>
+                <a:gs pos="45000">
+                  <a:schemeClr val="accent1">
+                    <a:alpha val="0"/>
+                  </a:schemeClr>
+                </a:gs>
+                <a:gs pos="99000">
+                  <a:srgbClr val="000000">
+                    <a:alpha val="74000"/>
+                  </a:srgbClr>
+                </a:gs>
+              </a:gsLst>
+              <a:lin ang="11400000" scaled="0"/>
+            </a:gradFill>
+            <a:ln>
+              <a:noFill/>
+            </a:ln>
+          </p:spPr>
+          <p:style>
+            <a:lnRef idx="2">
+              <a:schemeClr val="accent1">
+                <a:shade val="50000"/>
+              </a:schemeClr>
+            </a:lnRef>
+            <a:fillRef idx="1">
+              <a:schemeClr val="accent1"/>
+            </a:fillRef>
+            <a:effectRef idx="0">
+              <a:schemeClr val="accent1"/>
+            </a:effectRef>
+            <a:fontRef idx="minor">
+              <a:schemeClr val="lt1"/>
+            </a:fontRef>
+          </p:style>
+          <p:txBody>
+            <a:bodyPr rtlCol="0" anchor="ctr"/>
+            <a:lstStyle/>
+            <a:p>
+              <a:pPr algn="ctr"/>
+              <a:endParaRPr lang="en-US" dirty="0"/>
+            </a:p>
+          </p:txBody>
+        </p:sp>
+        <p:sp>
+          <p:nvSpPr>
+            <p:cNvPr id="17" name="Rectangle 16">
+              <a:extLst>
+                <a:ext uri="{FF2B5EF4-FFF2-40B4-BE49-F238E27FC236}">
+                  <a16:creationId xmlns:a16="http://schemas.microsoft.com/office/drawing/2014/main" id="{E27B6634-79D3-4EDD-A77A-1065D6F3A4F2}"/>
+                </a:ext>
+                <a:ext uri="{C183D7F6-B498-43B3-948B-1728B52AA6E4}">
+                  <adec:decorative xmlns:adec="http://schemas.microsoft.com/office/drawing/2017/decorative" val="1"/>
+                </a:ext>
+              </a:extLst>
+            </p:cNvPr>
+            <p:cNvSpPr/>
+            <p:nvPr>
+              <p:extLst>
+                <p:ext uri="{386F3935-93C4-4BCD-93E2-E3B085C9AB24}">
+                  <p16:designElem xmlns:p16="http://schemas.microsoft.com/office/powerpoint/2015/main" val="1"/>
+                </p:ext>
+              </p:extLst>
+            </p:nvPr>
+          </p:nvSpPr>
+          <p:spPr>
+            <a:xfrm>
+              <a:off x="3825434" y="0"/>
+              <a:ext cx="4303422" cy="1575461"/>
+            </a:xfrm>
+            <a:prstGeom prst="rect">
+              <a:avLst/>
+            </a:prstGeom>
+            <a:gradFill>
+              <a:gsLst>
+                <a:gs pos="0">
+                  <a:schemeClr val="accent1">
+                    <a:alpha val="17000"/>
+                  </a:schemeClr>
+                </a:gs>
+                <a:gs pos="74000">
+                  <a:schemeClr val="accent1">
+                    <a:lumMod val="50000"/>
+                    <a:alpha val="0"/>
+                  </a:schemeClr>
+                </a:gs>
+              </a:gsLst>
+              <a:lin ang="14400000" scaled="0"/>
+            </a:gradFill>
+            <a:ln>
+              <a:noFill/>
+            </a:ln>
+          </p:spPr>
+          <p:style>
+            <a:lnRef idx="2">
+              <a:schemeClr val="accent1">
+                <a:shade val="50000"/>
+              </a:schemeClr>
+            </a:lnRef>
+            <a:fillRef idx="1">
+              <a:schemeClr val="accent1"/>
+            </a:fillRef>
+            <a:effectRef idx="0">
+              <a:schemeClr val="accent1"/>
+            </a:effectRef>
+            <a:fontRef idx="minor">
+              <a:schemeClr val="lt1"/>
+            </a:fontRef>
+          </p:style>
+          <p:txBody>
+            <a:bodyPr rtlCol="0" anchor="ctr"/>
+            <a:lstStyle/>
+            <a:p>
+              <a:pPr algn="ctr"/>
+              <a:endParaRPr lang="en-US"/>
+            </a:p>
+          </p:txBody>
+        </p:sp>
+      </p:grpSp>
+      <p:sp>
+        <p:nvSpPr>
+          <p:cNvPr id="2" name="Title 1">
+            <a:extLst>
+              <a:ext uri="{FF2B5EF4-FFF2-40B4-BE49-F238E27FC236}">
+                <a16:creationId xmlns:a16="http://schemas.microsoft.com/office/drawing/2014/main" id="{DF1CDBEE-8576-06E0-2A1E-DE31B0170E99}"/>
+              </a:ext>
+            </a:extLst>
+          </p:cNvPr>
+          <p:cNvSpPr>
+            <a:spLocks noGrp="1"/>
+          </p:cNvSpPr>
+          <p:nvPr>
+            <p:ph type="title"/>
+          </p:nvPr>
+        </p:nvSpPr>
+        <p:spPr>
+          <a:xfrm>
+            <a:off x="519951" y="162431"/>
+            <a:ext cx="9477377" cy="1030515"/>
+          </a:xfrm>
+        </p:spPr>
+        <p:txBody>
+          <a:bodyPr anchor="ctr">
+            <a:normAutofit/>
+          </a:bodyPr>
+          <a:lstStyle/>
+          <a:p>
+            <a:r>
+              <a:rPr lang="en-GB" sz="4000" dirty="0">
+                <a:solidFill>
+                  <a:srgbClr val="FFFFFF"/>
+                </a:solidFill>
+              </a:rPr>
+              <a:t>Exporting into Unreal</a:t>
+            </a:r>
+          </a:p>
+        </p:txBody>
+      </p:sp>
+      <p:pic>
+        <p:nvPicPr>
+          <p:cNvPr id="5" name="Picture 4">
+            <a:extLst>
+              <a:ext uri="{FF2B5EF4-FFF2-40B4-BE49-F238E27FC236}">
+                <a16:creationId xmlns:a16="http://schemas.microsoft.com/office/drawing/2014/main" id="{D1E7F4C3-9060-D00D-CCC6-B646ADC12516}"/>
+              </a:ext>
+            </a:extLst>
+          </p:cNvPr>
+          <p:cNvPicPr>
+            <a:picLocks noChangeAspect="1"/>
+          </p:cNvPicPr>
+          <p:nvPr/>
+        </p:nvPicPr>
+        <p:blipFill>
+          <a:blip r:embed="rId2"/>
+          <a:stretch>
+            <a:fillRect/>
+          </a:stretch>
+        </p:blipFill>
+        <p:spPr>
+          <a:xfrm>
+            <a:off x="1338502" y="1635518"/>
+            <a:ext cx="2489137" cy="2937036"/>
+          </a:xfrm>
+          <a:prstGeom prst="rect">
+            <a:avLst/>
+          </a:prstGeom>
+        </p:spPr>
+      </p:pic>
+      <p:pic>
+        <p:nvPicPr>
+          <p:cNvPr id="7" name="Picture 6">
+            <a:extLst>
+              <a:ext uri="{FF2B5EF4-FFF2-40B4-BE49-F238E27FC236}">
+                <a16:creationId xmlns:a16="http://schemas.microsoft.com/office/drawing/2014/main" id="{055AC9C1-65FD-460A-6CEF-981B3A668A7D}"/>
+              </a:ext>
+            </a:extLst>
+          </p:cNvPr>
+          <p:cNvPicPr>
+            <a:picLocks noChangeAspect="1"/>
+          </p:cNvPicPr>
+          <p:nvPr/>
+        </p:nvPicPr>
+        <p:blipFill>
+          <a:blip r:embed="rId3"/>
+          <a:stretch>
+            <a:fillRect/>
+          </a:stretch>
+        </p:blipFill>
+        <p:spPr>
+          <a:xfrm>
+            <a:off x="7224276" y="1635518"/>
+            <a:ext cx="2602905" cy="2881816"/>
+          </a:xfrm>
+          <a:prstGeom prst="rect">
+            <a:avLst/>
+          </a:prstGeom>
+        </p:spPr>
+      </p:pic>
+      <p:sp>
+        <p:nvSpPr>
+          <p:cNvPr id="3" name="Content Placeholder 2">
+            <a:extLst>
+              <a:ext uri="{FF2B5EF4-FFF2-40B4-BE49-F238E27FC236}">
+                <a16:creationId xmlns:a16="http://schemas.microsoft.com/office/drawing/2014/main" id="{C9BE1305-F2D7-0CC9-C7CF-60FC7E328FB7}"/>
+              </a:ext>
+            </a:extLst>
+          </p:cNvPr>
+          <p:cNvSpPr>
+            <a:spLocks noGrp="1"/>
+          </p:cNvSpPr>
+          <p:nvPr>
+            <p:ph idx="1"/>
+          </p:nvPr>
+        </p:nvSpPr>
+        <p:spPr>
+          <a:xfrm>
+            <a:off x="1371598" y="5070346"/>
+            <a:ext cx="9496427" cy="1385266"/>
+          </a:xfrm>
+        </p:spPr>
+        <p:txBody>
+          <a:bodyPr>
+            <a:normAutofit lnSpcReduction="10000"/>
+          </a:bodyPr>
+          <a:lstStyle/>
+          <a:p>
+            <a:pPr marL="0" indent="0">
+              <a:buNone/>
+            </a:pPr>
+            <a:r>
+              <a:rPr lang="en-GB" sz="2000" dirty="0"/>
+              <a:t>Through substance painter, I had to export the textures I made separately, from there, within an unreal project I then imported the low poly model I had created which also creates a default material. After importing the textures, I then connected all the components of the texturing to the correct part of the material so that the model would appear </a:t>
+            </a:r>
+            <a:r>
+              <a:rPr lang="en-GB" sz="2000"/>
+              <a:t>correctly in-engine.</a:t>
+            </a:r>
+            <a:endParaRPr lang="en-GB" sz="2000" dirty="0"/>
+          </a:p>
+        </p:txBody>
+      </p:sp>
+    </p:spTree>
+    <p:extLst>
+      <p:ext uri="{BB962C8B-B14F-4D97-AF65-F5344CB8AC3E}">
+        <p14:creationId xmlns:p14="http://schemas.microsoft.com/office/powerpoint/2010/main" val="200340178"/>
+      </p:ext>
+    </p:extLst>
+  </p:cSld>
+  <p:clrMapOvr>
+    <a:masterClrMapping/>
+  </p:clrMapOvr>
+</p:sld>
+</file>
+
 <file path=ppt/theme/theme1.xml><?xml version="1.0" encoding="utf-8"?>
 <a:theme xmlns:a="http://schemas.openxmlformats.org/drawingml/2006/main" name="Office Theme">
   <a:themeElements>
